--- a/New Microsoft PowerPoint Presentation.pptx
+++ b/New Microsoft PowerPoint Presentation.pptx
@@ -2,14 +2,20 @@
 <file path=ppt/presentation.xml><?xml version="1.0" encoding="utf-8"?>
 <p:presentation xmlns:a="http://schemas.openxmlformats.org/drawingml/2006/main" xmlns:r="http://schemas.openxmlformats.org/officeDocument/2006/relationships" xmlns:p="http://schemas.openxmlformats.org/presentationml/2006/main" saveSubsetFonts="1">
   <p:sldMasterIdLst>
-    <p:sldMasterId id="2147483648" r:id="rId1"/>
+    <p:sldMasterId id="2147483719" r:id="rId1"/>
   </p:sldMasterIdLst>
   <p:notesMasterIdLst>
-    <p:notesMasterId r:id="rId4"/>
+    <p:notesMasterId r:id="rId10"/>
   </p:notesMasterIdLst>
   <p:sldIdLst>
     <p:sldId id="257" r:id="rId2"/>
-    <p:sldId id="258" r:id="rId3"/>
+    <p:sldId id="263" r:id="rId3"/>
+    <p:sldId id="258" r:id="rId4"/>
+    <p:sldId id="264" r:id="rId5"/>
+    <p:sldId id="259" r:id="rId6"/>
+    <p:sldId id="260" r:id="rId7"/>
+    <p:sldId id="261" r:id="rId8"/>
+    <p:sldId id="262" r:id="rId9"/>
   </p:sldIdLst>
   <p:sldSz cx="12192000" cy="6858000"/>
   <p:notesSz cx="6858000" cy="9144000"/>
@@ -108,6 +114,11 @@
       </a:defRPr>
     </a:lvl9pPr>
   </p:defaultTextStyle>
+  <p:extLst>
+    <p:ext uri="{EFAFB233-063F-42B5-8137-9DF3F51BA10A}">
+      <p15:sldGuideLst xmlns:p15="http://schemas.microsoft.com/office/powerpoint/2012/main"/>
+    </p:ext>
+  </p:extLst>
 </p:presentation>
 </file>
 
@@ -647,7 +658,7 @@
           <p:cNvPr id="2" name="Title 1">
             <a:extLst>
               <a:ext uri="{FF2B5EF4-FFF2-40B4-BE49-F238E27FC236}">
-                <a16:creationId xmlns:a16="http://schemas.microsoft.com/office/drawing/2014/main" id="{AE168BBE-24EC-E3F9-8FB8-F6F294E7B095}"/>
+                <a16:creationId xmlns:a16="http://schemas.microsoft.com/office/drawing/2014/main" id="{BFE172DF-AB3B-FF38-E3F7-13B5216DE63B}"/>
               </a:ext>
             </a:extLst>
           </p:cNvPr>
@@ -685,7 +696,7 @@
           <p:cNvPr id="3" name="Subtitle 2">
             <a:extLst>
               <a:ext uri="{FF2B5EF4-FFF2-40B4-BE49-F238E27FC236}">
-                <a16:creationId xmlns:a16="http://schemas.microsoft.com/office/drawing/2014/main" id="{BEBFCD19-0203-6F0C-96B2-A65FABC41C84}"/>
+                <a16:creationId xmlns:a16="http://schemas.microsoft.com/office/drawing/2014/main" id="{2FF8D0BB-D00B-A82E-1065-EA5CCC8411B2}"/>
               </a:ext>
             </a:extLst>
           </p:cNvPr>
@@ -756,7 +767,7 @@
           <p:cNvPr id="4" name="Date Placeholder 3">
             <a:extLst>
               <a:ext uri="{FF2B5EF4-FFF2-40B4-BE49-F238E27FC236}">
-                <a16:creationId xmlns:a16="http://schemas.microsoft.com/office/drawing/2014/main" id="{F004A313-947F-BC65-BBC1-EB744F66C437}"/>
+                <a16:creationId xmlns:a16="http://schemas.microsoft.com/office/drawing/2014/main" id="{7826BE3D-55B1-1637-137E-A14C0678EAF7}"/>
               </a:ext>
             </a:extLst>
           </p:cNvPr>
@@ -785,7 +796,7 @@
           <p:cNvPr id="5" name="Footer Placeholder 4">
             <a:extLst>
               <a:ext uri="{FF2B5EF4-FFF2-40B4-BE49-F238E27FC236}">
-                <a16:creationId xmlns:a16="http://schemas.microsoft.com/office/drawing/2014/main" id="{8E1C6105-C255-5A0C-BD2B-2E7072DAE89F}"/>
+                <a16:creationId xmlns:a16="http://schemas.microsoft.com/office/drawing/2014/main" id="{66A6219D-CFDA-6DC8-137F-4F38A8267EB0}"/>
               </a:ext>
             </a:extLst>
           </p:cNvPr>
@@ -810,7 +821,7 @@
           <p:cNvPr id="6" name="Slide Number Placeholder 5">
             <a:extLst>
               <a:ext uri="{FF2B5EF4-FFF2-40B4-BE49-F238E27FC236}">
-                <a16:creationId xmlns:a16="http://schemas.microsoft.com/office/drawing/2014/main" id="{609A9EB7-0CCA-8D11-C6D7-8FF9815C911B}"/>
+                <a16:creationId xmlns:a16="http://schemas.microsoft.com/office/drawing/2014/main" id="{A758B6C2-67F1-14FE-76DF-804690416AD1}"/>
               </a:ext>
             </a:extLst>
           </p:cNvPr>
@@ -837,7 +848,7 @@
     </p:spTree>
     <p:extLst>
       <p:ext uri="{BB962C8B-B14F-4D97-AF65-F5344CB8AC3E}">
-        <p14:creationId xmlns:p14="http://schemas.microsoft.com/office/powerpoint/2010/main" val="2825687807"/>
+        <p14:creationId xmlns:p14="http://schemas.microsoft.com/office/powerpoint/2010/main" val="4143521815"/>
       </p:ext>
     </p:extLst>
   </p:cSld>
@@ -869,7 +880,7 @@
           <p:cNvPr id="2" name="Title 1">
             <a:extLst>
               <a:ext uri="{FF2B5EF4-FFF2-40B4-BE49-F238E27FC236}">
-                <a16:creationId xmlns:a16="http://schemas.microsoft.com/office/drawing/2014/main" id="{092BC43E-8151-DD97-3C1D-E2F2092B45EF}"/>
+                <a16:creationId xmlns:a16="http://schemas.microsoft.com/office/drawing/2014/main" id="{AD18EA9C-1B4F-9B36-E902-F0048FB87981}"/>
               </a:ext>
             </a:extLst>
           </p:cNvPr>
@@ -898,7 +909,7 @@
           <p:cNvPr id="3" name="Vertical Text Placeholder 2">
             <a:extLst>
               <a:ext uri="{FF2B5EF4-FFF2-40B4-BE49-F238E27FC236}">
-                <a16:creationId xmlns:a16="http://schemas.microsoft.com/office/drawing/2014/main" id="{932FA497-C45D-E970-5898-49FDD3968C73}"/>
+                <a16:creationId xmlns:a16="http://schemas.microsoft.com/office/drawing/2014/main" id="{C0C6CAD2-4986-D70F-590A-5BA40B532A0C}"/>
               </a:ext>
             </a:extLst>
           </p:cNvPr>
@@ -956,7 +967,7 @@
           <p:cNvPr id="4" name="Date Placeholder 3">
             <a:extLst>
               <a:ext uri="{FF2B5EF4-FFF2-40B4-BE49-F238E27FC236}">
-                <a16:creationId xmlns:a16="http://schemas.microsoft.com/office/drawing/2014/main" id="{C54C476C-8B6C-F69E-E312-719CA83C73FC}"/>
+                <a16:creationId xmlns:a16="http://schemas.microsoft.com/office/drawing/2014/main" id="{10A9A6B5-1B47-273F-292D-D636E19BE7FF}"/>
               </a:ext>
             </a:extLst>
           </p:cNvPr>
@@ -985,7 +996,7 @@
           <p:cNvPr id="5" name="Footer Placeholder 4">
             <a:extLst>
               <a:ext uri="{FF2B5EF4-FFF2-40B4-BE49-F238E27FC236}">
-                <a16:creationId xmlns:a16="http://schemas.microsoft.com/office/drawing/2014/main" id="{D0FCA000-13AC-3A11-54A3-8C73E8B0E633}"/>
+                <a16:creationId xmlns:a16="http://schemas.microsoft.com/office/drawing/2014/main" id="{7B99940D-53CE-4070-C69C-163EEA608909}"/>
               </a:ext>
             </a:extLst>
           </p:cNvPr>
@@ -1010,7 +1021,7 @@
           <p:cNvPr id="6" name="Slide Number Placeholder 5">
             <a:extLst>
               <a:ext uri="{FF2B5EF4-FFF2-40B4-BE49-F238E27FC236}">
-                <a16:creationId xmlns:a16="http://schemas.microsoft.com/office/drawing/2014/main" id="{38B9F78D-7772-B85B-0E2B-2190C399D5C3}"/>
+                <a16:creationId xmlns:a16="http://schemas.microsoft.com/office/drawing/2014/main" id="{DD5E16FA-CD06-8721-E6D5-301CF3C80E7A}"/>
               </a:ext>
             </a:extLst>
           </p:cNvPr>
@@ -1037,7 +1048,7 @@
     </p:spTree>
     <p:extLst>
       <p:ext uri="{BB962C8B-B14F-4D97-AF65-F5344CB8AC3E}">
-        <p14:creationId xmlns:p14="http://schemas.microsoft.com/office/powerpoint/2010/main" val="4106136594"/>
+        <p14:creationId xmlns:p14="http://schemas.microsoft.com/office/powerpoint/2010/main" val="2032084996"/>
       </p:ext>
     </p:extLst>
   </p:cSld>
@@ -1069,7 +1080,7 @@
           <p:cNvPr id="2" name="Vertical Title 1">
             <a:extLst>
               <a:ext uri="{FF2B5EF4-FFF2-40B4-BE49-F238E27FC236}">
-                <a16:creationId xmlns:a16="http://schemas.microsoft.com/office/drawing/2014/main" id="{630B578C-9646-6023-EDA4-6037D85293D0}"/>
+                <a16:creationId xmlns:a16="http://schemas.microsoft.com/office/drawing/2014/main" id="{24D0CB69-C5C4-DFC1-D5D0-2B99D89D5B63}"/>
               </a:ext>
             </a:extLst>
           </p:cNvPr>
@@ -1103,7 +1114,7 @@
           <p:cNvPr id="3" name="Vertical Text Placeholder 2">
             <a:extLst>
               <a:ext uri="{FF2B5EF4-FFF2-40B4-BE49-F238E27FC236}">
-                <a16:creationId xmlns:a16="http://schemas.microsoft.com/office/drawing/2014/main" id="{AA644A14-8728-0A2A-5C52-933AEC3BB23E}"/>
+                <a16:creationId xmlns:a16="http://schemas.microsoft.com/office/drawing/2014/main" id="{7930E9B4-F999-B8ED-3577-CCBD77BD49CA}"/>
               </a:ext>
             </a:extLst>
           </p:cNvPr>
@@ -1166,7 +1177,7 @@
           <p:cNvPr id="4" name="Date Placeholder 3">
             <a:extLst>
               <a:ext uri="{FF2B5EF4-FFF2-40B4-BE49-F238E27FC236}">
-                <a16:creationId xmlns:a16="http://schemas.microsoft.com/office/drawing/2014/main" id="{5A101E83-0A91-2445-3197-05E6B124A4C0}"/>
+                <a16:creationId xmlns:a16="http://schemas.microsoft.com/office/drawing/2014/main" id="{4CCE3CE9-0B24-8159-C53B-B14808DAA971}"/>
               </a:ext>
             </a:extLst>
           </p:cNvPr>
@@ -1195,7 +1206,7 @@
           <p:cNvPr id="5" name="Footer Placeholder 4">
             <a:extLst>
               <a:ext uri="{FF2B5EF4-FFF2-40B4-BE49-F238E27FC236}">
-                <a16:creationId xmlns:a16="http://schemas.microsoft.com/office/drawing/2014/main" id="{17803D79-D6B9-D850-06C8-BC79C4A5F855}"/>
+                <a16:creationId xmlns:a16="http://schemas.microsoft.com/office/drawing/2014/main" id="{4E774680-A876-7A82-1B70-D220AC65EEF1}"/>
               </a:ext>
             </a:extLst>
           </p:cNvPr>
@@ -1220,7 +1231,7 @@
           <p:cNvPr id="6" name="Slide Number Placeholder 5">
             <a:extLst>
               <a:ext uri="{FF2B5EF4-FFF2-40B4-BE49-F238E27FC236}">
-                <a16:creationId xmlns:a16="http://schemas.microsoft.com/office/drawing/2014/main" id="{F6A9D8DC-2B81-CDA1-A75A-5421E8AF308F}"/>
+                <a16:creationId xmlns:a16="http://schemas.microsoft.com/office/drawing/2014/main" id="{23FE9BA2-61C1-F324-53F3-5EF711613CBB}"/>
               </a:ext>
             </a:extLst>
           </p:cNvPr>
@@ -1247,7 +1258,7 @@
     </p:spTree>
     <p:extLst>
       <p:ext uri="{BB962C8B-B14F-4D97-AF65-F5344CB8AC3E}">
-        <p14:creationId xmlns:p14="http://schemas.microsoft.com/office/powerpoint/2010/main" val="2512374574"/>
+        <p14:creationId xmlns:p14="http://schemas.microsoft.com/office/powerpoint/2010/main" val="3998521206"/>
       </p:ext>
     </p:extLst>
   </p:cSld>
@@ -1279,7 +1290,7 @@
           <p:cNvPr id="2" name="Title 1">
             <a:extLst>
               <a:ext uri="{FF2B5EF4-FFF2-40B4-BE49-F238E27FC236}">
-                <a16:creationId xmlns:a16="http://schemas.microsoft.com/office/drawing/2014/main" id="{32BC1714-35D4-3D85-E565-EB09C57B6870}"/>
+                <a16:creationId xmlns:a16="http://schemas.microsoft.com/office/drawing/2014/main" id="{A5167A6B-57B2-D81F-CA42-635108E1BD6F}"/>
               </a:ext>
             </a:extLst>
           </p:cNvPr>
@@ -1308,7 +1319,7 @@
           <p:cNvPr id="3" name="Content Placeholder 2">
             <a:extLst>
               <a:ext uri="{FF2B5EF4-FFF2-40B4-BE49-F238E27FC236}">
-                <a16:creationId xmlns:a16="http://schemas.microsoft.com/office/drawing/2014/main" id="{012695C8-D4CC-8881-6934-4951FA19F876}"/>
+                <a16:creationId xmlns:a16="http://schemas.microsoft.com/office/drawing/2014/main" id="{6CE077CD-8CD5-F2B0-AD0B-F004C65BF1DB}"/>
               </a:ext>
             </a:extLst>
           </p:cNvPr>
@@ -1366,7 +1377,7 @@
           <p:cNvPr id="4" name="Date Placeholder 3">
             <a:extLst>
               <a:ext uri="{FF2B5EF4-FFF2-40B4-BE49-F238E27FC236}">
-                <a16:creationId xmlns:a16="http://schemas.microsoft.com/office/drawing/2014/main" id="{D2972964-7B7A-EC45-1D67-B0C04737F0EB}"/>
+                <a16:creationId xmlns:a16="http://schemas.microsoft.com/office/drawing/2014/main" id="{51576D63-E65E-F9AA-2405-1A3588363AFD}"/>
               </a:ext>
             </a:extLst>
           </p:cNvPr>
@@ -1395,7 +1406,7 @@
           <p:cNvPr id="5" name="Footer Placeholder 4">
             <a:extLst>
               <a:ext uri="{FF2B5EF4-FFF2-40B4-BE49-F238E27FC236}">
-                <a16:creationId xmlns:a16="http://schemas.microsoft.com/office/drawing/2014/main" id="{43D14749-C7B4-B6E9-B543-8EEAF78EF6BD}"/>
+                <a16:creationId xmlns:a16="http://schemas.microsoft.com/office/drawing/2014/main" id="{C15B45CC-7117-A9E4-FF7B-B9989AA118AF}"/>
               </a:ext>
             </a:extLst>
           </p:cNvPr>
@@ -1420,7 +1431,7 @@
           <p:cNvPr id="6" name="Slide Number Placeholder 5">
             <a:extLst>
               <a:ext uri="{FF2B5EF4-FFF2-40B4-BE49-F238E27FC236}">
-                <a16:creationId xmlns:a16="http://schemas.microsoft.com/office/drawing/2014/main" id="{ADF8065C-6653-BF85-08F7-1108F5C0461B}"/>
+                <a16:creationId xmlns:a16="http://schemas.microsoft.com/office/drawing/2014/main" id="{67123B4C-BBFB-54F0-0CE0-0A7EDC5C3ED9}"/>
               </a:ext>
             </a:extLst>
           </p:cNvPr>
@@ -1447,7 +1458,7 @@
     </p:spTree>
     <p:extLst>
       <p:ext uri="{BB962C8B-B14F-4D97-AF65-F5344CB8AC3E}">
-        <p14:creationId xmlns:p14="http://schemas.microsoft.com/office/powerpoint/2010/main" val="1607775209"/>
+        <p14:creationId xmlns:p14="http://schemas.microsoft.com/office/powerpoint/2010/main" val="212147908"/>
       </p:ext>
     </p:extLst>
   </p:cSld>
@@ -1479,7 +1490,7 @@
           <p:cNvPr id="2" name="Title 1">
             <a:extLst>
               <a:ext uri="{FF2B5EF4-FFF2-40B4-BE49-F238E27FC236}">
-                <a16:creationId xmlns:a16="http://schemas.microsoft.com/office/drawing/2014/main" id="{AB365F4C-A057-CC1A-D74A-93CD9EEB37FB}"/>
+                <a16:creationId xmlns:a16="http://schemas.microsoft.com/office/drawing/2014/main" id="{8C0BE471-DB4A-F838-25B1-9D54B3160A3A}"/>
               </a:ext>
             </a:extLst>
           </p:cNvPr>
@@ -1517,7 +1528,7 @@
           <p:cNvPr id="3" name="Text Placeholder 2">
             <a:extLst>
               <a:ext uri="{FF2B5EF4-FFF2-40B4-BE49-F238E27FC236}">
-                <a16:creationId xmlns:a16="http://schemas.microsoft.com/office/drawing/2014/main" id="{CA04B3D9-FE10-F9AE-DD30-2E43C5CD2C6F}"/>
+                <a16:creationId xmlns:a16="http://schemas.microsoft.com/office/drawing/2014/main" id="{15809F53-05BB-735C-688A-4A9893013676}"/>
               </a:ext>
             </a:extLst>
           </p:cNvPr>
@@ -1642,7 +1653,7 @@
           <p:cNvPr id="4" name="Date Placeholder 3">
             <a:extLst>
               <a:ext uri="{FF2B5EF4-FFF2-40B4-BE49-F238E27FC236}">
-                <a16:creationId xmlns:a16="http://schemas.microsoft.com/office/drawing/2014/main" id="{AAE22FCE-31E1-9767-21BE-271AC52794BC}"/>
+                <a16:creationId xmlns:a16="http://schemas.microsoft.com/office/drawing/2014/main" id="{46F40C96-5AFA-45BD-0763-C4FDE8ACBE82}"/>
               </a:ext>
             </a:extLst>
           </p:cNvPr>
@@ -1671,7 +1682,7 @@
           <p:cNvPr id="5" name="Footer Placeholder 4">
             <a:extLst>
               <a:ext uri="{FF2B5EF4-FFF2-40B4-BE49-F238E27FC236}">
-                <a16:creationId xmlns:a16="http://schemas.microsoft.com/office/drawing/2014/main" id="{BBC2CCDE-3E93-A059-37D3-9169BA3D1A12}"/>
+                <a16:creationId xmlns:a16="http://schemas.microsoft.com/office/drawing/2014/main" id="{D0991B0F-81D9-359B-BAE1-164C01598AF7}"/>
               </a:ext>
             </a:extLst>
           </p:cNvPr>
@@ -1696,7 +1707,7 @@
           <p:cNvPr id="6" name="Slide Number Placeholder 5">
             <a:extLst>
               <a:ext uri="{FF2B5EF4-FFF2-40B4-BE49-F238E27FC236}">
-                <a16:creationId xmlns:a16="http://schemas.microsoft.com/office/drawing/2014/main" id="{A7DF5D12-9093-6FA6-A454-51339767472C}"/>
+                <a16:creationId xmlns:a16="http://schemas.microsoft.com/office/drawing/2014/main" id="{29FEE697-1C97-C63A-D35F-7E199381A72F}"/>
               </a:ext>
             </a:extLst>
           </p:cNvPr>
@@ -1723,7 +1734,7 @@
     </p:spTree>
     <p:extLst>
       <p:ext uri="{BB962C8B-B14F-4D97-AF65-F5344CB8AC3E}">
-        <p14:creationId xmlns:p14="http://schemas.microsoft.com/office/powerpoint/2010/main" val="3014345723"/>
+        <p14:creationId xmlns:p14="http://schemas.microsoft.com/office/powerpoint/2010/main" val="859345090"/>
       </p:ext>
     </p:extLst>
   </p:cSld>
@@ -1755,7 +1766,7 @@
           <p:cNvPr id="2" name="Title 1">
             <a:extLst>
               <a:ext uri="{FF2B5EF4-FFF2-40B4-BE49-F238E27FC236}">
-                <a16:creationId xmlns:a16="http://schemas.microsoft.com/office/drawing/2014/main" id="{A2170551-736D-19B6-8C56-ED2D407F6B0D}"/>
+                <a16:creationId xmlns:a16="http://schemas.microsoft.com/office/drawing/2014/main" id="{D275DFF7-BCD5-E717-5E50-F8150EB4AE70}"/>
               </a:ext>
             </a:extLst>
           </p:cNvPr>
@@ -1784,7 +1795,7 @@
           <p:cNvPr id="3" name="Content Placeholder 2">
             <a:extLst>
               <a:ext uri="{FF2B5EF4-FFF2-40B4-BE49-F238E27FC236}">
-                <a16:creationId xmlns:a16="http://schemas.microsoft.com/office/drawing/2014/main" id="{76FA0414-03D1-807C-8E18-F64BBE9FD187}"/>
+                <a16:creationId xmlns:a16="http://schemas.microsoft.com/office/drawing/2014/main" id="{56BEA8BF-691F-2F91-DE14-775FB39A7E22}"/>
               </a:ext>
             </a:extLst>
           </p:cNvPr>
@@ -1847,7 +1858,7 @@
           <p:cNvPr id="4" name="Content Placeholder 3">
             <a:extLst>
               <a:ext uri="{FF2B5EF4-FFF2-40B4-BE49-F238E27FC236}">
-                <a16:creationId xmlns:a16="http://schemas.microsoft.com/office/drawing/2014/main" id="{5F93A473-65DC-E5A6-7059-6917769E3363}"/>
+                <a16:creationId xmlns:a16="http://schemas.microsoft.com/office/drawing/2014/main" id="{F9165AE7-A42E-0D2B-0FEA-8ABFC8936254}"/>
               </a:ext>
             </a:extLst>
           </p:cNvPr>
@@ -1910,7 +1921,7 @@
           <p:cNvPr id="5" name="Date Placeholder 4">
             <a:extLst>
               <a:ext uri="{FF2B5EF4-FFF2-40B4-BE49-F238E27FC236}">
-                <a16:creationId xmlns:a16="http://schemas.microsoft.com/office/drawing/2014/main" id="{345B20B8-97B2-46A3-FE42-A5AB9D3DCB87}"/>
+                <a16:creationId xmlns:a16="http://schemas.microsoft.com/office/drawing/2014/main" id="{51A9D822-1FEA-CA33-C066-C6921D83D9CE}"/>
               </a:ext>
             </a:extLst>
           </p:cNvPr>
@@ -1939,7 +1950,7 @@
           <p:cNvPr id="6" name="Footer Placeholder 5">
             <a:extLst>
               <a:ext uri="{FF2B5EF4-FFF2-40B4-BE49-F238E27FC236}">
-                <a16:creationId xmlns:a16="http://schemas.microsoft.com/office/drawing/2014/main" id="{260F2074-ACAE-65BC-DFD4-A415B897D778}"/>
+                <a16:creationId xmlns:a16="http://schemas.microsoft.com/office/drawing/2014/main" id="{FFEDF7A1-1081-5388-12F6-C1D5C14CE16B}"/>
               </a:ext>
             </a:extLst>
           </p:cNvPr>
@@ -1964,7 +1975,7 @@
           <p:cNvPr id="7" name="Slide Number Placeholder 6">
             <a:extLst>
               <a:ext uri="{FF2B5EF4-FFF2-40B4-BE49-F238E27FC236}">
-                <a16:creationId xmlns:a16="http://schemas.microsoft.com/office/drawing/2014/main" id="{15D89574-3771-9249-5665-E6737FADAB40}"/>
+                <a16:creationId xmlns:a16="http://schemas.microsoft.com/office/drawing/2014/main" id="{7ED11C3C-4DB2-AF77-F7C6-17FA80CF1195}"/>
               </a:ext>
             </a:extLst>
           </p:cNvPr>
@@ -1991,7 +2002,7 @@
     </p:spTree>
     <p:extLst>
       <p:ext uri="{BB962C8B-B14F-4D97-AF65-F5344CB8AC3E}">
-        <p14:creationId xmlns:p14="http://schemas.microsoft.com/office/powerpoint/2010/main" val="946073454"/>
+        <p14:creationId xmlns:p14="http://schemas.microsoft.com/office/powerpoint/2010/main" val="216125598"/>
       </p:ext>
     </p:extLst>
   </p:cSld>
@@ -2023,7 +2034,7 @@
           <p:cNvPr id="2" name="Title 1">
             <a:extLst>
               <a:ext uri="{FF2B5EF4-FFF2-40B4-BE49-F238E27FC236}">
-                <a16:creationId xmlns:a16="http://schemas.microsoft.com/office/drawing/2014/main" id="{C68448FD-C2D5-A600-1B65-B7840AFF9DDD}"/>
+                <a16:creationId xmlns:a16="http://schemas.microsoft.com/office/drawing/2014/main" id="{276A7B7E-12E1-2507-B86A-5BF1B34BB08C}"/>
               </a:ext>
             </a:extLst>
           </p:cNvPr>
@@ -2057,7 +2068,7 @@
           <p:cNvPr id="3" name="Text Placeholder 2">
             <a:extLst>
               <a:ext uri="{FF2B5EF4-FFF2-40B4-BE49-F238E27FC236}">
-                <a16:creationId xmlns:a16="http://schemas.microsoft.com/office/drawing/2014/main" id="{C7119441-C5A8-03D4-61C9-75FF3FE91576}"/>
+                <a16:creationId xmlns:a16="http://schemas.microsoft.com/office/drawing/2014/main" id="{2A4B2DA6-E5C8-6516-5022-6228AAC87632}"/>
               </a:ext>
             </a:extLst>
           </p:cNvPr>
@@ -2128,7 +2139,7 @@
           <p:cNvPr id="4" name="Content Placeholder 3">
             <a:extLst>
               <a:ext uri="{FF2B5EF4-FFF2-40B4-BE49-F238E27FC236}">
-                <a16:creationId xmlns:a16="http://schemas.microsoft.com/office/drawing/2014/main" id="{24F60D00-27DE-A7B7-8556-C5F24C534A1A}"/>
+                <a16:creationId xmlns:a16="http://schemas.microsoft.com/office/drawing/2014/main" id="{0B19055B-716F-0632-B8AC-E3DAF457F58E}"/>
               </a:ext>
             </a:extLst>
           </p:cNvPr>
@@ -2191,7 +2202,7 @@
           <p:cNvPr id="5" name="Text Placeholder 4">
             <a:extLst>
               <a:ext uri="{FF2B5EF4-FFF2-40B4-BE49-F238E27FC236}">
-                <a16:creationId xmlns:a16="http://schemas.microsoft.com/office/drawing/2014/main" id="{4A2BB40A-1E1B-1629-801B-27D0E13433A2}"/>
+                <a16:creationId xmlns:a16="http://schemas.microsoft.com/office/drawing/2014/main" id="{C64773DC-0920-7F6E-5FB8-27E07134AE37}"/>
               </a:ext>
             </a:extLst>
           </p:cNvPr>
@@ -2262,7 +2273,7 @@
           <p:cNvPr id="6" name="Content Placeholder 5">
             <a:extLst>
               <a:ext uri="{FF2B5EF4-FFF2-40B4-BE49-F238E27FC236}">
-                <a16:creationId xmlns:a16="http://schemas.microsoft.com/office/drawing/2014/main" id="{0421B04E-7CC7-2018-FE34-8256D40BA4B9}"/>
+                <a16:creationId xmlns:a16="http://schemas.microsoft.com/office/drawing/2014/main" id="{2011AEEF-FA42-27B8-4464-7D617E798181}"/>
               </a:ext>
             </a:extLst>
           </p:cNvPr>
@@ -2325,7 +2336,7 @@
           <p:cNvPr id="7" name="Date Placeholder 6">
             <a:extLst>
               <a:ext uri="{FF2B5EF4-FFF2-40B4-BE49-F238E27FC236}">
-                <a16:creationId xmlns:a16="http://schemas.microsoft.com/office/drawing/2014/main" id="{6139DB19-3178-D9B7-CEEB-3BA0DDE6F23D}"/>
+                <a16:creationId xmlns:a16="http://schemas.microsoft.com/office/drawing/2014/main" id="{19B1D710-18C8-4B3E-75D7-BAD4E6856351}"/>
               </a:ext>
             </a:extLst>
           </p:cNvPr>
@@ -2354,7 +2365,7 @@
           <p:cNvPr id="8" name="Footer Placeholder 7">
             <a:extLst>
               <a:ext uri="{FF2B5EF4-FFF2-40B4-BE49-F238E27FC236}">
-                <a16:creationId xmlns:a16="http://schemas.microsoft.com/office/drawing/2014/main" id="{10D05FAD-07F5-B82E-D241-46C17A69ADAB}"/>
+                <a16:creationId xmlns:a16="http://schemas.microsoft.com/office/drawing/2014/main" id="{A82087C6-50CB-A5F8-3522-5D781C4579FF}"/>
               </a:ext>
             </a:extLst>
           </p:cNvPr>
@@ -2379,7 +2390,7 @@
           <p:cNvPr id="9" name="Slide Number Placeholder 8">
             <a:extLst>
               <a:ext uri="{FF2B5EF4-FFF2-40B4-BE49-F238E27FC236}">
-                <a16:creationId xmlns:a16="http://schemas.microsoft.com/office/drawing/2014/main" id="{005B54AA-FC8E-7F35-0F70-BC40D8B542BF}"/>
+                <a16:creationId xmlns:a16="http://schemas.microsoft.com/office/drawing/2014/main" id="{017877BF-197E-55C0-A330-E23D7589A7ED}"/>
               </a:ext>
             </a:extLst>
           </p:cNvPr>
@@ -2406,7 +2417,7 @@
     </p:spTree>
     <p:extLst>
       <p:ext uri="{BB962C8B-B14F-4D97-AF65-F5344CB8AC3E}">
-        <p14:creationId xmlns:p14="http://schemas.microsoft.com/office/powerpoint/2010/main" val="966232132"/>
+        <p14:creationId xmlns:p14="http://schemas.microsoft.com/office/powerpoint/2010/main" val="2885426120"/>
       </p:ext>
     </p:extLst>
   </p:cSld>
@@ -2438,7 +2449,7 @@
           <p:cNvPr id="2" name="Title 1">
             <a:extLst>
               <a:ext uri="{FF2B5EF4-FFF2-40B4-BE49-F238E27FC236}">
-                <a16:creationId xmlns:a16="http://schemas.microsoft.com/office/drawing/2014/main" id="{8843343B-3327-3847-ED06-4FAB34DCEF0D}"/>
+                <a16:creationId xmlns:a16="http://schemas.microsoft.com/office/drawing/2014/main" id="{5FA5D361-8EDE-97F6-8F4B-C1F55D11FD97}"/>
               </a:ext>
             </a:extLst>
           </p:cNvPr>
@@ -2467,7 +2478,7 @@
           <p:cNvPr id="3" name="Date Placeholder 2">
             <a:extLst>
               <a:ext uri="{FF2B5EF4-FFF2-40B4-BE49-F238E27FC236}">
-                <a16:creationId xmlns:a16="http://schemas.microsoft.com/office/drawing/2014/main" id="{10D981B8-BAB8-4960-98A2-4084CE8E70BC}"/>
+                <a16:creationId xmlns:a16="http://schemas.microsoft.com/office/drawing/2014/main" id="{4B49886A-6991-F271-4ABD-5F150024DDF0}"/>
               </a:ext>
             </a:extLst>
           </p:cNvPr>
@@ -2496,7 +2507,7 @@
           <p:cNvPr id="4" name="Footer Placeholder 3">
             <a:extLst>
               <a:ext uri="{FF2B5EF4-FFF2-40B4-BE49-F238E27FC236}">
-                <a16:creationId xmlns:a16="http://schemas.microsoft.com/office/drawing/2014/main" id="{0311AF58-3C00-EA0B-6772-3CF0804206DE}"/>
+                <a16:creationId xmlns:a16="http://schemas.microsoft.com/office/drawing/2014/main" id="{B6E18AC4-9E0A-8D76-A230-9306F270147B}"/>
               </a:ext>
             </a:extLst>
           </p:cNvPr>
@@ -2521,7 +2532,7 @@
           <p:cNvPr id="5" name="Slide Number Placeholder 4">
             <a:extLst>
               <a:ext uri="{FF2B5EF4-FFF2-40B4-BE49-F238E27FC236}">
-                <a16:creationId xmlns:a16="http://schemas.microsoft.com/office/drawing/2014/main" id="{B47C021A-2560-D23D-EE72-BA38C996F2B1}"/>
+                <a16:creationId xmlns:a16="http://schemas.microsoft.com/office/drawing/2014/main" id="{6037DC1E-1B52-503D-FE34-93409D41D9D9}"/>
               </a:ext>
             </a:extLst>
           </p:cNvPr>
@@ -2548,7 +2559,7 @@
     </p:spTree>
     <p:extLst>
       <p:ext uri="{BB962C8B-B14F-4D97-AF65-F5344CB8AC3E}">
-        <p14:creationId xmlns:p14="http://schemas.microsoft.com/office/powerpoint/2010/main" val="1876707037"/>
+        <p14:creationId xmlns:p14="http://schemas.microsoft.com/office/powerpoint/2010/main" val="1994579455"/>
       </p:ext>
     </p:extLst>
   </p:cSld>
@@ -2580,7 +2591,7 @@
           <p:cNvPr id="2" name="Date Placeholder 1">
             <a:extLst>
               <a:ext uri="{FF2B5EF4-FFF2-40B4-BE49-F238E27FC236}">
-                <a16:creationId xmlns:a16="http://schemas.microsoft.com/office/drawing/2014/main" id="{52956DED-A5C9-421B-53A9-55E69388E94B}"/>
+                <a16:creationId xmlns:a16="http://schemas.microsoft.com/office/drawing/2014/main" id="{1499039D-93B7-1408-AD5B-79A2642DBBC7}"/>
               </a:ext>
             </a:extLst>
           </p:cNvPr>
@@ -2609,7 +2620,7 @@
           <p:cNvPr id="3" name="Footer Placeholder 2">
             <a:extLst>
               <a:ext uri="{FF2B5EF4-FFF2-40B4-BE49-F238E27FC236}">
-                <a16:creationId xmlns:a16="http://schemas.microsoft.com/office/drawing/2014/main" id="{6D544B36-5FE6-CF06-CDB9-6A4E4A0280A2}"/>
+                <a16:creationId xmlns:a16="http://schemas.microsoft.com/office/drawing/2014/main" id="{D3F50AD7-3743-5573-69F5-A041E1006A0F}"/>
               </a:ext>
             </a:extLst>
           </p:cNvPr>
@@ -2634,7 +2645,7 @@
           <p:cNvPr id="4" name="Slide Number Placeholder 3">
             <a:extLst>
               <a:ext uri="{FF2B5EF4-FFF2-40B4-BE49-F238E27FC236}">
-                <a16:creationId xmlns:a16="http://schemas.microsoft.com/office/drawing/2014/main" id="{8106D328-2991-D86E-A829-D6E2F21CF151}"/>
+                <a16:creationId xmlns:a16="http://schemas.microsoft.com/office/drawing/2014/main" id="{5BAB68CB-7442-84AF-5B05-C0FEF14842A3}"/>
               </a:ext>
             </a:extLst>
           </p:cNvPr>
@@ -2661,7 +2672,7 @@
     </p:spTree>
     <p:extLst>
       <p:ext uri="{BB962C8B-B14F-4D97-AF65-F5344CB8AC3E}">
-        <p14:creationId xmlns:p14="http://schemas.microsoft.com/office/powerpoint/2010/main" val="1510795672"/>
+        <p14:creationId xmlns:p14="http://schemas.microsoft.com/office/powerpoint/2010/main" val="3044858809"/>
       </p:ext>
     </p:extLst>
   </p:cSld>
@@ -2693,7 +2704,7 @@
           <p:cNvPr id="2" name="Title 1">
             <a:extLst>
               <a:ext uri="{FF2B5EF4-FFF2-40B4-BE49-F238E27FC236}">
-                <a16:creationId xmlns:a16="http://schemas.microsoft.com/office/drawing/2014/main" id="{131C496A-7E94-BA96-8BD4-180C15F0672B}"/>
+                <a16:creationId xmlns:a16="http://schemas.microsoft.com/office/drawing/2014/main" id="{7BA2E370-249C-00D2-A248-D4AD569373D7}"/>
               </a:ext>
             </a:extLst>
           </p:cNvPr>
@@ -2731,7 +2742,7 @@
           <p:cNvPr id="3" name="Content Placeholder 2">
             <a:extLst>
               <a:ext uri="{FF2B5EF4-FFF2-40B4-BE49-F238E27FC236}">
-                <a16:creationId xmlns:a16="http://schemas.microsoft.com/office/drawing/2014/main" id="{1FEED7FC-A67E-1DAD-B7FD-084B1AD58C70}"/>
+                <a16:creationId xmlns:a16="http://schemas.microsoft.com/office/drawing/2014/main" id="{87F7D7C3-D2A8-CE75-4D1A-9FDA3235AF11}"/>
               </a:ext>
             </a:extLst>
           </p:cNvPr>
@@ -2822,7 +2833,7 @@
           <p:cNvPr id="4" name="Text Placeholder 3">
             <a:extLst>
               <a:ext uri="{FF2B5EF4-FFF2-40B4-BE49-F238E27FC236}">
-                <a16:creationId xmlns:a16="http://schemas.microsoft.com/office/drawing/2014/main" id="{35F66578-A9FA-9B57-9988-B82B31A591EC}"/>
+                <a16:creationId xmlns:a16="http://schemas.microsoft.com/office/drawing/2014/main" id="{453F6AD2-0207-253E-C74B-71B0218A50DE}"/>
               </a:ext>
             </a:extLst>
           </p:cNvPr>
@@ -2893,7 +2904,7 @@
           <p:cNvPr id="5" name="Date Placeholder 4">
             <a:extLst>
               <a:ext uri="{FF2B5EF4-FFF2-40B4-BE49-F238E27FC236}">
-                <a16:creationId xmlns:a16="http://schemas.microsoft.com/office/drawing/2014/main" id="{BE674BFA-9B7E-D02F-98BC-A32C5FD19DBF}"/>
+                <a16:creationId xmlns:a16="http://schemas.microsoft.com/office/drawing/2014/main" id="{3A363706-7416-6F1B-778A-40078C41FD52}"/>
               </a:ext>
             </a:extLst>
           </p:cNvPr>
@@ -2922,7 +2933,7 @@
           <p:cNvPr id="6" name="Footer Placeholder 5">
             <a:extLst>
               <a:ext uri="{FF2B5EF4-FFF2-40B4-BE49-F238E27FC236}">
-                <a16:creationId xmlns:a16="http://schemas.microsoft.com/office/drawing/2014/main" id="{814EA658-3763-CE96-F484-1A7267F70A1A}"/>
+                <a16:creationId xmlns:a16="http://schemas.microsoft.com/office/drawing/2014/main" id="{2A448F09-D60D-0E40-5525-E17DD71F1739}"/>
               </a:ext>
             </a:extLst>
           </p:cNvPr>
@@ -2947,7 +2958,7 @@
           <p:cNvPr id="7" name="Slide Number Placeholder 6">
             <a:extLst>
               <a:ext uri="{FF2B5EF4-FFF2-40B4-BE49-F238E27FC236}">
-                <a16:creationId xmlns:a16="http://schemas.microsoft.com/office/drawing/2014/main" id="{B8DB107B-6B5C-C6CB-7776-83839ECEB701}"/>
+                <a16:creationId xmlns:a16="http://schemas.microsoft.com/office/drawing/2014/main" id="{B642CB73-0FC9-F272-3601-4EF40A1B06E8}"/>
               </a:ext>
             </a:extLst>
           </p:cNvPr>
@@ -2974,7 +2985,7 @@
     </p:spTree>
     <p:extLst>
       <p:ext uri="{BB962C8B-B14F-4D97-AF65-F5344CB8AC3E}">
-        <p14:creationId xmlns:p14="http://schemas.microsoft.com/office/powerpoint/2010/main" val="1536265362"/>
+        <p14:creationId xmlns:p14="http://schemas.microsoft.com/office/powerpoint/2010/main" val="1579584341"/>
       </p:ext>
     </p:extLst>
   </p:cSld>
@@ -3006,7 +3017,7 @@
           <p:cNvPr id="2" name="Title 1">
             <a:extLst>
               <a:ext uri="{FF2B5EF4-FFF2-40B4-BE49-F238E27FC236}">
-                <a16:creationId xmlns:a16="http://schemas.microsoft.com/office/drawing/2014/main" id="{5F734EE2-6CFF-3089-4503-E80679FA45D7}"/>
+                <a16:creationId xmlns:a16="http://schemas.microsoft.com/office/drawing/2014/main" id="{EC1D5F23-0DE5-E6B2-B28C-573A2660D402}"/>
               </a:ext>
             </a:extLst>
           </p:cNvPr>
@@ -3044,7 +3055,7 @@
           <p:cNvPr id="3" name="Picture Placeholder 2">
             <a:extLst>
               <a:ext uri="{FF2B5EF4-FFF2-40B4-BE49-F238E27FC236}">
-                <a16:creationId xmlns:a16="http://schemas.microsoft.com/office/drawing/2014/main" id="{596B1825-2042-5CA7-5873-7A0DA943C418}"/>
+                <a16:creationId xmlns:a16="http://schemas.microsoft.com/office/drawing/2014/main" id="{BB78AA7A-AE26-1A17-FC25-802162AFBEFD}"/>
               </a:ext>
             </a:extLst>
           </p:cNvPr>
@@ -3111,7 +3122,7 @@
           <p:cNvPr id="4" name="Text Placeholder 3">
             <a:extLst>
               <a:ext uri="{FF2B5EF4-FFF2-40B4-BE49-F238E27FC236}">
-                <a16:creationId xmlns:a16="http://schemas.microsoft.com/office/drawing/2014/main" id="{A9D20B37-CB7A-5A80-00B2-5A47B34E0B01}"/>
+                <a16:creationId xmlns:a16="http://schemas.microsoft.com/office/drawing/2014/main" id="{031195A4-0960-8E0E-1727-80BB2AE8AC57}"/>
               </a:ext>
             </a:extLst>
           </p:cNvPr>
@@ -3182,7 +3193,7 @@
           <p:cNvPr id="5" name="Date Placeholder 4">
             <a:extLst>
               <a:ext uri="{FF2B5EF4-FFF2-40B4-BE49-F238E27FC236}">
-                <a16:creationId xmlns:a16="http://schemas.microsoft.com/office/drawing/2014/main" id="{15284343-01D8-0D2A-D06E-5C39E9F6B3C6}"/>
+                <a16:creationId xmlns:a16="http://schemas.microsoft.com/office/drawing/2014/main" id="{3DC04DA3-D67C-9A3C-7F26-C739E7DC3E88}"/>
               </a:ext>
             </a:extLst>
           </p:cNvPr>
@@ -3211,7 +3222,7 @@
           <p:cNvPr id="6" name="Footer Placeholder 5">
             <a:extLst>
               <a:ext uri="{FF2B5EF4-FFF2-40B4-BE49-F238E27FC236}">
-                <a16:creationId xmlns:a16="http://schemas.microsoft.com/office/drawing/2014/main" id="{0B190C1B-1330-6F98-D449-059AFBBD51AD}"/>
+                <a16:creationId xmlns:a16="http://schemas.microsoft.com/office/drawing/2014/main" id="{EF5AFAF6-5178-46D0-B348-536829F63587}"/>
               </a:ext>
             </a:extLst>
           </p:cNvPr>
@@ -3236,7 +3247,7 @@
           <p:cNvPr id="7" name="Slide Number Placeholder 6">
             <a:extLst>
               <a:ext uri="{FF2B5EF4-FFF2-40B4-BE49-F238E27FC236}">
-                <a16:creationId xmlns:a16="http://schemas.microsoft.com/office/drawing/2014/main" id="{ECDEABF8-D856-12D7-4BC7-AB9F4E5DEC47}"/>
+                <a16:creationId xmlns:a16="http://schemas.microsoft.com/office/drawing/2014/main" id="{2628FBFC-1DA6-7F31-C501-901644A3FE8B}"/>
               </a:ext>
             </a:extLst>
           </p:cNvPr>
@@ -3263,7 +3274,7 @@
     </p:spTree>
     <p:extLst>
       <p:ext uri="{BB962C8B-B14F-4D97-AF65-F5344CB8AC3E}">
-        <p14:creationId xmlns:p14="http://schemas.microsoft.com/office/powerpoint/2010/main" val="3747201994"/>
+        <p14:creationId xmlns:p14="http://schemas.microsoft.com/office/powerpoint/2010/main" val="4220915018"/>
       </p:ext>
     </p:extLst>
   </p:cSld>
@@ -3300,7 +3311,7 @@
           <p:cNvPr id="2" name="Title Placeholder 1">
             <a:extLst>
               <a:ext uri="{FF2B5EF4-FFF2-40B4-BE49-F238E27FC236}">
-                <a16:creationId xmlns:a16="http://schemas.microsoft.com/office/drawing/2014/main" id="{757B30E9-6667-A8CA-4DB5-1955DBA7322B}"/>
+                <a16:creationId xmlns:a16="http://schemas.microsoft.com/office/drawing/2014/main" id="{1B1BD158-62C5-25DF-AB34-B3FBB3B0C1CC}"/>
               </a:ext>
             </a:extLst>
           </p:cNvPr>
@@ -3339,7 +3350,7 @@
           <p:cNvPr id="3" name="Text Placeholder 2">
             <a:extLst>
               <a:ext uri="{FF2B5EF4-FFF2-40B4-BE49-F238E27FC236}">
-                <a16:creationId xmlns:a16="http://schemas.microsoft.com/office/drawing/2014/main" id="{0FD2CB25-4EC6-C792-71A5-D436CAB0703B}"/>
+                <a16:creationId xmlns:a16="http://schemas.microsoft.com/office/drawing/2014/main" id="{C4B178BA-80C2-D758-53BA-53BD82C06480}"/>
               </a:ext>
             </a:extLst>
           </p:cNvPr>
@@ -3407,7 +3418,7 @@
           <p:cNvPr id="4" name="Date Placeholder 3">
             <a:extLst>
               <a:ext uri="{FF2B5EF4-FFF2-40B4-BE49-F238E27FC236}">
-                <a16:creationId xmlns:a16="http://schemas.microsoft.com/office/drawing/2014/main" id="{7DE6DE13-23AE-F1AB-20FC-F380C8A6357F}"/>
+                <a16:creationId xmlns:a16="http://schemas.microsoft.com/office/drawing/2014/main" id="{D2291689-BBE4-E537-CAF8-271D2BFE91DB}"/>
               </a:ext>
             </a:extLst>
           </p:cNvPr>
@@ -3454,7 +3465,7 @@
           <p:cNvPr id="5" name="Footer Placeholder 4">
             <a:extLst>
               <a:ext uri="{FF2B5EF4-FFF2-40B4-BE49-F238E27FC236}">
-                <a16:creationId xmlns:a16="http://schemas.microsoft.com/office/drawing/2014/main" id="{26023891-27F9-6FB1-DDCC-A2850A4985BC}"/>
+                <a16:creationId xmlns:a16="http://schemas.microsoft.com/office/drawing/2014/main" id="{B9973335-9EA1-B6D6-E20C-8A55A71573F1}"/>
               </a:ext>
             </a:extLst>
           </p:cNvPr>
@@ -3497,7 +3508,7 @@
           <p:cNvPr id="6" name="Slide Number Placeholder 5">
             <a:extLst>
               <a:ext uri="{FF2B5EF4-FFF2-40B4-BE49-F238E27FC236}">
-                <a16:creationId xmlns:a16="http://schemas.microsoft.com/office/drawing/2014/main" id="{2D162B27-E3D9-3796-5787-B9A257C11C30}"/>
+                <a16:creationId xmlns:a16="http://schemas.microsoft.com/office/drawing/2014/main" id="{88D54B51-9BC6-7BFE-C39D-15ABDFB861C3}"/>
               </a:ext>
             </a:extLst>
           </p:cNvPr>
@@ -3542,23 +3553,23 @@
     </p:spTree>
     <p:extLst>
       <p:ext uri="{BB962C8B-B14F-4D97-AF65-F5344CB8AC3E}">
-        <p14:creationId xmlns:p14="http://schemas.microsoft.com/office/powerpoint/2010/main" val="1872098806"/>
+        <p14:creationId xmlns:p14="http://schemas.microsoft.com/office/powerpoint/2010/main" val="3816449483"/>
       </p:ext>
     </p:extLst>
   </p:cSld>
   <p:clrMap bg1="lt1" tx1="dk1" bg2="lt2" tx2="dk2" accent1="accent1" accent2="accent2" accent3="accent3" accent4="accent4" accent5="accent5" accent6="accent6" hlink="hlink" folHlink="folHlink"/>
   <p:sldLayoutIdLst>
-    <p:sldLayoutId id="2147483649" r:id="rId1"/>
-    <p:sldLayoutId id="2147483650" r:id="rId2"/>
-    <p:sldLayoutId id="2147483651" r:id="rId3"/>
-    <p:sldLayoutId id="2147483652" r:id="rId4"/>
-    <p:sldLayoutId id="2147483653" r:id="rId5"/>
-    <p:sldLayoutId id="2147483654" r:id="rId6"/>
-    <p:sldLayoutId id="2147483655" r:id="rId7"/>
-    <p:sldLayoutId id="2147483656" r:id="rId8"/>
-    <p:sldLayoutId id="2147483657" r:id="rId9"/>
-    <p:sldLayoutId id="2147483658" r:id="rId10"/>
-    <p:sldLayoutId id="2147483659" r:id="rId11"/>
+    <p:sldLayoutId id="2147483720" r:id="rId1"/>
+    <p:sldLayoutId id="2147483721" r:id="rId2"/>
+    <p:sldLayoutId id="2147483722" r:id="rId3"/>
+    <p:sldLayoutId id="2147483723" r:id="rId4"/>
+    <p:sldLayoutId id="2147483724" r:id="rId5"/>
+    <p:sldLayoutId id="2147483725" r:id="rId6"/>
+    <p:sldLayoutId id="2147483726" r:id="rId7"/>
+    <p:sldLayoutId id="2147483727" r:id="rId8"/>
+    <p:sldLayoutId id="2147483728" r:id="rId9"/>
+    <p:sldLayoutId id="2147483729" r:id="rId10"/>
+    <p:sldLayoutId id="2147483730" r:id="rId11"/>
   </p:sldLayoutIdLst>
   <p:txStyles>
     <p:titleStyle>
@@ -3840,6 +3851,11 @@
       </a:lvl9pPr>
     </p:otherStyle>
   </p:txStyles>
+  <p:extLst>
+    <p:ext uri="{27BBF7A9-308A-43DC-89C8-2F10F3537804}">
+      <p15:sldGuideLst xmlns:p15="http://schemas.microsoft.com/office/powerpoint/2012/main"/>
+    </p:ext>
+  </p:extLst>
 </p:sldMaster>
 </file>
 
@@ -4094,6 +4110,18 @@
               <a:buNone/>
             </a:pPr>
             <a:r>
+              <a:rPr lang="he-IL" sz="5400" b="1" i="0" u="none" strike="noStrike" cap="none" dirty="0">
+                <a:solidFill>
+                  <a:schemeClr val="dk1"/>
+                </a:solidFill>
+                <a:latin typeface="Calibri"/>
+                <a:ea typeface="Calibri"/>
+                <a:cs typeface="Calibri"/>
+                <a:sym typeface="Calibri"/>
+              </a:rPr>
+              <a:t>1.</a:t>
+            </a:r>
+            <a:r>
               <a:rPr lang="en-US" sz="5400" b="1" i="0" u="none" strike="noStrike" cap="none" dirty="0">
                 <a:solidFill>
                   <a:schemeClr val="dk1"/>
@@ -5120,6 +5148,625 @@
 <file path=ppt/slides/slide2.xml><?xml version="1.0" encoding="utf-8"?>
 <p:sld xmlns:a="http://schemas.openxmlformats.org/drawingml/2006/main" xmlns:r="http://schemas.openxmlformats.org/officeDocument/2006/relationships" xmlns:p="http://schemas.openxmlformats.org/presentationml/2006/main">
   <p:cSld>
+    <p:spTree>
+      <p:nvGrpSpPr>
+        <p:cNvPr id="1" name=""/>
+        <p:cNvGrpSpPr/>
+        <p:nvPr/>
+      </p:nvGrpSpPr>
+      <p:grpSpPr>
+        <a:xfrm>
+          <a:off x="0" y="0"/>
+          <a:ext cx="0" cy="0"/>
+          <a:chOff x="0" y="0"/>
+          <a:chExt cx="0" cy="0"/>
+        </a:xfrm>
+      </p:grpSpPr>
+      <p:sp>
+        <p:nvSpPr>
+          <p:cNvPr id="2" name="Title 1">
+            <a:extLst>
+              <a:ext uri="{FF2B5EF4-FFF2-40B4-BE49-F238E27FC236}">
+                <a16:creationId xmlns:a16="http://schemas.microsoft.com/office/drawing/2014/main" id="{9E30B5ED-BFF3-B8EB-EEA4-63483AF303B9}"/>
+              </a:ext>
+            </a:extLst>
+          </p:cNvPr>
+          <p:cNvSpPr>
+            <a:spLocks noGrp="1"/>
+          </p:cNvSpPr>
+          <p:nvPr>
+            <p:ph type="title"/>
+          </p:nvPr>
+        </p:nvSpPr>
+        <p:spPr/>
+        <p:txBody>
+          <a:bodyPr/>
+          <a:lstStyle/>
+          <a:p>
+            <a:pPr algn="r" rtl="1"/>
+            <a:r>
+              <a:rPr lang="en-GB" dirty="0" err="1"/>
+              <a:t>מנוע</a:t>
+            </a:r>
+            <a:r>
+              <a:rPr lang="en-GB" dirty="0"/>
+              <a:t> </a:t>
+            </a:r>
+            <a:r>
+              <a:rPr lang="en-GB" dirty="0" err="1"/>
+              <a:t>ההמלצה</a:t>
+            </a:r>
+            <a:r>
+              <a:rPr lang="en-GB" dirty="0"/>
+              <a:t> </a:t>
+            </a:r>
+            <a:r>
+              <a:rPr lang="en-GB" dirty="0" err="1"/>
+              <a:t>וצ'אטבוט</a:t>
+            </a:r>
+            <a:r>
+              <a:rPr lang="en-GB" dirty="0"/>
+              <a:t> </a:t>
+            </a:r>
+            <a:r>
+              <a:rPr lang="en-GB" dirty="0" err="1"/>
+              <a:t>מלווה</a:t>
+            </a:r>
+            <a:r>
+              <a:rPr lang="en-GB" dirty="0"/>
+              <a:t> </a:t>
+            </a:r>
+          </a:p>
+        </p:txBody>
+      </p:sp>
+      <p:sp>
+        <p:nvSpPr>
+          <p:cNvPr id="3" name="Content Placeholder 2">
+            <a:extLst>
+              <a:ext uri="{FF2B5EF4-FFF2-40B4-BE49-F238E27FC236}">
+                <a16:creationId xmlns:a16="http://schemas.microsoft.com/office/drawing/2014/main" id="{6E8091D2-EAE5-A8CA-D2C0-E2849D24BBB2}"/>
+              </a:ext>
+            </a:extLst>
+          </p:cNvPr>
+          <p:cNvSpPr>
+            <a:spLocks noGrp="1"/>
+          </p:cNvSpPr>
+          <p:nvPr>
+            <p:ph idx="1"/>
+          </p:nvPr>
+        </p:nvSpPr>
+        <p:spPr/>
+        <p:txBody>
+          <a:bodyPr/>
+          <a:lstStyle/>
+          <a:p>
+            <a:pPr lvl="0" algn="r" rtl="1"/>
+            <a:r>
+              <a:rPr lang="en-GB" b="1" dirty="0" err="1"/>
+              <a:t>פרסונליזציה</a:t>
+            </a:r>
+            <a:r>
+              <a:rPr lang="en-GB" b="1" dirty="0"/>
+              <a:t> </a:t>
+            </a:r>
+            <a:r>
+              <a:rPr lang="en-GB" b="1" dirty="0" err="1"/>
+              <a:t>מבוססת</a:t>
+            </a:r>
+            <a:r>
+              <a:rPr lang="en-GB" b="1" dirty="0"/>
+              <a:t> </a:t>
+            </a:r>
+            <a:r>
+              <a:rPr lang="en-GB" b="1" dirty="0" err="1"/>
+              <a:t>תוכן</a:t>
+            </a:r>
+            <a:r>
+              <a:rPr lang="en-GB" b="1" dirty="0"/>
+              <a:t> </a:t>
+            </a:r>
+            <a:r>
+              <a:rPr lang="en-GB" b="1" dirty="0" err="1"/>
+              <a:t>וסינון</a:t>
+            </a:r>
+            <a:r>
+              <a:rPr lang="en-GB" b="1" dirty="0"/>
+              <a:t> </a:t>
+            </a:r>
+            <a:r>
+              <a:rPr lang="en-GB" b="1" dirty="0" err="1"/>
+              <a:t>שיתופי</a:t>
+            </a:r>
+            <a:r>
+              <a:rPr lang="en-GB" b="1" dirty="0"/>
+              <a:t>:</a:t>
+            </a:r>
+            <a:r>
+              <a:rPr lang="en-GB" dirty="0"/>
+              <a:t> </a:t>
+            </a:r>
+            <a:r>
+              <a:rPr lang="en-GB" dirty="0" err="1"/>
+              <a:t>מנוע</a:t>
+            </a:r>
+            <a:r>
+              <a:rPr lang="en-GB" dirty="0"/>
+              <a:t> </a:t>
+            </a:r>
+            <a:r>
+              <a:rPr lang="en-GB" dirty="0" err="1"/>
+              <a:t>ההמלצה</a:t>
+            </a:r>
+            <a:r>
+              <a:rPr lang="en-GB" dirty="0"/>
+              <a:t> </a:t>
+            </a:r>
+            <a:r>
+              <a:rPr lang="en-GB" dirty="0" err="1"/>
+              <a:t>יתבסס</a:t>
+            </a:r>
+            <a:r>
+              <a:rPr lang="en-GB" dirty="0"/>
+              <a:t> </a:t>
+            </a:r>
+            <a:r>
+              <a:rPr lang="en-GB" dirty="0" err="1"/>
+              <a:t>בשלב</a:t>
+            </a:r>
+            <a:r>
+              <a:rPr lang="en-GB" dirty="0"/>
+              <a:t> </a:t>
+            </a:r>
+            <a:r>
+              <a:rPr lang="en-GB" dirty="0" err="1"/>
+              <a:t>הראשון</a:t>
+            </a:r>
+            <a:r>
+              <a:rPr lang="en-GB" dirty="0"/>
+              <a:t> </a:t>
+            </a:r>
+            <a:r>
+              <a:rPr lang="en-GB" dirty="0" err="1"/>
+              <a:t>על</a:t>
+            </a:r>
+            <a:r>
+              <a:rPr lang="en-GB" dirty="0"/>
+              <a:t> </a:t>
+            </a:r>
+            <a:r>
+              <a:rPr lang="en-GB" dirty="0" err="1"/>
+              <a:t>טופס</a:t>
+            </a:r>
+            <a:r>
+              <a:rPr lang="en-GB" dirty="0"/>
+              <a:t> </a:t>
+            </a:r>
+            <a:r>
+              <a:rPr lang="en-GB" dirty="0" err="1"/>
+              <a:t>ראשוני</a:t>
+            </a:r>
+            <a:r>
+              <a:rPr lang="en-GB" dirty="0"/>
+              <a:t> </a:t>
+            </a:r>
+            <a:r>
+              <a:rPr lang="en-GB" dirty="0" err="1"/>
+              <a:t>שהלקוח</a:t>
+            </a:r>
+            <a:r>
+              <a:rPr lang="en-GB" dirty="0"/>
+              <a:t> </a:t>
+            </a:r>
+            <a:r>
+              <a:rPr lang="en-GB" dirty="0" err="1"/>
+              <a:t>ימלא</a:t>
+            </a:r>
+            <a:r>
+              <a:rPr lang="he-IL" dirty="0"/>
+              <a:t>, </a:t>
+            </a:r>
+            <a:r>
+              <a:rPr lang="en-GB" dirty="0" err="1"/>
+              <a:t>למשל</a:t>
+            </a:r>
+            <a:r>
+              <a:rPr lang="en-GB" dirty="0"/>
+              <a:t>: </a:t>
+            </a:r>
+            <a:r>
+              <a:rPr lang="en-GB" dirty="0" err="1"/>
+              <a:t>דת</a:t>
+            </a:r>
+            <a:r>
+              <a:rPr lang="en-GB" dirty="0"/>
+              <a:t>, </a:t>
+            </a:r>
+            <a:r>
+              <a:rPr lang="en-GB" dirty="0" err="1"/>
+              <a:t>תקציב</a:t>
+            </a:r>
+            <a:r>
+              <a:rPr lang="en-GB" dirty="0"/>
+              <a:t>, </a:t>
+            </a:r>
+            <a:r>
+              <a:rPr lang="en-GB" dirty="0" err="1"/>
+              <a:t>אזור</a:t>
+            </a:r>
+            <a:r>
+              <a:rPr lang="en-GB" dirty="0"/>
+              <a:t> </a:t>
+            </a:r>
+            <a:r>
+              <a:rPr lang="en-GB" dirty="0" err="1"/>
+              <a:t>גיאוגרפי</a:t>
+            </a:r>
+            <a:endParaRPr lang="en-GB" dirty="0"/>
+          </a:p>
+          <a:p>
+            <a:pPr lvl="0" algn="r" rtl="1"/>
+            <a:r>
+              <a:rPr lang="en-GB" b="1" dirty="0" err="1"/>
+              <a:t>למידה</a:t>
+            </a:r>
+            <a:r>
+              <a:rPr lang="en-GB" b="1" dirty="0"/>
+              <a:t> </a:t>
+            </a:r>
+            <a:r>
+              <a:rPr lang="en-GB" b="1" dirty="0" err="1"/>
+              <a:t>דינמית</a:t>
+            </a:r>
+            <a:r>
+              <a:rPr lang="en-GB" b="1" dirty="0"/>
+              <a:t>:</a:t>
+            </a:r>
+            <a:r>
+              <a:rPr lang="en-GB" dirty="0"/>
+              <a:t> </a:t>
+            </a:r>
+            <a:r>
+              <a:rPr lang="en-GB" dirty="0" err="1"/>
+              <a:t>המערכת</a:t>
+            </a:r>
+            <a:r>
+              <a:rPr lang="en-GB" dirty="0"/>
+              <a:t> </a:t>
+            </a:r>
+            <a:r>
+              <a:rPr lang="en-GB" dirty="0" err="1"/>
+              <a:t>תבצע</a:t>
+            </a:r>
+            <a:r>
+              <a:rPr lang="en-GB" dirty="0"/>
+              <a:t> </a:t>
+            </a:r>
+            <a:r>
+              <a:rPr lang="en-GB" dirty="0" err="1"/>
+              <a:t>התאמה</a:t>
+            </a:r>
+            <a:r>
+              <a:rPr lang="en-GB" dirty="0"/>
+              <a:t> </a:t>
+            </a:r>
+            <a:r>
+              <a:rPr lang="en-GB" dirty="0" err="1"/>
+              <a:t>חזקה</a:t>
+            </a:r>
+            <a:r>
+              <a:rPr lang="en-GB" dirty="0"/>
+              <a:t> </a:t>
+            </a:r>
+            <a:r>
+              <a:rPr lang="en-GB" dirty="0" err="1"/>
+              <a:t>ומדויקת</a:t>
+            </a:r>
+            <a:r>
+              <a:rPr lang="en-GB" dirty="0"/>
+              <a:t> </a:t>
+            </a:r>
+            <a:r>
+              <a:rPr lang="en-GB" dirty="0" err="1"/>
+              <a:t>יותר</a:t>
+            </a:r>
+            <a:r>
+              <a:rPr lang="en-GB" dirty="0"/>
+              <a:t> </a:t>
+            </a:r>
+            <a:r>
+              <a:rPr lang="en-GB" dirty="0" err="1"/>
+              <a:t>של</a:t>
+            </a:r>
+            <a:r>
+              <a:rPr lang="en-GB" dirty="0"/>
+              <a:t> </a:t>
+            </a:r>
+            <a:r>
+              <a:rPr lang="en-GB" dirty="0" err="1"/>
+              <a:t>ההמלצות</a:t>
+            </a:r>
+            <a:r>
+              <a:rPr lang="en-GB" dirty="0"/>
+              <a:t> </a:t>
+            </a:r>
+            <a:r>
+              <a:rPr lang="en-GB" dirty="0" err="1"/>
+              <a:t>תוך</a:t>
+            </a:r>
+            <a:r>
+              <a:rPr lang="en-GB" dirty="0"/>
+              <a:t> </a:t>
+            </a:r>
+            <a:r>
+              <a:rPr lang="en-GB" dirty="0" err="1"/>
+              <a:t>כדי</a:t>
+            </a:r>
+            <a:r>
+              <a:rPr lang="en-GB" dirty="0"/>
+              <a:t> </a:t>
+            </a:r>
+            <a:r>
+              <a:rPr lang="en-GB" dirty="0" err="1"/>
+              <a:t>ניתוח</a:t>
+            </a:r>
+            <a:r>
+              <a:rPr lang="en-GB" dirty="0"/>
+              <a:t> </a:t>
+            </a:r>
+            <a:r>
+              <a:rPr lang="en-GB" dirty="0" err="1"/>
+              <a:t>המעבר</a:t>
+            </a:r>
+            <a:r>
+              <a:rPr lang="en-GB" dirty="0"/>
+              <a:t> </a:t>
+            </a:r>
+            <a:r>
+              <a:rPr lang="en-GB" dirty="0" err="1"/>
+              <a:t>של</a:t>
+            </a:r>
+            <a:r>
+              <a:rPr lang="en-GB" dirty="0"/>
+              <a:t> </a:t>
+            </a:r>
+            <a:r>
+              <a:rPr lang="en-GB" dirty="0" err="1"/>
+              <a:t>הלקוח</a:t>
+            </a:r>
+            <a:r>
+              <a:rPr lang="en-GB" dirty="0"/>
+              <a:t> </a:t>
+            </a:r>
+            <a:r>
+              <a:rPr lang="en-GB" dirty="0" err="1"/>
+              <a:t>בין</a:t>
+            </a:r>
+            <a:r>
+              <a:rPr lang="en-GB" dirty="0"/>
+              <a:t> </a:t>
+            </a:r>
+            <a:r>
+              <a:rPr lang="en-GB" dirty="0" err="1"/>
+              <a:t>פריטים</a:t>
+            </a:r>
+            <a:r>
+              <a:rPr lang="en-GB" dirty="0"/>
+              <a:t> </a:t>
+            </a:r>
+            <a:r>
+              <a:rPr lang="en-GB" dirty="0" err="1"/>
+              <a:t>באתר</a:t>
+            </a:r>
+            <a:r>
+              <a:rPr lang="he-IL" dirty="0"/>
+              <a:t>.</a:t>
+            </a:r>
+            <a:endParaRPr lang="en-GB" dirty="0"/>
+          </a:p>
+          <a:p>
+            <a:pPr lvl="0" algn="r" rtl="1"/>
+            <a:r>
+              <a:rPr lang="en-GB" b="1" dirty="0" err="1"/>
+              <a:t>סיוע</a:t>
+            </a:r>
+            <a:r>
+              <a:rPr lang="en-GB" b="1" dirty="0"/>
+              <a:t> </a:t>
+            </a:r>
+            <a:r>
+              <a:rPr lang="en-GB" b="1" dirty="0" err="1"/>
+              <a:t>מבוסס</a:t>
+            </a:r>
+            <a:r>
+              <a:rPr lang="he-IL" b="1" dirty="0"/>
+              <a:t> </a:t>
+            </a:r>
+            <a:r>
+              <a:rPr lang="en-GB" b="1" dirty="0"/>
+              <a:t>AI</a:t>
+            </a:r>
+            <a:r>
+              <a:rPr lang="he-IL" b="1" dirty="0"/>
+              <a:t>: </a:t>
+            </a:r>
+            <a:r>
+              <a:rPr lang="en-GB" dirty="0" err="1"/>
+              <a:t>שילוב</a:t>
+            </a:r>
+            <a:r>
+              <a:rPr lang="en-GB" dirty="0"/>
+              <a:t> </a:t>
+            </a:r>
+            <a:r>
+              <a:rPr lang="en-GB" dirty="0" err="1"/>
+              <a:t>של</a:t>
+            </a:r>
+            <a:r>
+              <a:rPr lang="en-GB" dirty="0"/>
+              <a:t> </a:t>
+            </a:r>
+            <a:r>
+              <a:rPr lang="en-GB" dirty="0" err="1"/>
+              <a:t>צ'אט</a:t>
+            </a:r>
+            <a:r>
+              <a:rPr lang="en-GB" dirty="0"/>
+              <a:t> </a:t>
+            </a:r>
+            <a:r>
+              <a:rPr lang="en-GB" dirty="0" err="1"/>
+              <a:t>שילווה</a:t>
+            </a:r>
+            <a:r>
+              <a:rPr lang="en-GB" dirty="0"/>
+              <a:t> </a:t>
+            </a:r>
+            <a:r>
+              <a:rPr lang="en-GB" dirty="0" err="1"/>
+              <a:t>את</a:t>
+            </a:r>
+            <a:r>
+              <a:rPr lang="en-GB" dirty="0"/>
+              <a:t> </a:t>
+            </a:r>
+            <a:r>
+              <a:rPr lang="en-GB" dirty="0" err="1"/>
+              <a:t>הלקוח</a:t>
+            </a:r>
+            <a:r>
+              <a:rPr lang="en-GB" dirty="0"/>
+              <a:t> </a:t>
+            </a:r>
+            <a:r>
+              <a:rPr lang="en-GB" dirty="0" err="1"/>
+              <a:t>לאורך</a:t>
+            </a:r>
+            <a:r>
+              <a:rPr lang="en-GB" dirty="0"/>
+              <a:t> </a:t>
+            </a:r>
+            <a:r>
+              <a:rPr lang="en-GB" dirty="0" err="1"/>
+              <a:t>כל</a:t>
+            </a:r>
+            <a:r>
+              <a:rPr lang="en-GB" dirty="0"/>
+              <a:t> </a:t>
+            </a:r>
+            <a:r>
+              <a:rPr lang="en-GB" dirty="0" err="1"/>
+              <a:t>הפרוצדורה</a:t>
+            </a:r>
+            <a:r>
+              <a:rPr lang="en-GB" dirty="0"/>
+              <a:t> </a:t>
+            </a:r>
+            <a:r>
+              <a:rPr lang="en-GB" dirty="0" err="1"/>
+              <a:t>הבירוקרטית</a:t>
+            </a:r>
+            <a:r>
+              <a:rPr lang="en-GB" dirty="0"/>
+              <a:t> </a:t>
+            </a:r>
+            <a:r>
+              <a:rPr lang="en-GB" dirty="0" err="1"/>
+              <a:t>והצרכנית</a:t>
+            </a:r>
+            <a:r>
+              <a:rPr lang="en-GB" dirty="0"/>
+              <a:t>, </a:t>
+            </a:r>
+            <a:r>
+              <a:rPr lang="en-GB" dirty="0" err="1"/>
+              <a:t>ויציע</a:t>
+            </a:r>
+            <a:r>
+              <a:rPr lang="en-GB" dirty="0"/>
+              <a:t> </a:t>
+            </a:r>
+            <a:r>
+              <a:rPr lang="en-GB" dirty="0" err="1"/>
+              <a:t>לו</a:t>
+            </a:r>
+            <a:r>
+              <a:rPr lang="en-GB" dirty="0"/>
+              <a:t> </a:t>
+            </a:r>
+            <a:r>
+              <a:rPr lang="en-GB" dirty="0" err="1"/>
+              <a:t>הצעות</a:t>
+            </a:r>
+            <a:r>
+              <a:rPr lang="en-GB" dirty="0"/>
+              <a:t> </a:t>
+            </a:r>
+            <a:r>
+              <a:rPr lang="en-GB" dirty="0" err="1"/>
+              <a:t>מותאמות</a:t>
+            </a:r>
+            <a:r>
+              <a:rPr lang="en-GB" dirty="0"/>
+              <a:t> </a:t>
+            </a:r>
+            <a:r>
+              <a:rPr lang="en-GB" dirty="0" err="1"/>
+              <a:t>אישית</a:t>
+            </a:r>
+            <a:r>
+              <a:rPr lang="en-GB" dirty="0"/>
+              <a:t> </a:t>
+            </a:r>
+            <a:r>
+              <a:rPr lang="en-GB" dirty="0" err="1"/>
+              <a:t>בזמן</a:t>
+            </a:r>
+            <a:r>
+              <a:rPr lang="en-GB" dirty="0"/>
+              <a:t> </a:t>
+            </a:r>
+            <a:r>
+              <a:rPr lang="en-GB" dirty="0" err="1"/>
+              <a:t>אמת</a:t>
+            </a:r>
+            <a:r>
+              <a:rPr lang="en-GB" dirty="0"/>
+              <a:t>. </a:t>
+            </a:r>
+          </a:p>
+          <a:p>
+            <a:pPr algn="r" rtl="1"/>
+            <a:endParaRPr lang="en-GB" dirty="0"/>
+          </a:p>
+        </p:txBody>
+      </p:sp>
+    </p:spTree>
+    <p:extLst>
+      <p:ext uri="{BB962C8B-B14F-4D97-AF65-F5344CB8AC3E}">
+        <p14:creationId xmlns:p14="http://schemas.microsoft.com/office/powerpoint/2010/main" val="3358886406"/>
+      </p:ext>
+    </p:extLst>
+  </p:cSld>
+  <p:clrMapOvr>
+    <a:masterClrMapping/>
+  </p:clrMapOvr>
+</p:sld>
+</file>
+
+<file path=ppt/slides/slide3.xml><?xml version="1.0" encoding="utf-8"?>
+<p:sld xmlns:a="http://schemas.openxmlformats.org/drawingml/2006/main" xmlns:r="http://schemas.openxmlformats.org/officeDocument/2006/relationships" xmlns:p="http://schemas.openxmlformats.org/presentationml/2006/main">
+  <p:cSld>
+    <p:bg>
+      <p:bgPr>
+        <a:solidFill>
+          <a:schemeClr val="tx2">
+            <a:lumMod val="10000"/>
+            <a:lumOff val="90000"/>
+          </a:schemeClr>
+        </a:solidFill>
+        <a:effectLst/>
+      </p:bgPr>
+    </p:bg>
     <p:spTree>
       <p:nvGrpSpPr>
         <p:cNvPr id="1" name=""/>
@@ -5157,10 +5804,47 @@
           <a:p>
             <a:pPr algn="r" rtl="1"/>
             <a:r>
-              <a:rPr lang="he-IL" dirty="0"/>
-              <a:t>מעבר דירות</a:t>
-            </a:r>
-            <a:endParaRPr lang="en-GB" dirty="0"/>
+              <a:rPr lang="he-IL" dirty="0">
+                <a:cs typeface="+mn-cs"/>
+              </a:rPr>
+              <a:t>2. מעבר דירות - </a:t>
+            </a:r>
+            <a:r>
+              <a:rPr lang="en-GB" dirty="0" err="1">
+                <a:cs typeface="+mn-cs"/>
+              </a:rPr>
+              <a:t>תיאור</a:t>
+            </a:r>
+            <a:r>
+              <a:rPr lang="en-GB" dirty="0">
+                <a:cs typeface="+mn-cs"/>
+              </a:rPr>
+              <a:t> </a:t>
+            </a:r>
+            <a:r>
+              <a:rPr lang="en-GB" dirty="0" err="1">
+                <a:cs typeface="+mn-cs"/>
+              </a:rPr>
+              <a:t>המערכת</a:t>
+            </a:r>
+            <a:r>
+              <a:rPr lang="en-GB" dirty="0">
+                <a:cs typeface="+mn-cs"/>
+              </a:rPr>
+              <a:t> </a:t>
+            </a:r>
+            <a:r>
+              <a:rPr lang="en-GB" dirty="0" err="1">
+                <a:cs typeface="+mn-cs"/>
+              </a:rPr>
+              <a:t>והצורך</a:t>
+            </a:r>
+            <a:r>
+              <a:rPr lang="en-GB" dirty="0">
+                <a:cs typeface="+mn-cs"/>
+              </a:rPr>
+              <a:t> </a:t>
+            </a:r>
           </a:p>
         </p:txBody>
       </p:sp>
@@ -5185,19 +5869,514 @@
           <a:bodyPr/>
           <a:lstStyle/>
           <a:p>
-            <a:pPr algn="r" rtl="1"/>
+            <a:pPr lvl="0" algn="r" rtl="1"/>
+            <a:r>
+              <a:rPr lang="en-GB" b="1" dirty="0" err="1"/>
+              <a:t>הבעיה</a:t>
+            </a:r>
+            <a:r>
+              <a:rPr lang="en-GB" b="1" dirty="0"/>
+              <a:t>:</a:t>
+            </a:r>
+            <a:r>
+              <a:rPr lang="en-GB" dirty="0"/>
+              <a:t> </a:t>
+            </a:r>
+            <a:r>
+              <a:rPr lang="en-GB" dirty="0" err="1"/>
+              <a:t>חיפוש</a:t>
+            </a:r>
+            <a:r>
+              <a:rPr lang="en-GB" dirty="0"/>
+              <a:t> </a:t>
+            </a:r>
+            <a:r>
+              <a:rPr lang="en-GB" dirty="0" err="1"/>
+              <a:t>בעל</a:t>
+            </a:r>
+            <a:r>
+              <a:rPr lang="en-GB" dirty="0"/>
+              <a:t> </a:t>
+            </a:r>
+            <a:r>
+              <a:rPr lang="en-GB" dirty="0" err="1"/>
+              <a:t>מקצוע</a:t>
+            </a:r>
             <a:r>
               <a:rPr lang="he-IL" dirty="0"/>
-              <a:t>מדרג</a:t>
-            </a:r>
-          </a:p>
-          <a:p>
-            <a:pPr algn="r" rtl="1"/>
-            <a:r>
-              <a:rPr lang="he-IL"/>
-              <a:t>צאטבוט שעוזר למצוא את א</a:t>
+              <a:t>. </a:t>
+            </a:r>
+            <a:r>
+              <a:rPr lang="en-GB" dirty="0" err="1"/>
+              <a:t>הפעלת</a:t>
+            </a:r>
+            <a:r>
+              <a:rPr lang="en-GB" dirty="0"/>
+              <a:t> </a:t>
+            </a:r>
+            <a:r>
+              <a:rPr lang="en-GB" dirty="0" err="1"/>
+              <a:t>מסננים</a:t>
+            </a:r>
+            <a:r>
+              <a:rPr lang="en-GB" dirty="0"/>
+              <a:t> </a:t>
+            </a:r>
+            <a:r>
+              <a:rPr lang="en-GB" dirty="0" err="1"/>
+              <a:t>וקריאת</a:t>
+            </a:r>
+            <a:r>
+              <a:rPr lang="en-GB" dirty="0"/>
+              <a:t> </a:t>
+            </a:r>
+            <a:r>
+              <a:rPr lang="en-GB" dirty="0" err="1"/>
+              <a:t>חוות</a:t>
+            </a:r>
+            <a:r>
+              <a:rPr lang="en-GB" dirty="0"/>
+              <a:t> </a:t>
+            </a:r>
+            <a:r>
+              <a:rPr lang="en-GB" dirty="0" err="1"/>
+              <a:t>דעת</a:t>
+            </a:r>
+            <a:r>
+              <a:rPr lang="en-GB" dirty="0"/>
+              <a:t> </a:t>
+            </a:r>
+            <a:r>
+              <a:rPr lang="en-GB" dirty="0" err="1"/>
+              <a:t>רבות</a:t>
+            </a:r>
+            <a:r>
+              <a:rPr lang="en-GB" dirty="0"/>
+              <a:t> </a:t>
+            </a:r>
+            <a:r>
+              <a:rPr lang="en-GB" dirty="0" err="1"/>
+              <a:t>כדי</a:t>
+            </a:r>
+            <a:r>
+              <a:rPr lang="en-GB" dirty="0"/>
+              <a:t> </a:t>
+            </a:r>
+            <a:r>
+              <a:rPr lang="en-GB" dirty="0" err="1"/>
+              <a:t>להבין</a:t>
+            </a:r>
+            <a:r>
+              <a:rPr lang="en-GB" dirty="0"/>
+              <a:t> </a:t>
+            </a:r>
+            <a:r>
+              <a:rPr lang="en-GB" dirty="0" err="1"/>
+              <a:t>מי</a:t>
+            </a:r>
+            <a:r>
+              <a:rPr lang="en-GB" dirty="0"/>
+              <a:t> </a:t>
+            </a:r>
+            <a:r>
+              <a:rPr lang="en-GB" dirty="0" err="1"/>
+              <a:t>באמת</a:t>
+            </a:r>
+            <a:r>
+              <a:rPr lang="en-GB" dirty="0"/>
+              <a:t> </a:t>
+            </a:r>
+            <a:r>
+              <a:rPr lang="en-GB" dirty="0" err="1"/>
+              <a:t>מתאים</a:t>
+            </a:r>
+            <a:r>
+              <a:rPr lang="en-GB" dirty="0"/>
+              <a:t> </a:t>
+            </a:r>
+            <a:r>
+              <a:rPr lang="en-GB" dirty="0" err="1"/>
+              <a:t>לבעיה</a:t>
+            </a:r>
+            <a:r>
+              <a:rPr lang="en-GB" dirty="0"/>
+              <a:t> </a:t>
+            </a:r>
+            <a:r>
+              <a:rPr lang="en-GB" dirty="0" err="1"/>
+              <a:t>ספציפי</a:t>
+            </a:r>
+            <a:r>
+              <a:rPr lang="he-IL" dirty="0"/>
+              <a:t>ת לוקח זמן.</a:t>
             </a:r>
             <a:endParaRPr lang="en-GB" dirty="0"/>
+          </a:p>
+          <a:p>
+            <a:pPr lvl="0" algn="r" rtl="1"/>
+            <a:r>
+              <a:rPr lang="en-GB" b="1" dirty="0" err="1"/>
+              <a:t>הפתרון</a:t>
+            </a:r>
+            <a:r>
+              <a:rPr lang="en-GB" b="1" dirty="0"/>
+              <a:t>:</a:t>
+            </a:r>
+            <a:r>
+              <a:rPr lang="en-GB" dirty="0"/>
+              <a:t> </a:t>
+            </a:r>
+            <a:r>
+              <a:rPr lang="en-GB" dirty="0" err="1"/>
+              <a:t>סוכן</a:t>
+            </a:r>
+            <a:r>
+              <a:rPr lang="en-GB" dirty="0"/>
+              <a:t> </a:t>
+            </a:r>
+            <a:r>
+              <a:rPr lang="en-GB" dirty="0" err="1"/>
+              <a:t>שיחתי</a:t>
+            </a:r>
+            <a:r>
+              <a:rPr lang="en-GB" dirty="0"/>
+              <a:t> </a:t>
+            </a:r>
+            <a:r>
+              <a:rPr lang="en-GB" dirty="0" err="1"/>
+              <a:t>שמתשאל</a:t>
+            </a:r>
+            <a:r>
+              <a:rPr lang="en-GB" dirty="0"/>
+              <a:t> </a:t>
+            </a:r>
+            <a:r>
+              <a:rPr lang="en-GB" dirty="0" err="1"/>
+              <a:t>את</a:t>
+            </a:r>
+            <a:r>
+              <a:rPr lang="en-GB" dirty="0"/>
+              <a:t> </a:t>
+            </a:r>
+            <a:r>
+              <a:rPr lang="en-GB" dirty="0" err="1"/>
+              <a:t>המשתמש</a:t>
+            </a:r>
+            <a:r>
+              <a:rPr lang="en-GB" dirty="0"/>
+              <a:t> </a:t>
+            </a:r>
+            <a:r>
+              <a:rPr lang="en-GB" dirty="0" err="1"/>
+              <a:t>בשפה</a:t>
+            </a:r>
+            <a:r>
+              <a:rPr lang="en-GB" dirty="0"/>
+              <a:t> </a:t>
+            </a:r>
+            <a:r>
+              <a:rPr lang="en-GB" dirty="0" err="1"/>
+              <a:t>טבעית</a:t>
+            </a:r>
+            <a:r>
+              <a:rPr lang="en-GB" dirty="0"/>
+              <a:t> </a:t>
+            </a:r>
+            <a:r>
+              <a:rPr lang="en-GB" dirty="0" err="1"/>
+              <a:t>לגבי</a:t>
+            </a:r>
+            <a:r>
+              <a:rPr lang="en-GB" dirty="0"/>
+              <a:t> </a:t>
+            </a:r>
+            <a:r>
+              <a:rPr lang="en-GB" dirty="0" err="1"/>
+              <a:t>מהות</a:t>
+            </a:r>
+            <a:r>
+              <a:rPr lang="en-GB" dirty="0"/>
+              <a:t> </a:t>
+            </a:r>
+            <a:r>
+              <a:rPr lang="en-GB" dirty="0" err="1"/>
+              <a:t>התקלה</a:t>
+            </a:r>
+            <a:r>
+              <a:rPr lang="en-GB" dirty="0"/>
+              <a:t>, </a:t>
+            </a:r>
+            <a:r>
+              <a:rPr lang="en-GB" dirty="0" err="1"/>
+              <a:t>רמת</a:t>
+            </a:r>
+            <a:r>
+              <a:rPr lang="en-GB" dirty="0"/>
+              <a:t> </a:t>
+            </a:r>
+            <a:r>
+              <a:rPr lang="en-GB" dirty="0" err="1"/>
+              <a:t>הדחיפות</a:t>
+            </a:r>
+            <a:r>
+              <a:rPr lang="en-GB" dirty="0"/>
+              <a:t>, </a:t>
+            </a:r>
+            <a:r>
+              <a:rPr lang="en-GB" dirty="0" err="1"/>
+              <a:t>מיקום</a:t>
+            </a:r>
+            <a:r>
+              <a:rPr lang="en-GB" dirty="0"/>
+              <a:t> </a:t>
+            </a:r>
+            <a:r>
+              <a:rPr lang="en-GB" dirty="0" err="1"/>
+              <a:t>ותקציב</a:t>
+            </a:r>
+            <a:r>
+              <a:rPr lang="en-GB" dirty="0"/>
+              <a:t>, </a:t>
+            </a:r>
+            <a:r>
+              <a:rPr lang="en-GB" dirty="0" err="1"/>
+              <a:t>ומזקק</a:t>
+            </a:r>
+            <a:r>
+              <a:rPr lang="en-GB" dirty="0"/>
+              <a:t> </a:t>
+            </a:r>
+            <a:r>
+              <a:rPr lang="en-GB" dirty="0" err="1"/>
+              <a:t>את</a:t>
+            </a:r>
+            <a:r>
+              <a:rPr lang="en-GB" dirty="0"/>
+              <a:t> </a:t>
+            </a:r>
+            <a:r>
+              <a:rPr lang="en-GB" dirty="0" err="1"/>
+              <a:t>התוצאות</a:t>
+            </a:r>
+            <a:r>
+              <a:rPr lang="en-GB" dirty="0"/>
+              <a:t> ל-2-3 </a:t>
+            </a:r>
+            <a:r>
+              <a:rPr lang="en-GB" dirty="0" err="1"/>
+              <a:t>בעלי</a:t>
+            </a:r>
+            <a:r>
+              <a:rPr lang="en-GB" dirty="0"/>
+              <a:t> </a:t>
+            </a:r>
+            <a:r>
+              <a:rPr lang="en-GB" dirty="0" err="1"/>
+              <a:t>המקצוע</a:t>
+            </a:r>
+            <a:r>
+              <a:rPr lang="en-GB" dirty="0"/>
+              <a:t> </a:t>
+            </a:r>
+            <a:r>
+              <a:rPr lang="en-GB" dirty="0" err="1"/>
+              <a:t>האידיאליים</a:t>
+            </a:r>
+            <a:r>
+              <a:rPr lang="en-GB" dirty="0"/>
+              <a:t> </a:t>
+            </a:r>
+            <a:r>
+              <a:rPr lang="en-GB" dirty="0" err="1"/>
+              <a:t>לאותה</a:t>
+            </a:r>
+            <a:r>
+              <a:rPr lang="en-GB" dirty="0"/>
+              <a:t> </a:t>
+            </a:r>
+            <a:r>
+              <a:rPr lang="en-GB" dirty="0" err="1"/>
+              <a:t>נקודת</a:t>
+            </a:r>
+            <a:r>
+              <a:rPr lang="en-GB" dirty="0"/>
+              <a:t> </a:t>
+            </a:r>
+            <a:r>
+              <a:rPr lang="en-GB" dirty="0" err="1"/>
+              <a:t>זמן</a:t>
+            </a:r>
+            <a:r>
+              <a:rPr lang="en-GB" dirty="0"/>
+              <a:t>.</a:t>
+            </a:r>
+          </a:p>
+          <a:p>
+            <a:pPr lvl="0" algn="r" rtl="1"/>
+            <a:r>
+              <a:rPr lang="en-GB" b="1" dirty="0" err="1"/>
+              <a:t>הערך</a:t>
+            </a:r>
+            <a:r>
+              <a:rPr lang="en-GB" b="1" dirty="0"/>
+              <a:t> </a:t>
+            </a:r>
+            <a:r>
+              <a:rPr lang="en-GB" b="1" dirty="0" err="1"/>
+              <a:t>המוסף</a:t>
+            </a:r>
+            <a:r>
+              <a:rPr lang="en-GB" b="1" dirty="0"/>
+              <a:t>:</a:t>
+            </a:r>
+            <a:r>
+              <a:rPr lang="en-GB" dirty="0"/>
+              <a:t> </a:t>
+            </a:r>
+            <a:r>
+              <a:rPr lang="en-GB" dirty="0" err="1"/>
+              <a:t>מעבר</a:t>
+            </a:r>
+            <a:r>
+              <a:rPr lang="en-GB" dirty="0"/>
+              <a:t> </a:t>
+            </a:r>
+            <a:r>
+              <a:rPr lang="en-GB" dirty="0" err="1"/>
+              <a:t>מחוויית</a:t>
+            </a:r>
+            <a:r>
+              <a:rPr lang="en-GB" dirty="0"/>
+              <a:t> "</a:t>
+            </a:r>
+            <a:r>
+              <a:rPr lang="en-GB" dirty="0" err="1"/>
+              <a:t>חיפוש</a:t>
+            </a:r>
+            <a:r>
+              <a:rPr lang="en-GB" dirty="0"/>
+              <a:t>" </a:t>
+            </a:r>
+            <a:r>
+              <a:rPr lang="en-GB" dirty="0" err="1"/>
+              <a:t>מתישה</a:t>
+            </a:r>
+            <a:r>
+              <a:rPr lang="en-GB" dirty="0"/>
+              <a:t> </a:t>
+            </a:r>
+            <a:r>
+              <a:rPr lang="en-GB" dirty="0" err="1"/>
+              <a:t>לחוויית</a:t>
+            </a:r>
+            <a:r>
+              <a:rPr lang="en-GB" dirty="0"/>
+              <a:t> "</a:t>
+            </a:r>
+            <a:r>
+              <a:rPr lang="en-GB" dirty="0" err="1"/>
+              <a:t>קבלת</a:t>
+            </a:r>
+            <a:r>
+              <a:rPr lang="en-GB" dirty="0"/>
+              <a:t> </a:t>
+            </a:r>
+            <a:r>
+              <a:rPr lang="en-GB" dirty="0" err="1"/>
+              <a:t>שירות</a:t>
+            </a:r>
+            <a:r>
+              <a:rPr lang="en-GB" dirty="0"/>
+              <a:t>", </a:t>
+            </a:r>
+            <a:r>
+              <a:rPr lang="en-GB" dirty="0" err="1"/>
+              <a:t>הקטנת</a:t>
+            </a:r>
+            <a:r>
+              <a:rPr lang="en-GB" dirty="0"/>
+              <a:t> </a:t>
+            </a:r>
+            <a:r>
+              <a:rPr lang="en-GB" dirty="0" err="1"/>
+              <a:t>העומס</a:t>
+            </a:r>
+            <a:r>
+              <a:rPr lang="en-GB" dirty="0"/>
+              <a:t> </a:t>
+            </a:r>
+            <a:r>
+              <a:rPr lang="en-GB" dirty="0" err="1"/>
+              <a:t>הקוגניטיבי</a:t>
+            </a:r>
+            <a:r>
+              <a:rPr lang="en-GB" dirty="0"/>
+              <a:t> </a:t>
+            </a:r>
+            <a:r>
+              <a:rPr lang="en-GB" dirty="0" err="1"/>
+              <a:t>על</a:t>
+            </a:r>
+            <a:r>
+              <a:rPr lang="en-GB" dirty="0"/>
+              <a:t> </a:t>
+            </a:r>
+            <a:r>
+              <a:rPr lang="en-GB" dirty="0" err="1"/>
+              <a:t>המשתמש</a:t>
+            </a:r>
+            <a:r>
+              <a:rPr lang="en-GB" dirty="0"/>
+              <a:t>, </a:t>
+            </a:r>
+            <a:r>
+              <a:rPr lang="en-GB" dirty="0" err="1"/>
+              <a:t>והעלאת</a:t>
+            </a:r>
+            <a:r>
+              <a:rPr lang="en-GB" dirty="0"/>
+              <a:t> </a:t>
+            </a:r>
+            <a:r>
+              <a:rPr lang="en-GB" dirty="0" err="1"/>
+              <a:t>אחוזי</a:t>
+            </a:r>
+            <a:r>
+              <a:rPr lang="en-GB" dirty="0"/>
+              <a:t> </a:t>
+            </a:r>
+            <a:r>
+              <a:rPr lang="en-GB" dirty="0" err="1"/>
+              <a:t>יצירת</a:t>
+            </a:r>
+            <a:r>
+              <a:rPr lang="en-GB" dirty="0"/>
+              <a:t> </a:t>
+            </a:r>
+            <a:r>
+              <a:rPr lang="en-GB" dirty="0" err="1"/>
+              <a:t>הקשר</a:t>
+            </a:r>
+            <a:r>
+              <a:rPr lang="en-GB" dirty="0"/>
+              <a:t> </a:t>
+            </a:r>
+            <a:r>
+              <a:rPr lang="en-GB" dirty="0" err="1"/>
+              <a:t>של</a:t>
+            </a:r>
+            <a:r>
+              <a:rPr lang="en-GB" dirty="0"/>
+              <a:t> </a:t>
+            </a:r>
+            <a:r>
+              <a:rPr lang="en-GB" dirty="0" err="1"/>
+              <a:t>הפלטפורמה</a:t>
+            </a:r>
+            <a:r>
+              <a:rPr lang="en-GB" dirty="0"/>
+              <a:t>.</a:t>
+            </a:r>
           </a:p>
         </p:txBody>
       </p:sp>
@@ -5205,6 +6384,3012 @@
     <p:extLst>
       <p:ext uri="{BB962C8B-B14F-4D97-AF65-F5344CB8AC3E}">
         <p14:creationId xmlns:p14="http://schemas.microsoft.com/office/powerpoint/2010/main" val="481505359"/>
+      </p:ext>
+    </p:extLst>
+  </p:cSld>
+  <p:clrMapOvr>
+    <a:masterClrMapping/>
+  </p:clrMapOvr>
+</p:sld>
+</file>
+
+<file path=ppt/slides/slide4.xml><?xml version="1.0" encoding="utf-8"?>
+<p:sld xmlns:a="http://schemas.openxmlformats.org/drawingml/2006/main" xmlns:r="http://schemas.openxmlformats.org/officeDocument/2006/relationships" xmlns:p="http://schemas.openxmlformats.org/presentationml/2006/main">
+  <p:cSld>
+    <p:bg>
+      <p:bgPr>
+        <a:solidFill>
+          <a:schemeClr val="tx2">
+            <a:lumMod val="10000"/>
+            <a:lumOff val="90000"/>
+          </a:schemeClr>
+        </a:solidFill>
+        <a:effectLst/>
+      </p:bgPr>
+    </p:bg>
+    <p:spTree>
+      <p:nvGrpSpPr>
+        <p:cNvPr id="1" name=""/>
+        <p:cNvGrpSpPr/>
+        <p:nvPr/>
+      </p:nvGrpSpPr>
+      <p:grpSpPr>
+        <a:xfrm>
+          <a:off x="0" y="0"/>
+          <a:ext cx="0" cy="0"/>
+          <a:chOff x="0" y="0"/>
+          <a:chExt cx="0" cy="0"/>
+        </a:xfrm>
+      </p:grpSpPr>
+      <p:sp>
+        <p:nvSpPr>
+          <p:cNvPr id="2" name="Title 1">
+            <a:extLst>
+              <a:ext uri="{FF2B5EF4-FFF2-40B4-BE49-F238E27FC236}">
+                <a16:creationId xmlns:a16="http://schemas.microsoft.com/office/drawing/2014/main" id="{3C30013F-F83E-B317-F280-1FCFDA886802}"/>
+              </a:ext>
+            </a:extLst>
+          </p:cNvPr>
+          <p:cNvSpPr>
+            <a:spLocks noGrp="1"/>
+          </p:cNvSpPr>
+          <p:nvPr>
+            <p:ph type="title"/>
+          </p:nvPr>
+        </p:nvSpPr>
+        <p:spPr/>
+        <p:txBody>
+          <a:bodyPr/>
+          <a:lstStyle/>
+          <a:p>
+            <a:pPr algn="r" rtl="1"/>
+            <a:r>
+              <a:rPr lang="en-GB" dirty="0" err="1"/>
+              <a:t>מנגנון</a:t>
+            </a:r>
+            <a:r>
+              <a:rPr lang="en-GB" dirty="0"/>
+              <a:t> </a:t>
+            </a:r>
+            <a:r>
+              <a:rPr lang="en-GB" dirty="0" err="1"/>
+              <a:t>ההמלצה</a:t>
+            </a:r>
+            <a:r>
+              <a:rPr lang="en-GB" dirty="0"/>
+              <a:t> </a:t>
+            </a:r>
+            <a:r>
+              <a:rPr lang="en-GB" dirty="0" err="1"/>
+              <a:t>והפרסונליזציה</a:t>
+            </a:r>
+            <a:endParaRPr lang="en-GB" dirty="0"/>
+          </a:p>
+        </p:txBody>
+      </p:sp>
+      <p:sp>
+        <p:nvSpPr>
+          <p:cNvPr id="3" name="Content Placeholder 2">
+            <a:extLst>
+              <a:ext uri="{FF2B5EF4-FFF2-40B4-BE49-F238E27FC236}">
+                <a16:creationId xmlns:a16="http://schemas.microsoft.com/office/drawing/2014/main" id="{6A2809A2-C6E2-DF28-F10E-78E6439344D1}"/>
+              </a:ext>
+            </a:extLst>
+          </p:cNvPr>
+          <p:cNvSpPr>
+            <a:spLocks noGrp="1"/>
+          </p:cNvSpPr>
+          <p:nvPr>
+            <p:ph idx="1"/>
+          </p:nvPr>
+        </p:nvSpPr>
+        <p:spPr/>
+        <p:txBody>
+          <a:bodyPr>
+            <a:normAutofit/>
+          </a:bodyPr>
+          <a:lstStyle/>
+          <a:p>
+            <a:pPr lvl="0" algn="r" rtl="1"/>
+            <a:r>
+              <a:rPr lang="en-GB" b="1" dirty="0" err="1"/>
+              <a:t>מערכת</a:t>
+            </a:r>
+            <a:r>
+              <a:rPr lang="en-GB" b="1" dirty="0"/>
+              <a:t> </a:t>
+            </a:r>
+            <a:r>
+              <a:rPr lang="en-GB" b="1" dirty="0" err="1"/>
+              <a:t>המלצה</a:t>
+            </a:r>
+            <a:r>
+              <a:rPr lang="en-GB" b="1" dirty="0"/>
+              <a:t> </a:t>
+            </a:r>
+            <a:r>
+              <a:rPr lang="en-GB" b="1" dirty="0" err="1"/>
+              <a:t>שיחתית</a:t>
+            </a:r>
+            <a:r>
+              <a:rPr lang="he-IL" b="1" dirty="0"/>
+              <a:t>: </a:t>
+            </a:r>
+            <a:r>
+              <a:rPr lang="en-GB" dirty="0" err="1"/>
+              <a:t>שימוש</a:t>
+            </a:r>
+            <a:r>
+              <a:rPr lang="en-GB" dirty="0"/>
+              <a:t> </a:t>
+            </a:r>
+            <a:r>
+              <a:rPr lang="en-GB" dirty="0" err="1"/>
+              <a:t>בעיבוד</a:t>
+            </a:r>
+            <a:r>
+              <a:rPr lang="en-GB" dirty="0"/>
+              <a:t> </a:t>
+            </a:r>
+            <a:r>
+              <a:rPr lang="en-GB" dirty="0" err="1"/>
+              <a:t>שפה</a:t>
+            </a:r>
+            <a:r>
+              <a:rPr lang="en-GB" dirty="0"/>
+              <a:t> </a:t>
+            </a:r>
+            <a:r>
+              <a:rPr lang="en-GB" dirty="0" err="1"/>
+              <a:t>טבעית</a:t>
+            </a:r>
+            <a:r>
+              <a:rPr lang="en-GB" dirty="0"/>
+              <a:t> </a:t>
+            </a:r>
+            <a:r>
+              <a:rPr lang="en-GB" dirty="0" err="1"/>
+              <a:t>לחילוץ</a:t>
+            </a:r>
+            <a:r>
+              <a:rPr lang="en-GB" dirty="0"/>
+              <a:t> </a:t>
+            </a:r>
+            <a:r>
+              <a:rPr lang="en-GB" dirty="0" err="1"/>
+              <a:t>ישויות</a:t>
+            </a:r>
+            <a:r>
+              <a:rPr lang="en-GB" dirty="0"/>
+              <a:t> </a:t>
+            </a:r>
+            <a:r>
+              <a:rPr lang="en-GB" dirty="0" err="1"/>
+              <a:t>וכוונות</a:t>
+            </a:r>
+            <a:r>
+              <a:rPr lang="en-GB" dirty="0"/>
+              <a:t> </a:t>
+            </a:r>
+            <a:r>
+              <a:rPr lang="en-GB" dirty="0" err="1"/>
+              <a:t>טקסט</a:t>
+            </a:r>
+            <a:r>
+              <a:rPr lang="en-GB" dirty="0"/>
+              <a:t> </a:t>
+            </a:r>
+            <a:r>
+              <a:rPr lang="en-GB" dirty="0" err="1"/>
+              <a:t>של</a:t>
+            </a:r>
+            <a:r>
+              <a:rPr lang="en-GB" dirty="0"/>
+              <a:t> </a:t>
+            </a:r>
+            <a:r>
+              <a:rPr lang="en-GB" dirty="0" err="1"/>
+              <a:t>המשתמש</a:t>
+            </a:r>
+            <a:r>
+              <a:rPr lang="en-GB" dirty="0"/>
+              <a:t>. </a:t>
+            </a:r>
+            <a:r>
+              <a:rPr lang="en-GB" dirty="0" err="1"/>
+              <a:t>למשל</a:t>
+            </a:r>
+            <a:r>
+              <a:rPr lang="en-GB" dirty="0"/>
+              <a:t>, </a:t>
+            </a:r>
+            <a:r>
+              <a:rPr lang="en-GB" dirty="0" err="1"/>
+              <a:t>הבנה</a:t>
+            </a:r>
+            <a:r>
+              <a:rPr lang="en-GB" dirty="0"/>
+              <a:t> </a:t>
+            </a:r>
+            <a:r>
+              <a:rPr lang="en-GB" dirty="0" err="1"/>
+              <a:t>שהביטוי</a:t>
+            </a:r>
+            <a:r>
+              <a:rPr lang="en-GB" dirty="0"/>
+              <a:t> "</a:t>
+            </a:r>
+            <a:r>
+              <a:rPr lang="en-GB" dirty="0" err="1"/>
+              <a:t>יש</a:t>
+            </a:r>
+            <a:r>
+              <a:rPr lang="en-GB" dirty="0"/>
+              <a:t> </a:t>
+            </a:r>
+            <a:r>
+              <a:rPr lang="en-GB" dirty="0" err="1"/>
+              <a:t>לי</a:t>
+            </a:r>
+            <a:r>
+              <a:rPr lang="en-GB" dirty="0"/>
+              <a:t> </a:t>
+            </a:r>
+            <a:r>
+              <a:rPr lang="en-GB" dirty="0" err="1"/>
+              <a:t>הצפה</a:t>
+            </a:r>
+            <a:r>
+              <a:rPr lang="en-GB" dirty="0"/>
+              <a:t> </a:t>
+            </a:r>
+            <a:r>
+              <a:rPr lang="en-GB" dirty="0" err="1"/>
+              <a:t>עכשיו</a:t>
+            </a:r>
+            <a:r>
+              <a:rPr lang="en-GB" dirty="0"/>
+              <a:t>" </a:t>
+            </a:r>
+            <a:r>
+              <a:rPr lang="en-GB" dirty="0" err="1"/>
+              <a:t>דורש</a:t>
+            </a:r>
+            <a:r>
+              <a:rPr lang="en-GB" dirty="0"/>
+              <a:t> </a:t>
+            </a:r>
+            <a:r>
+              <a:rPr lang="en-GB" dirty="0" err="1"/>
+              <a:t>משקולת</a:t>
+            </a:r>
+            <a:r>
+              <a:rPr lang="en-GB" dirty="0"/>
+              <a:t> </a:t>
+            </a:r>
+            <a:r>
+              <a:rPr lang="en-GB" dirty="0" err="1"/>
+              <a:t>קריטית</a:t>
+            </a:r>
+            <a:r>
+              <a:rPr lang="en-GB" dirty="0"/>
+              <a:t> </a:t>
+            </a:r>
+            <a:r>
+              <a:rPr lang="en-GB" dirty="0" err="1"/>
+              <a:t>של</a:t>
+            </a:r>
+            <a:r>
+              <a:rPr lang="en-GB" dirty="0"/>
+              <a:t> "</a:t>
+            </a:r>
+            <a:r>
+              <a:rPr lang="en-GB" dirty="0" err="1"/>
+              <a:t>זמינות</a:t>
+            </a:r>
+            <a:r>
+              <a:rPr lang="en-GB" dirty="0"/>
+              <a:t> 24/7" </a:t>
+            </a:r>
+            <a:r>
+              <a:rPr lang="en-GB" dirty="0" err="1"/>
+              <a:t>ולא</a:t>
+            </a:r>
+            <a:r>
+              <a:rPr lang="en-GB" dirty="0"/>
+              <a:t> </a:t>
+            </a:r>
+            <a:r>
+              <a:rPr lang="en-GB" dirty="0" err="1"/>
+              <a:t>רק</a:t>
+            </a:r>
+            <a:r>
+              <a:rPr lang="en-GB" dirty="0"/>
+              <a:t> </a:t>
+            </a:r>
+            <a:r>
+              <a:rPr lang="en-GB" dirty="0" err="1"/>
+              <a:t>קרבה</a:t>
+            </a:r>
+            <a:r>
+              <a:rPr lang="en-GB" dirty="0"/>
+              <a:t> </a:t>
+            </a:r>
+            <a:r>
+              <a:rPr lang="en-GB" dirty="0" err="1"/>
+              <a:t>גיאוגרפית</a:t>
+            </a:r>
+            <a:r>
+              <a:rPr lang="en-GB" dirty="0"/>
+              <a:t>.</a:t>
+            </a:r>
+          </a:p>
+          <a:p>
+            <a:pPr lvl="0" algn="r" rtl="1"/>
+            <a:r>
+              <a:rPr lang="en-GB" b="1" dirty="0" err="1"/>
+              <a:t>סינון</a:t>
+            </a:r>
+            <a:r>
+              <a:rPr lang="en-GB" b="1" dirty="0"/>
+              <a:t> </a:t>
+            </a:r>
+            <a:r>
+              <a:rPr lang="en-GB" b="1" dirty="0" err="1"/>
+              <a:t>מרובה-קריטריונים</a:t>
+            </a:r>
+            <a:r>
+              <a:rPr lang="en-GB" b="1" dirty="0"/>
+              <a:t> </a:t>
+            </a:r>
+            <a:r>
+              <a:rPr lang="en-GB" b="1" dirty="0" err="1"/>
+              <a:t>אלגוריתמי</a:t>
+            </a:r>
+            <a:r>
+              <a:rPr lang="en-GB" b="1" dirty="0"/>
+              <a:t>:</a:t>
+            </a:r>
+            <a:r>
+              <a:rPr lang="en-GB" dirty="0"/>
+              <a:t> </a:t>
+            </a:r>
+            <a:r>
+              <a:rPr lang="en-GB" dirty="0" err="1"/>
+              <a:t>שקלול</a:t>
+            </a:r>
+            <a:r>
+              <a:rPr lang="en-GB" dirty="0"/>
+              <a:t> </a:t>
+            </a:r>
+            <a:r>
+              <a:rPr lang="en-GB" dirty="0" err="1"/>
+              <a:t>דינמי</a:t>
+            </a:r>
+            <a:r>
+              <a:rPr lang="en-GB" dirty="0"/>
+              <a:t> </a:t>
+            </a:r>
+            <a:r>
+              <a:rPr lang="en-GB" dirty="0" err="1"/>
+              <a:t>המשלב</a:t>
+            </a:r>
+            <a:r>
+              <a:rPr lang="en-GB" dirty="0"/>
+              <a:t> </a:t>
+            </a:r>
+            <a:r>
+              <a:rPr lang="en-GB" dirty="0" err="1"/>
+              <a:t>דירוג</a:t>
+            </a:r>
+            <a:r>
+              <a:rPr lang="en-GB" dirty="0"/>
+              <a:t> </a:t>
+            </a:r>
+            <a:r>
+              <a:rPr lang="en-GB" dirty="0" err="1"/>
+              <a:t>מצטבר</a:t>
+            </a:r>
+            <a:r>
+              <a:rPr lang="en-GB" dirty="0"/>
+              <a:t> </a:t>
+            </a:r>
+            <a:r>
+              <a:rPr lang="en-GB" dirty="0" err="1"/>
+              <a:t>של</a:t>
+            </a:r>
+            <a:r>
+              <a:rPr lang="en-GB" dirty="0"/>
+              <a:t> </a:t>
+            </a:r>
+            <a:r>
+              <a:rPr lang="en-GB" dirty="0" err="1"/>
+              <a:t>בעל</a:t>
+            </a:r>
+            <a:r>
+              <a:rPr lang="en-GB" dirty="0"/>
+              <a:t> </a:t>
+            </a:r>
+            <a:r>
+              <a:rPr lang="en-GB" dirty="0" err="1"/>
+              <a:t>המקצוע</a:t>
+            </a:r>
+            <a:r>
+              <a:rPr lang="en-GB" dirty="0"/>
+              <a:t>, </a:t>
+            </a:r>
+            <a:r>
+              <a:rPr lang="en-GB" dirty="0" err="1"/>
+              <a:t>כמות</a:t>
+            </a:r>
+            <a:r>
+              <a:rPr lang="en-GB" dirty="0"/>
+              <a:t> </a:t>
+            </a:r>
+            <a:r>
+              <a:rPr lang="en-GB" dirty="0" err="1"/>
+              <a:t>ההמלצות</a:t>
+            </a:r>
+            <a:r>
+              <a:rPr lang="en-GB" dirty="0"/>
+              <a:t> </a:t>
+            </a:r>
+            <a:r>
+              <a:rPr lang="en-GB" dirty="0" err="1"/>
+              <a:t>הרלוונטיות</a:t>
+            </a:r>
+            <a:r>
+              <a:rPr lang="en-GB" dirty="0"/>
+              <a:t> </a:t>
+            </a:r>
+            <a:r>
+              <a:rPr lang="en-GB" dirty="0" err="1"/>
+              <a:t>ספציפית</a:t>
+            </a:r>
+            <a:r>
+              <a:rPr lang="en-GB" dirty="0"/>
+              <a:t> </a:t>
+            </a:r>
+            <a:r>
+              <a:rPr lang="en-GB" dirty="0" err="1"/>
+              <a:t>לסוג</a:t>
+            </a:r>
+            <a:r>
+              <a:rPr lang="en-GB" dirty="0"/>
+              <a:t> </a:t>
+            </a:r>
+            <a:r>
+              <a:rPr lang="en-GB" dirty="0" err="1"/>
+              <a:t>התקלה</a:t>
+            </a:r>
+            <a:r>
+              <a:rPr lang="en-GB" dirty="0"/>
+              <a:t> </a:t>
+            </a:r>
+            <a:r>
+              <a:rPr lang="en-GB" dirty="0" err="1"/>
+              <a:t>שתוארה</a:t>
+            </a:r>
+            <a:r>
+              <a:rPr lang="en-GB" dirty="0"/>
+              <a:t>, </a:t>
+            </a:r>
+            <a:r>
+              <a:rPr lang="en-GB" dirty="0" err="1"/>
+              <a:t>ומרחק</a:t>
+            </a:r>
+            <a:r>
+              <a:rPr lang="en-GB" dirty="0"/>
+              <a:t> </a:t>
+            </a:r>
+            <a:r>
+              <a:rPr lang="en-GB" dirty="0" err="1"/>
+              <a:t>גיאוגרפי</a:t>
+            </a:r>
+            <a:r>
+              <a:rPr lang="en-GB" dirty="0"/>
+              <a:t>.</a:t>
+            </a:r>
+          </a:p>
+          <a:p>
+            <a:pPr lvl="0" algn="r" rtl="1"/>
+            <a:r>
+              <a:rPr lang="en-GB" b="1" dirty="0" err="1"/>
+              <a:t>התאמה</a:t>
+            </a:r>
+            <a:r>
+              <a:rPr lang="en-GB" b="1" dirty="0"/>
+              <a:t> </a:t>
+            </a:r>
+            <a:r>
+              <a:rPr lang="en-GB" b="1" dirty="0" err="1"/>
+              <a:t>אישית</a:t>
+            </a:r>
+            <a:r>
+              <a:rPr lang="en-GB" b="1" dirty="0"/>
+              <a:t> </a:t>
+            </a:r>
+            <a:r>
+              <a:rPr lang="en-GB" b="1" dirty="0" err="1"/>
+              <a:t>תוך</a:t>
+            </a:r>
+            <a:r>
+              <a:rPr lang="en-GB" b="1" dirty="0"/>
+              <a:t> </a:t>
+            </a:r>
+            <a:r>
+              <a:rPr lang="en-GB" b="1" dirty="0" err="1"/>
+              <a:t>כדי</a:t>
+            </a:r>
+            <a:r>
+              <a:rPr lang="en-GB" b="1" dirty="0"/>
+              <a:t> </a:t>
+            </a:r>
+            <a:r>
+              <a:rPr lang="en-GB" b="1" dirty="0" err="1"/>
+              <a:t>שיחה</a:t>
+            </a:r>
+            <a:r>
+              <a:rPr lang="en-GB" b="1" dirty="0"/>
+              <a:t>:</a:t>
+            </a:r>
+            <a:r>
+              <a:rPr lang="en-GB" dirty="0"/>
+              <a:t> </a:t>
+            </a:r>
+            <a:r>
+              <a:rPr lang="en-GB" dirty="0" err="1"/>
+              <a:t>המערכת</a:t>
+            </a:r>
+            <a:r>
+              <a:rPr lang="en-GB" dirty="0"/>
+              <a:t> </a:t>
+            </a:r>
+            <a:r>
+              <a:rPr lang="en-GB" dirty="0" err="1"/>
+              <a:t>תתאים</a:t>
+            </a:r>
+            <a:r>
+              <a:rPr lang="en-GB" dirty="0"/>
+              <a:t> </a:t>
+            </a:r>
+            <a:r>
+              <a:rPr lang="en-GB" dirty="0" err="1"/>
+              <a:t>את</a:t>
+            </a:r>
+            <a:r>
+              <a:rPr lang="en-GB" dirty="0"/>
+              <a:t> </a:t>
+            </a:r>
+            <a:r>
+              <a:rPr lang="en-GB" dirty="0" err="1"/>
+              <a:t>ההמלצות</a:t>
+            </a:r>
+            <a:r>
+              <a:rPr lang="en-GB" dirty="0"/>
+              <a:t> </a:t>
+            </a:r>
+            <a:r>
+              <a:rPr lang="en-GB" dirty="0" err="1"/>
+              <a:t>בזמן</a:t>
+            </a:r>
+            <a:r>
+              <a:rPr lang="en-GB" dirty="0"/>
+              <a:t> </a:t>
+            </a:r>
+            <a:r>
+              <a:rPr lang="en-GB" dirty="0" err="1"/>
+              <a:t>אמת</a:t>
+            </a:r>
+            <a:r>
+              <a:rPr lang="en-GB" dirty="0"/>
+              <a:t> </a:t>
+            </a:r>
+            <a:r>
+              <a:rPr lang="en-GB" dirty="0" err="1"/>
+              <a:t>לפי</a:t>
+            </a:r>
+            <a:r>
+              <a:rPr lang="en-GB" dirty="0"/>
+              <a:t> </a:t>
+            </a:r>
+            <a:r>
+              <a:rPr lang="en-GB" dirty="0" err="1"/>
+              <a:t>בחירות</a:t>
+            </a:r>
+            <a:r>
+              <a:rPr lang="en-GB" dirty="0"/>
+              <a:t> </a:t>
+            </a:r>
+            <a:r>
+              <a:rPr lang="en-GB" dirty="0" err="1"/>
+              <a:t>המשתמש</a:t>
+            </a:r>
+            <a:r>
+              <a:rPr lang="en-GB" dirty="0"/>
+              <a:t>. </a:t>
+            </a:r>
+            <a:r>
+              <a:rPr lang="en-GB" dirty="0" err="1"/>
+              <a:t>אם</a:t>
+            </a:r>
+            <a:r>
+              <a:rPr lang="en-GB" dirty="0"/>
+              <a:t> </a:t>
+            </a:r>
+            <a:r>
+              <a:rPr lang="en-GB" dirty="0" err="1"/>
+              <a:t>המשתמש</a:t>
+            </a:r>
+            <a:r>
+              <a:rPr lang="en-GB" dirty="0"/>
+              <a:t> </a:t>
+            </a:r>
+            <a:r>
+              <a:rPr lang="en-GB" dirty="0" err="1"/>
+              <a:t>ידחה</a:t>
+            </a:r>
+            <a:r>
+              <a:rPr lang="en-GB" dirty="0"/>
+              <a:t> </a:t>
+            </a:r>
+            <a:r>
+              <a:rPr lang="en-GB" dirty="0" err="1"/>
+              <a:t>בעל</a:t>
+            </a:r>
+            <a:r>
+              <a:rPr lang="en-GB" dirty="0"/>
+              <a:t> </a:t>
+            </a:r>
+            <a:r>
+              <a:rPr lang="en-GB" dirty="0" err="1"/>
+              <a:t>מקצוע</a:t>
+            </a:r>
+            <a:r>
+              <a:rPr lang="en-GB" dirty="0"/>
+              <a:t> </a:t>
+            </a:r>
+            <a:r>
+              <a:rPr lang="en-GB" dirty="0" err="1"/>
+              <a:t>כי</a:t>
+            </a:r>
+            <a:r>
+              <a:rPr lang="en-GB" dirty="0"/>
+              <a:t> </a:t>
+            </a:r>
+            <a:r>
+              <a:rPr lang="en-GB" dirty="0" err="1"/>
+              <a:t>הוא</a:t>
+            </a:r>
+            <a:r>
+              <a:rPr lang="en-GB" dirty="0"/>
+              <a:t> "</a:t>
+            </a:r>
+            <a:r>
+              <a:rPr lang="en-GB" dirty="0" err="1"/>
+              <a:t>יקר</a:t>
+            </a:r>
+            <a:r>
+              <a:rPr lang="en-GB" dirty="0"/>
+              <a:t> </a:t>
+            </a:r>
+            <a:r>
+              <a:rPr lang="en-GB" dirty="0" err="1"/>
+              <a:t>מדי</a:t>
+            </a:r>
+            <a:r>
+              <a:rPr lang="en-GB" dirty="0"/>
+              <a:t>", </a:t>
+            </a:r>
+            <a:r>
+              <a:rPr lang="en-GB" dirty="0" err="1"/>
+              <a:t>המערכת</a:t>
+            </a:r>
+            <a:r>
+              <a:rPr lang="en-GB" dirty="0"/>
+              <a:t> </a:t>
+            </a:r>
+            <a:r>
+              <a:rPr lang="en-GB" dirty="0" err="1"/>
+              <a:t>תעדכן</a:t>
+            </a:r>
+            <a:r>
+              <a:rPr lang="en-GB" dirty="0"/>
+              <a:t> </a:t>
+            </a:r>
+            <a:r>
+              <a:rPr lang="en-GB" dirty="0" err="1"/>
+              <a:t>את</a:t>
+            </a:r>
+            <a:r>
+              <a:rPr lang="en-GB" dirty="0"/>
+              <a:t> </a:t>
+            </a:r>
+            <a:r>
+              <a:rPr lang="en-GB" dirty="0" err="1"/>
+              <a:t>משקולות</a:t>
+            </a:r>
+            <a:r>
+              <a:rPr lang="en-GB" dirty="0"/>
+              <a:t> </a:t>
+            </a:r>
+            <a:r>
+              <a:rPr lang="en-GB" dirty="0" err="1"/>
+              <a:t>האלגוריתם</a:t>
+            </a:r>
+            <a:r>
+              <a:rPr lang="en-GB" dirty="0"/>
+              <a:t> </a:t>
+            </a:r>
+            <a:r>
+              <a:rPr lang="en-GB" dirty="0" err="1"/>
+              <a:t>כדי</a:t>
+            </a:r>
+            <a:r>
+              <a:rPr lang="en-GB" dirty="0"/>
+              <a:t> </a:t>
+            </a:r>
+            <a:r>
+              <a:rPr lang="en-GB" dirty="0" err="1"/>
+              <a:t>להציע</a:t>
+            </a:r>
+            <a:r>
+              <a:rPr lang="en-GB" dirty="0"/>
+              <a:t> </a:t>
+            </a:r>
+            <a:r>
+              <a:rPr lang="en-GB" dirty="0" err="1"/>
+              <a:t>חלופות</a:t>
+            </a:r>
+            <a:r>
+              <a:rPr lang="en-GB" dirty="0"/>
+              <a:t> </a:t>
+            </a:r>
+            <a:r>
+              <a:rPr lang="en-GB" dirty="0" err="1"/>
+              <a:t>זולות</a:t>
+            </a:r>
+            <a:r>
+              <a:rPr lang="en-GB" dirty="0"/>
+              <a:t> </a:t>
+            </a:r>
+            <a:r>
+              <a:rPr lang="en-GB" dirty="0" err="1"/>
+              <a:t>יותר</a:t>
+            </a:r>
+            <a:r>
+              <a:rPr lang="en-GB" dirty="0"/>
+              <a:t> </a:t>
+            </a:r>
+            <a:r>
+              <a:rPr lang="en-GB" dirty="0" err="1"/>
+              <a:t>גם</a:t>
+            </a:r>
+            <a:r>
+              <a:rPr lang="en-GB" dirty="0"/>
+              <a:t> </a:t>
+            </a:r>
+            <a:r>
+              <a:rPr lang="en-GB" dirty="0" err="1"/>
+              <a:t>על</a:t>
+            </a:r>
+            <a:r>
+              <a:rPr lang="en-GB" dirty="0"/>
+              <a:t> </a:t>
+            </a:r>
+            <a:r>
+              <a:rPr lang="en-GB" dirty="0" err="1"/>
+              <a:t>חשבון</a:t>
+            </a:r>
+            <a:r>
+              <a:rPr lang="en-GB" dirty="0"/>
+              <a:t> </a:t>
+            </a:r>
+            <a:r>
+              <a:rPr lang="en-GB" dirty="0" err="1"/>
+              <a:t>דירוג</a:t>
+            </a:r>
+            <a:r>
+              <a:rPr lang="en-GB" dirty="0"/>
+              <a:t> </a:t>
+            </a:r>
+            <a:r>
+              <a:rPr lang="en-GB" dirty="0" err="1"/>
+              <a:t>נמוך</a:t>
+            </a:r>
+            <a:r>
+              <a:rPr lang="en-GB" dirty="0"/>
+              <a:t> </a:t>
+            </a:r>
+            <a:r>
+              <a:rPr lang="en-GB" dirty="0" err="1"/>
+              <a:t>יותר</a:t>
+            </a:r>
+            <a:r>
+              <a:rPr lang="en-GB" dirty="0"/>
+              <a:t>.</a:t>
+            </a:r>
+          </a:p>
+          <a:p>
+            <a:pPr algn="r" rtl="1"/>
+            <a:endParaRPr lang="en-GB" dirty="0"/>
+          </a:p>
+        </p:txBody>
+      </p:sp>
+    </p:spTree>
+    <p:extLst>
+      <p:ext uri="{BB962C8B-B14F-4D97-AF65-F5344CB8AC3E}">
+        <p14:creationId xmlns:p14="http://schemas.microsoft.com/office/powerpoint/2010/main" val="2248956587"/>
+      </p:ext>
+    </p:extLst>
+  </p:cSld>
+  <p:clrMapOvr>
+    <a:masterClrMapping/>
+  </p:clrMapOvr>
+</p:sld>
+</file>
+
+<file path=ppt/slides/slide5.xml><?xml version="1.0" encoding="utf-8"?>
+<p:sld xmlns:a="http://schemas.openxmlformats.org/drawingml/2006/main" xmlns:r="http://schemas.openxmlformats.org/officeDocument/2006/relationships" xmlns:p="http://schemas.openxmlformats.org/presentationml/2006/main">
+  <p:cSld>
+    <p:bg>
+      <p:bgPr>
+        <a:solidFill>
+          <a:schemeClr val="accent2">
+            <a:lumMod val="20000"/>
+            <a:lumOff val="80000"/>
+          </a:schemeClr>
+        </a:solidFill>
+        <a:effectLst/>
+      </p:bgPr>
+    </p:bg>
+    <p:spTree>
+      <p:nvGrpSpPr>
+        <p:cNvPr id="1" name=""/>
+        <p:cNvGrpSpPr/>
+        <p:nvPr/>
+      </p:nvGrpSpPr>
+      <p:grpSpPr>
+        <a:xfrm>
+          <a:off x="0" y="0"/>
+          <a:ext cx="0" cy="0"/>
+          <a:chOff x="0" y="0"/>
+          <a:chExt cx="0" cy="0"/>
+        </a:xfrm>
+      </p:grpSpPr>
+      <p:sp>
+        <p:nvSpPr>
+          <p:cNvPr id="2" name="Title 1">
+            <a:extLst>
+              <a:ext uri="{FF2B5EF4-FFF2-40B4-BE49-F238E27FC236}">
+                <a16:creationId xmlns:a16="http://schemas.microsoft.com/office/drawing/2014/main" id="{4CAFA1C2-1B96-6A71-F33E-44BE150BE8DD}"/>
+              </a:ext>
+            </a:extLst>
+          </p:cNvPr>
+          <p:cNvSpPr>
+            <a:spLocks noGrp="1"/>
+          </p:cNvSpPr>
+          <p:nvPr>
+            <p:ph type="title"/>
+          </p:nvPr>
+        </p:nvSpPr>
+        <p:spPr/>
+        <p:txBody>
+          <a:bodyPr>
+            <a:normAutofit/>
+          </a:bodyPr>
+          <a:lstStyle/>
+          <a:p>
+            <a:pPr algn="r" rtl="1"/>
+            <a:r>
+              <a:rPr lang="he-IL" dirty="0"/>
+              <a:t>3. </a:t>
+            </a:r>
+            <a:r>
+              <a:rPr lang="en-GB" dirty="0" err="1"/>
+              <a:t>מערכת</a:t>
+            </a:r>
+            <a:r>
+              <a:rPr lang="en-GB" dirty="0"/>
+              <a:t> </a:t>
+            </a:r>
+            <a:r>
+              <a:rPr lang="en-GB" dirty="0" err="1"/>
+              <a:t>המלצה</a:t>
+            </a:r>
+            <a:r>
+              <a:rPr lang="en-GB" dirty="0"/>
+              <a:t> </a:t>
+            </a:r>
+            <a:r>
+              <a:rPr lang="en-GB" dirty="0" err="1"/>
+              <a:t>למאמרים</a:t>
+            </a:r>
+            <a:r>
+              <a:rPr lang="en-GB" dirty="0"/>
+              <a:t> </a:t>
+            </a:r>
+            <a:r>
+              <a:rPr lang="en-GB" dirty="0" err="1"/>
+              <a:t>אקדמיים</a:t>
+            </a:r>
+            <a:endParaRPr lang="en-GB" dirty="0"/>
+          </a:p>
+        </p:txBody>
+      </p:sp>
+      <p:sp>
+        <p:nvSpPr>
+          <p:cNvPr id="3" name="Content Placeholder 2">
+            <a:extLst>
+              <a:ext uri="{FF2B5EF4-FFF2-40B4-BE49-F238E27FC236}">
+                <a16:creationId xmlns:a16="http://schemas.microsoft.com/office/drawing/2014/main" id="{25BA9C2E-5AF8-D13B-F603-DF97718E5BF8}"/>
+              </a:ext>
+            </a:extLst>
+          </p:cNvPr>
+          <p:cNvSpPr>
+            <a:spLocks noGrp="1"/>
+          </p:cNvSpPr>
+          <p:nvPr>
+            <p:ph idx="1"/>
+          </p:nvPr>
+        </p:nvSpPr>
+        <p:spPr/>
+        <p:txBody>
+          <a:bodyPr/>
+          <a:lstStyle/>
+          <a:p>
+            <a:pPr lvl="0" algn="r" rtl="1"/>
+            <a:r>
+              <a:rPr lang="en-GB" b="1" dirty="0" err="1"/>
+              <a:t>הבעיה</a:t>
+            </a:r>
+            <a:r>
+              <a:rPr lang="en-GB" b="1" dirty="0"/>
+              <a:t>:</a:t>
+            </a:r>
+            <a:r>
+              <a:rPr lang="en-GB" dirty="0"/>
+              <a:t> </a:t>
+            </a:r>
+            <a:r>
+              <a:rPr lang="en-GB" dirty="0" err="1"/>
+              <a:t>עומס</a:t>
+            </a:r>
+            <a:r>
+              <a:rPr lang="en-GB" dirty="0"/>
+              <a:t> </a:t>
+            </a:r>
+            <a:r>
+              <a:rPr lang="en-GB" dirty="0" err="1"/>
+              <a:t>המידע</a:t>
+            </a:r>
+            <a:r>
+              <a:rPr lang="en-GB" dirty="0"/>
+              <a:t> </a:t>
+            </a:r>
+            <a:r>
+              <a:rPr lang="en-GB" dirty="0" err="1"/>
+              <a:t>באקדמיה</a:t>
+            </a:r>
+            <a:r>
+              <a:rPr lang="en-GB" dirty="0"/>
+              <a:t> </a:t>
+            </a:r>
+            <a:r>
+              <a:rPr lang="en-GB" dirty="0" err="1"/>
+              <a:t>מקשה</a:t>
+            </a:r>
+            <a:r>
+              <a:rPr lang="en-GB" dirty="0"/>
+              <a:t> </a:t>
+            </a:r>
+            <a:r>
+              <a:rPr lang="en-GB" dirty="0" err="1"/>
+              <a:t>על</a:t>
+            </a:r>
+            <a:r>
+              <a:rPr lang="en-GB" dirty="0"/>
+              <a:t> </a:t>
+            </a:r>
+            <a:r>
+              <a:rPr lang="he-IL" dirty="0"/>
+              <a:t>מציאת </a:t>
+            </a:r>
+            <a:r>
+              <a:rPr lang="en-GB" dirty="0" err="1"/>
+              <a:t>מאמרים</a:t>
+            </a:r>
+            <a:r>
+              <a:rPr lang="en-GB" dirty="0"/>
+              <a:t> </a:t>
+            </a:r>
+            <a:r>
+              <a:rPr lang="en-GB" dirty="0" err="1"/>
+              <a:t>מדויקים</a:t>
+            </a:r>
+            <a:r>
+              <a:rPr lang="en-GB" dirty="0"/>
+              <a:t> </a:t>
+            </a:r>
+            <a:r>
+              <a:rPr lang="en-GB" dirty="0" err="1"/>
+              <a:t>לסקירת</a:t>
+            </a:r>
+            <a:r>
+              <a:rPr lang="en-GB" dirty="0"/>
+              <a:t> </a:t>
+            </a:r>
+            <a:r>
+              <a:rPr lang="en-GB" dirty="0" err="1"/>
+              <a:t>ספרות</a:t>
+            </a:r>
+            <a:r>
+              <a:rPr lang="en-GB" dirty="0"/>
+              <a:t> </a:t>
+            </a:r>
+            <a:r>
+              <a:rPr lang="en-GB" dirty="0" err="1"/>
+              <a:t>לציטוט</a:t>
+            </a:r>
+            <a:r>
+              <a:rPr lang="en-GB" dirty="0"/>
+              <a:t>.</a:t>
+            </a:r>
+            <a:r>
+              <a:rPr lang="he-IL" dirty="0"/>
+              <a:t> או למציאת מידע שימושי ורלוונטי</a:t>
+            </a:r>
+            <a:endParaRPr lang="en-GB" dirty="0"/>
+          </a:p>
+          <a:p>
+            <a:pPr lvl="0" algn="r" rtl="1"/>
+            <a:r>
+              <a:rPr lang="en-GB" b="1" dirty="0" err="1"/>
+              <a:t>הפתרון</a:t>
+            </a:r>
+            <a:r>
+              <a:rPr lang="en-GB" b="1" dirty="0"/>
+              <a:t>:</a:t>
+            </a:r>
+            <a:r>
+              <a:rPr lang="en-GB" dirty="0"/>
+              <a:t> </a:t>
+            </a:r>
+            <a:r>
+              <a:rPr lang="en-GB" dirty="0" err="1"/>
+              <a:t>מערכת</a:t>
+            </a:r>
+            <a:r>
+              <a:rPr lang="en-GB" dirty="0"/>
+              <a:t> </a:t>
+            </a:r>
+            <a:r>
+              <a:rPr lang="en-GB" dirty="0" err="1"/>
+              <a:t>חכמה</a:t>
+            </a:r>
+            <a:r>
+              <a:rPr lang="en-GB" dirty="0"/>
+              <a:t> </a:t>
+            </a:r>
+            <a:r>
+              <a:rPr lang="he-IL" dirty="0"/>
+              <a:t>מבוססת </a:t>
+            </a:r>
+            <a:r>
+              <a:rPr lang="en-US" dirty="0"/>
+              <a:t>AI</a:t>
+            </a:r>
+            <a:r>
+              <a:rPr lang="he-IL" dirty="0"/>
+              <a:t> </a:t>
+            </a:r>
+            <a:r>
+              <a:rPr lang="en-GB" dirty="0" err="1"/>
+              <a:t>המקבלת</a:t>
+            </a:r>
+            <a:r>
+              <a:rPr lang="en-GB" dirty="0"/>
+              <a:t> </a:t>
+            </a:r>
+            <a:r>
+              <a:rPr lang="en-GB" dirty="0" err="1"/>
+              <a:t>כקלט</a:t>
+            </a:r>
+            <a:r>
+              <a:rPr lang="en-GB" dirty="0"/>
+              <a:t> </a:t>
+            </a:r>
+            <a:r>
+              <a:rPr lang="en-GB" dirty="0" err="1"/>
+              <a:t>טקסט</a:t>
+            </a:r>
+            <a:r>
+              <a:rPr lang="en-GB" dirty="0"/>
+              <a:t> </a:t>
+            </a:r>
+            <a:r>
+              <a:rPr lang="en-GB" dirty="0" err="1"/>
+              <a:t>חופשי</a:t>
+            </a:r>
+            <a:r>
+              <a:rPr lang="en-GB" dirty="0"/>
+              <a:t> </a:t>
+            </a:r>
+            <a:r>
+              <a:rPr lang="en-GB" dirty="0" err="1"/>
+              <a:t>ומאתרת</a:t>
+            </a:r>
+            <a:r>
+              <a:rPr lang="en-GB" dirty="0"/>
+              <a:t> </a:t>
+            </a:r>
+            <a:r>
+              <a:rPr lang="en-GB" dirty="0" err="1"/>
+              <a:t>מאמרים</a:t>
+            </a:r>
+            <a:r>
+              <a:rPr lang="en-GB" dirty="0"/>
+              <a:t> </a:t>
+            </a:r>
+            <a:r>
+              <a:rPr lang="en-GB" dirty="0" err="1"/>
+              <a:t>רלוונטיים</a:t>
+            </a:r>
+            <a:r>
+              <a:rPr lang="en-GB" dirty="0"/>
+              <a:t> </a:t>
+            </a:r>
+            <a:r>
+              <a:rPr lang="en-GB" dirty="0" err="1"/>
+              <a:t>סמנטית</a:t>
+            </a:r>
+            <a:r>
+              <a:rPr lang="en-GB" dirty="0"/>
+              <a:t>, </a:t>
+            </a:r>
+            <a:r>
+              <a:rPr lang="en-GB" dirty="0" err="1"/>
+              <a:t>ולא</a:t>
+            </a:r>
+            <a:r>
+              <a:rPr lang="en-GB" dirty="0"/>
+              <a:t> </a:t>
+            </a:r>
+            <a:r>
+              <a:rPr lang="en-GB" dirty="0" err="1"/>
+              <a:t>רק</a:t>
+            </a:r>
+            <a:r>
+              <a:rPr lang="en-GB" dirty="0"/>
+              <a:t> </a:t>
+            </a:r>
+            <a:r>
+              <a:rPr lang="en-GB" dirty="0" err="1"/>
+              <a:t>על</a:t>
+            </a:r>
+            <a:r>
+              <a:rPr lang="en-GB" dirty="0"/>
+              <a:t> </a:t>
+            </a:r>
+            <a:r>
+              <a:rPr lang="en-GB" dirty="0" err="1"/>
+              <a:t>בסיס</a:t>
+            </a:r>
+            <a:r>
+              <a:rPr lang="en-GB" dirty="0"/>
+              <a:t> </a:t>
+            </a:r>
+            <a:r>
+              <a:rPr lang="en-GB" dirty="0" err="1"/>
+              <a:t>מילות</a:t>
+            </a:r>
+            <a:r>
+              <a:rPr lang="en-GB" dirty="0"/>
+              <a:t> </a:t>
+            </a:r>
+            <a:r>
+              <a:rPr lang="en-GB" dirty="0" err="1"/>
+              <a:t>מפתח</a:t>
+            </a:r>
+            <a:r>
+              <a:rPr lang="en-GB" dirty="0"/>
+              <a:t>.</a:t>
+            </a:r>
+          </a:p>
+          <a:p>
+            <a:pPr lvl="0" algn="r" rtl="1"/>
+            <a:r>
+              <a:rPr lang="en-GB" b="1" dirty="0" err="1"/>
+              <a:t>ערך</a:t>
+            </a:r>
+            <a:r>
+              <a:rPr lang="en-GB" b="1" dirty="0"/>
+              <a:t> </a:t>
+            </a:r>
+            <a:r>
+              <a:rPr lang="en-GB" b="1" dirty="0" err="1"/>
+              <a:t>מוסף</a:t>
+            </a:r>
+            <a:r>
+              <a:rPr lang="en-GB" b="1" dirty="0"/>
+              <a:t>:</a:t>
+            </a:r>
+            <a:r>
+              <a:rPr lang="en-GB" dirty="0"/>
+              <a:t> </a:t>
+            </a:r>
+            <a:r>
+              <a:rPr lang="en-GB" dirty="0" err="1"/>
+              <a:t>חיסכון</a:t>
+            </a:r>
+            <a:r>
+              <a:rPr lang="en-GB" dirty="0"/>
+              <a:t> </a:t>
+            </a:r>
+            <a:r>
+              <a:rPr lang="en-GB" dirty="0" err="1"/>
+              <a:t>משמעותי</a:t>
+            </a:r>
+            <a:r>
+              <a:rPr lang="en-GB" dirty="0"/>
+              <a:t> </a:t>
+            </a:r>
+            <a:r>
+              <a:rPr lang="en-GB" dirty="0" err="1"/>
+              <a:t>בזמן</a:t>
+            </a:r>
+            <a:r>
+              <a:rPr lang="en-GB" dirty="0"/>
+              <a:t>, </a:t>
+            </a:r>
+            <a:r>
+              <a:rPr lang="en-GB" dirty="0" err="1"/>
+              <a:t>חשיפה</a:t>
+            </a:r>
+            <a:r>
+              <a:rPr lang="en-GB" dirty="0"/>
+              <a:t> </a:t>
+            </a:r>
+            <a:r>
+              <a:rPr lang="en-GB" dirty="0" err="1"/>
+              <a:t>למאמרים</a:t>
+            </a:r>
+            <a:r>
+              <a:rPr lang="en-GB" dirty="0"/>
+              <a:t> </a:t>
+            </a:r>
+            <a:r>
+              <a:rPr lang="he-IL" dirty="0"/>
+              <a:t>הקשורים לנושא </a:t>
+            </a:r>
+            <a:r>
+              <a:rPr lang="en-GB" dirty="0" err="1"/>
+              <a:t>משיקים</a:t>
+            </a:r>
+            <a:r>
+              <a:rPr lang="en-GB" dirty="0"/>
+              <a:t> </a:t>
+            </a:r>
+            <a:r>
+              <a:rPr lang="en-GB" dirty="0" err="1"/>
+              <a:t>שאולי</a:t>
+            </a:r>
+            <a:r>
+              <a:rPr lang="en-GB" dirty="0"/>
+              <a:t> </a:t>
+            </a:r>
+            <a:r>
+              <a:rPr lang="en-GB" dirty="0" err="1"/>
+              <a:t>לא</a:t>
+            </a:r>
+            <a:r>
+              <a:rPr lang="en-GB" dirty="0"/>
+              <a:t> </a:t>
+            </a:r>
+            <a:r>
+              <a:rPr lang="en-GB" dirty="0" err="1"/>
+              <a:t>היו</a:t>
+            </a:r>
+            <a:r>
+              <a:rPr lang="en-GB" dirty="0"/>
+              <a:t> </a:t>
+            </a:r>
+            <a:r>
+              <a:rPr lang="en-GB" dirty="0" err="1"/>
+              <a:t>עולים</a:t>
+            </a:r>
+            <a:r>
+              <a:rPr lang="en-GB" dirty="0"/>
+              <a:t> </a:t>
+            </a:r>
+            <a:r>
+              <a:rPr lang="en-GB" dirty="0" err="1"/>
+              <a:t>בחיפוש</a:t>
+            </a:r>
+            <a:r>
+              <a:rPr lang="en-GB" dirty="0"/>
+              <a:t> </a:t>
+            </a:r>
+            <a:r>
+              <a:rPr lang="en-GB" dirty="0" err="1"/>
+              <a:t>בוליאני</a:t>
+            </a:r>
+            <a:r>
+              <a:rPr lang="en-GB" dirty="0"/>
+              <a:t> </a:t>
+            </a:r>
+            <a:r>
+              <a:rPr lang="en-GB" dirty="0" err="1"/>
+              <a:t>רגיל</a:t>
+            </a:r>
+            <a:r>
+              <a:rPr lang="en-GB" dirty="0"/>
+              <a:t>, </a:t>
+            </a:r>
+            <a:r>
+              <a:rPr lang="en-GB" dirty="0" err="1"/>
+              <a:t>ושיפור</a:t>
+            </a:r>
+            <a:r>
+              <a:rPr lang="en-GB" dirty="0"/>
+              <a:t> </a:t>
+            </a:r>
+            <a:r>
+              <a:rPr lang="en-GB" dirty="0" err="1"/>
+              <a:t>איכות</a:t>
+            </a:r>
+            <a:r>
+              <a:rPr lang="en-GB" dirty="0"/>
+              <a:t> </a:t>
+            </a:r>
+            <a:r>
+              <a:rPr lang="en-GB" dirty="0" err="1"/>
+              <a:t>המחקר</a:t>
+            </a:r>
+            <a:r>
+              <a:rPr lang="en-GB" dirty="0"/>
+              <a:t>.</a:t>
+            </a:r>
+          </a:p>
+          <a:p>
+            <a:pPr algn="r" rtl="1"/>
+            <a:endParaRPr lang="en-GB" dirty="0"/>
+          </a:p>
+        </p:txBody>
+      </p:sp>
+    </p:spTree>
+    <p:extLst>
+      <p:ext uri="{BB962C8B-B14F-4D97-AF65-F5344CB8AC3E}">
+        <p14:creationId xmlns:p14="http://schemas.microsoft.com/office/powerpoint/2010/main" val="1040293046"/>
+      </p:ext>
+    </p:extLst>
+  </p:cSld>
+  <p:clrMapOvr>
+    <a:masterClrMapping/>
+  </p:clrMapOvr>
+</p:sld>
+</file>
+
+<file path=ppt/slides/slide6.xml><?xml version="1.0" encoding="utf-8"?>
+<p:sld xmlns:a="http://schemas.openxmlformats.org/drawingml/2006/main" xmlns:r="http://schemas.openxmlformats.org/officeDocument/2006/relationships" xmlns:p="http://schemas.openxmlformats.org/presentationml/2006/main">
+  <p:cSld>
+    <p:bg>
+      <p:bgPr>
+        <a:solidFill>
+          <a:schemeClr val="accent2">
+            <a:lumMod val="20000"/>
+            <a:lumOff val="80000"/>
+          </a:schemeClr>
+        </a:solidFill>
+        <a:effectLst/>
+      </p:bgPr>
+    </p:bg>
+    <p:spTree>
+      <p:nvGrpSpPr>
+        <p:cNvPr id="1" name=""/>
+        <p:cNvGrpSpPr/>
+        <p:nvPr/>
+      </p:nvGrpSpPr>
+      <p:grpSpPr>
+        <a:xfrm>
+          <a:off x="0" y="0"/>
+          <a:ext cx="0" cy="0"/>
+          <a:chOff x="0" y="0"/>
+          <a:chExt cx="0" cy="0"/>
+        </a:xfrm>
+      </p:grpSpPr>
+      <p:sp>
+        <p:nvSpPr>
+          <p:cNvPr id="2" name="Title 1">
+            <a:extLst>
+              <a:ext uri="{FF2B5EF4-FFF2-40B4-BE49-F238E27FC236}">
+                <a16:creationId xmlns:a16="http://schemas.microsoft.com/office/drawing/2014/main" id="{D8040DBF-C8BB-59CB-C3AB-CAC379075E22}"/>
+              </a:ext>
+            </a:extLst>
+          </p:cNvPr>
+          <p:cNvSpPr>
+            <a:spLocks noGrp="1"/>
+          </p:cNvSpPr>
+          <p:nvPr>
+            <p:ph type="title"/>
+          </p:nvPr>
+        </p:nvSpPr>
+        <p:spPr/>
+        <p:txBody>
+          <a:bodyPr/>
+          <a:lstStyle/>
+          <a:p>
+            <a:pPr algn="r" rtl="1"/>
+            <a:r>
+              <a:rPr lang="en-GB" dirty="0" err="1"/>
+              <a:t>מנגנון</a:t>
+            </a:r>
+            <a:endParaRPr lang="en-GB" dirty="0"/>
+          </a:p>
+        </p:txBody>
+      </p:sp>
+      <p:sp>
+        <p:nvSpPr>
+          <p:cNvPr id="3" name="Content Placeholder 2">
+            <a:extLst>
+              <a:ext uri="{FF2B5EF4-FFF2-40B4-BE49-F238E27FC236}">
+                <a16:creationId xmlns:a16="http://schemas.microsoft.com/office/drawing/2014/main" id="{A5F20A89-A84B-3AE7-B521-3D67813481C2}"/>
+              </a:ext>
+            </a:extLst>
+          </p:cNvPr>
+          <p:cNvSpPr>
+            <a:spLocks noGrp="1"/>
+          </p:cNvSpPr>
+          <p:nvPr>
+            <p:ph idx="1"/>
+          </p:nvPr>
+        </p:nvSpPr>
+        <p:spPr/>
+        <p:txBody>
+          <a:bodyPr/>
+          <a:lstStyle/>
+          <a:p>
+            <a:pPr lvl="0" algn="r" rtl="1"/>
+            <a:r>
+              <a:rPr lang="en-GB" b="1" dirty="0" err="1"/>
+              <a:t>עיבוד</a:t>
+            </a:r>
+            <a:r>
+              <a:rPr lang="en-GB" b="1" dirty="0"/>
+              <a:t> </a:t>
+            </a:r>
+            <a:r>
+              <a:rPr lang="en-GB" b="1" dirty="0" err="1"/>
+              <a:t>שפה</a:t>
+            </a:r>
+            <a:r>
+              <a:rPr lang="en-GB" b="1" dirty="0"/>
+              <a:t> </a:t>
+            </a:r>
+            <a:r>
+              <a:rPr lang="en-GB" b="1" dirty="0" err="1"/>
+              <a:t>טבעית</a:t>
+            </a:r>
+            <a:r>
+              <a:rPr lang="en-GB" b="1" dirty="0"/>
+              <a:t> :</a:t>
+            </a:r>
+            <a:r>
+              <a:rPr lang="en-GB" dirty="0"/>
+              <a:t> </a:t>
+            </a:r>
+            <a:r>
+              <a:rPr lang="en-GB" dirty="0" err="1"/>
+              <a:t>שימוש</a:t>
+            </a:r>
+            <a:r>
+              <a:rPr lang="en-GB" dirty="0"/>
+              <a:t> </a:t>
+            </a:r>
+            <a:r>
+              <a:rPr lang="en-GB" dirty="0" err="1"/>
+              <a:t>במודלי</a:t>
+            </a:r>
+            <a:r>
+              <a:rPr lang="en-GB" dirty="0"/>
+              <a:t> </a:t>
+            </a:r>
+            <a:r>
+              <a:rPr lang="en-GB" dirty="0" err="1"/>
+              <a:t>שפה</a:t>
+            </a:r>
+            <a:r>
+              <a:rPr lang="en-GB" dirty="0"/>
+              <a:t> </a:t>
+            </a:r>
+            <a:r>
+              <a:rPr lang="en-GB" dirty="0" err="1"/>
+              <a:t>כדי</a:t>
+            </a:r>
+            <a:r>
+              <a:rPr lang="en-GB" dirty="0"/>
+              <a:t> </a:t>
+            </a:r>
+            <a:r>
+              <a:rPr lang="en-GB" dirty="0" err="1"/>
+              <a:t>להבין</a:t>
+            </a:r>
+            <a:r>
+              <a:rPr lang="en-GB" dirty="0"/>
+              <a:t> </a:t>
+            </a:r>
+            <a:r>
+              <a:rPr lang="en-GB" dirty="0" err="1"/>
+              <a:t>את</a:t>
+            </a:r>
+            <a:r>
+              <a:rPr lang="en-GB" dirty="0"/>
+              <a:t> </a:t>
+            </a:r>
+            <a:r>
+              <a:rPr lang="en-GB" dirty="0" err="1"/>
+              <a:t>ההקשר</a:t>
+            </a:r>
+            <a:r>
+              <a:rPr lang="en-GB" dirty="0"/>
+              <a:t> </a:t>
+            </a:r>
+            <a:r>
+              <a:rPr lang="en-GB" dirty="0" err="1"/>
+              <a:t>והסמנטיקה</a:t>
+            </a:r>
+            <a:r>
+              <a:rPr lang="en-GB" dirty="0"/>
+              <a:t> </a:t>
+            </a:r>
+            <a:r>
+              <a:rPr lang="en-GB" dirty="0" err="1"/>
+              <a:t>של</a:t>
+            </a:r>
+            <a:r>
+              <a:rPr lang="en-GB" dirty="0"/>
+              <a:t> </a:t>
+            </a:r>
+            <a:r>
+              <a:rPr lang="en-GB" dirty="0" err="1"/>
+              <a:t>תיאור</a:t>
+            </a:r>
+            <a:r>
+              <a:rPr lang="en-GB" dirty="0"/>
+              <a:t> </a:t>
+            </a:r>
+            <a:r>
+              <a:rPr lang="en-GB" dirty="0" err="1"/>
+              <a:t>הפרויקט</a:t>
+            </a:r>
+            <a:r>
+              <a:rPr lang="en-GB" dirty="0"/>
+              <a:t> </a:t>
+            </a:r>
+            <a:r>
+              <a:rPr lang="en-GB" dirty="0" err="1"/>
+              <a:t>שמזין</a:t>
+            </a:r>
+            <a:r>
+              <a:rPr lang="en-GB" dirty="0"/>
+              <a:t> </a:t>
+            </a:r>
+            <a:r>
+              <a:rPr lang="en-GB" dirty="0" err="1"/>
+              <a:t>המשתמש</a:t>
+            </a:r>
+            <a:r>
+              <a:rPr lang="en-GB" dirty="0"/>
+              <a:t>.</a:t>
+            </a:r>
+          </a:p>
+          <a:p>
+            <a:pPr lvl="0" algn="r" rtl="1"/>
+            <a:r>
+              <a:rPr lang="he-IL" b="1" dirty="0"/>
+              <a:t> </a:t>
+            </a:r>
+            <a:r>
+              <a:rPr lang="en-GB" b="1" dirty="0"/>
+              <a:t>Content-Based Filtering:</a:t>
+            </a:r>
+            <a:r>
+              <a:rPr lang="en-GB" dirty="0"/>
+              <a:t> </a:t>
+            </a:r>
+            <a:r>
+              <a:rPr lang="en-GB" dirty="0" err="1"/>
+              <a:t>חישוב</a:t>
+            </a:r>
+            <a:r>
+              <a:rPr lang="en-GB" dirty="0"/>
+              <a:t> </a:t>
+            </a:r>
+            <a:r>
+              <a:rPr lang="en-GB" dirty="0" err="1"/>
+              <a:t>דמיון</a:t>
+            </a:r>
+            <a:r>
+              <a:rPr lang="en-GB" dirty="0"/>
+              <a:t> </a:t>
+            </a:r>
+            <a:r>
+              <a:rPr lang="en-GB" dirty="0" err="1"/>
+              <a:t>בין</a:t>
+            </a:r>
+            <a:r>
+              <a:rPr lang="en-GB" dirty="0"/>
+              <a:t> </a:t>
+            </a:r>
+            <a:r>
+              <a:rPr lang="en-GB" dirty="0" err="1"/>
+              <a:t>ייצוג</a:t>
+            </a:r>
+            <a:r>
+              <a:rPr lang="en-GB" dirty="0"/>
+              <a:t> </a:t>
+            </a:r>
+            <a:r>
+              <a:rPr lang="en-GB" dirty="0" err="1"/>
+              <a:t>הפרויקט</a:t>
+            </a:r>
+            <a:r>
+              <a:rPr lang="en-GB" dirty="0"/>
+              <a:t> </a:t>
+            </a:r>
+            <a:r>
+              <a:rPr lang="en-GB" dirty="0" err="1"/>
+              <a:t>של</a:t>
+            </a:r>
+            <a:r>
+              <a:rPr lang="en-GB" dirty="0"/>
+              <a:t> </a:t>
+            </a:r>
+            <a:r>
+              <a:rPr lang="en-GB" dirty="0" err="1"/>
+              <a:t>המשתמש</a:t>
+            </a:r>
+            <a:r>
+              <a:rPr lang="en-GB" dirty="0"/>
+              <a:t>  </a:t>
+            </a:r>
+            <a:r>
+              <a:rPr lang="en-GB" dirty="0" err="1"/>
+              <a:t>לבין</a:t>
+            </a:r>
+            <a:r>
+              <a:rPr lang="en-GB" dirty="0"/>
+              <a:t> </a:t>
+            </a:r>
+            <a:r>
+              <a:rPr lang="en-GB" dirty="0" err="1"/>
+              <a:t>מאגר</a:t>
+            </a:r>
+            <a:r>
+              <a:rPr lang="en-GB" dirty="0"/>
+              <a:t> </a:t>
+            </a:r>
+            <a:r>
+              <a:rPr lang="en-GB" dirty="0" err="1"/>
+              <a:t>התקצירים</a:t>
+            </a:r>
+            <a:r>
+              <a:rPr lang="en-GB" dirty="0"/>
+              <a:t> </a:t>
+            </a:r>
+            <a:r>
+              <a:rPr lang="en-GB" dirty="0" err="1"/>
+              <a:t>של</a:t>
+            </a:r>
+            <a:r>
+              <a:rPr lang="en-GB" dirty="0"/>
+              <a:t> </a:t>
+            </a:r>
+            <a:r>
+              <a:rPr lang="en-GB" dirty="0" err="1"/>
+              <a:t>המאמרים</a:t>
+            </a:r>
+            <a:r>
+              <a:rPr lang="en-GB" dirty="0"/>
+              <a:t>.</a:t>
+            </a:r>
+          </a:p>
+          <a:p>
+            <a:pPr lvl="0" algn="r" rtl="1"/>
+            <a:r>
+              <a:rPr lang="en-GB" b="1" dirty="0" err="1"/>
+              <a:t>פרסונליזציה</a:t>
+            </a:r>
+            <a:r>
+              <a:rPr lang="en-GB" b="1" dirty="0"/>
+              <a:t> </a:t>
+            </a:r>
+            <a:r>
+              <a:rPr lang="en-GB" b="1" dirty="0" err="1"/>
+              <a:t>מתמשכת</a:t>
+            </a:r>
+            <a:r>
+              <a:rPr lang="en-GB" b="1" dirty="0"/>
+              <a:t>:</a:t>
+            </a:r>
+            <a:r>
+              <a:rPr lang="en-GB" dirty="0"/>
+              <a:t> </a:t>
+            </a:r>
+            <a:r>
+              <a:rPr lang="en-GB" dirty="0" err="1"/>
+              <a:t>המערכת</a:t>
+            </a:r>
+            <a:r>
+              <a:rPr lang="en-GB" dirty="0"/>
+              <a:t> </a:t>
+            </a:r>
+            <a:r>
+              <a:rPr lang="en-GB" dirty="0" err="1"/>
+              <a:t>תלמד</a:t>
+            </a:r>
+            <a:r>
+              <a:rPr lang="en-GB" dirty="0"/>
+              <a:t> </a:t>
+            </a:r>
+            <a:r>
+              <a:rPr lang="en-GB" dirty="0" err="1"/>
+              <a:t>מההיסטוריה</a:t>
+            </a:r>
+            <a:r>
+              <a:rPr lang="en-GB" dirty="0"/>
+              <a:t> </a:t>
+            </a:r>
+            <a:r>
+              <a:rPr lang="en-GB" dirty="0" err="1"/>
+              <a:t>של</a:t>
+            </a:r>
+            <a:r>
+              <a:rPr lang="en-GB" dirty="0"/>
+              <a:t> </a:t>
+            </a:r>
+            <a:r>
+              <a:rPr lang="en-GB" dirty="0" err="1"/>
+              <a:t>המשתמש</a:t>
+            </a:r>
+            <a:r>
+              <a:rPr lang="en-GB" dirty="0"/>
+              <a:t> – </a:t>
+            </a:r>
+            <a:r>
+              <a:rPr lang="en-GB" dirty="0" err="1"/>
+              <a:t>אילו</a:t>
+            </a:r>
+            <a:r>
+              <a:rPr lang="en-GB" dirty="0"/>
+              <a:t> </a:t>
+            </a:r>
+            <a:r>
+              <a:rPr lang="en-GB" dirty="0" err="1"/>
+              <a:t>מאמרים</a:t>
+            </a:r>
+            <a:r>
+              <a:rPr lang="en-GB" dirty="0"/>
+              <a:t> </a:t>
+            </a:r>
+            <a:r>
+              <a:rPr lang="en-GB" dirty="0" err="1"/>
+              <a:t>הוא</a:t>
+            </a:r>
+            <a:r>
+              <a:rPr lang="en-GB" dirty="0"/>
+              <a:t> </a:t>
+            </a:r>
+            <a:r>
+              <a:rPr lang="en-GB" dirty="0" err="1"/>
+              <a:t>שמר</a:t>
+            </a:r>
+            <a:r>
+              <a:rPr lang="en-GB" dirty="0"/>
+              <a:t>, </a:t>
+            </a:r>
+            <a:r>
+              <a:rPr lang="en-GB" dirty="0" err="1"/>
+              <a:t>ציטט</a:t>
+            </a:r>
+            <a:r>
+              <a:rPr lang="en-GB" dirty="0"/>
+              <a:t> </a:t>
+            </a:r>
+            <a:r>
+              <a:rPr lang="en-GB" dirty="0" err="1"/>
+              <a:t>או</a:t>
+            </a:r>
+            <a:r>
+              <a:rPr lang="en-GB" dirty="0"/>
+              <a:t> </a:t>
+            </a:r>
+            <a:r>
+              <a:rPr lang="en-GB" dirty="0" err="1"/>
+              <a:t>דחה</a:t>
+            </a:r>
+            <a:r>
+              <a:rPr lang="he-IL" dirty="0"/>
+              <a:t> על פי הפעולות שלו</a:t>
+            </a:r>
+            <a:r>
+              <a:rPr lang="en-GB" dirty="0"/>
+              <a:t>, </a:t>
+            </a:r>
+            <a:r>
+              <a:rPr lang="en-GB" dirty="0" err="1"/>
+              <a:t>וכך</a:t>
+            </a:r>
+            <a:r>
+              <a:rPr lang="en-GB" dirty="0"/>
+              <a:t> </a:t>
+            </a:r>
+            <a:r>
+              <a:rPr lang="en-GB" dirty="0" err="1"/>
+              <a:t>תעדכן</a:t>
+            </a:r>
+            <a:r>
+              <a:rPr lang="en-GB" dirty="0"/>
+              <a:t> </a:t>
+            </a:r>
+            <a:r>
+              <a:rPr lang="en-GB" dirty="0" err="1"/>
+              <a:t>את</a:t>
+            </a:r>
+            <a:r>
+              <a:rPr lang="en-GB" dirty="0"/>
+              <a:t> </a:t>
+            </a:r>
+            <a:r>
+              <a:rPr lang="en-GB" dirty="0" err="1"/>
+              <a:t>פרופיל</a:t>
+            </a:r>
+            <a:r>
+              <a:rPr lang="en-GB" dirty="0"/>
+              <a:t> </a:t>
+            </a:r>
+            <a:r>
+              <a:rPr lang="en-GB" dirty="0" err="1"/>
+              <a:t>תחומי</a:t>
+            </a:r>
+            <a:r>
+              <a:rPr lang="en-GB" dirty="0"/>
+              <a:t> </a:t>
+            </a:r>
+            <a:r>
+              <a:rPr lang="en-GB" dirty="0" err="1"/>
+              <a:t>העניין</a:t>
+            </a:r>
+            <a:r>
+              <a:rPr lang="en-GB" dirty="0"/>
+              <a:t> </a:t>
+            </a:r>
+            <a:r>
+              <a:rPr lang="en-GB" dirty="0" err="1"/>
+              <a:t>שלו</a:t>
+            </a:r>
+            <a:r>
+              <a:rPr lang="en-GB" dirty="0"/>
+              <a:t> </a:t>
+            </a:r>
+            <a:r>
+              <a:rPr lang="en-GB" dirty="0" err="1"/>
+              <a:t>כדי</a:t>
+            </a:r>
+            <a:r>
+              <a:rPr lang="en-GB" dirty="0"/>
+              <a:t> </a:t>
+            </a:r>
+            <a:r>
+              <a:rPr lang="en-GB" dirty="0" err="1"/>
+              <a:t>לשפר</a:t>
+            </a:r>
+            <a:r>
+              <a:rPr lang="en-GB" dirty="0"/>
+              <a:t> </a:t>
+            </a:r>
+            <a:r>
+              <a:rPr lang="en-GB" dirty="0" err="1"/>
+              <a:t>המלצות</a:t>
+            </a:r>
+            <a:r>
+              <a:rPr lang="en-GB" dirty="0"/>
+              <a:t> </a:t>
+            </a:r>
+            <a:r>
+              <a:rPr lang="en-GB" dirty="0" err="1"/>
+              <a:t>עתידיות</a:t>
+            </a:r>
+            <a:r>
+              <a:rPr lang="he-IL" dirty="0"/>
+              <a:t> לפרוייקט ספציפי זה, וילמד איזה המלצות לתת לאחרים בעתיד</a:t>
+            </a:r>
+            <a:r>
+              <a:rPr lang="en-GB" dirty="0"/>
+              <a:t>.</a:t>
+            </a:r>
+          </a:p>
+          <a:p>
+            <a:pPr algn="r" rtl="1"/>
+            <a:endParaRPr lang="en-GB" dirty="0"/>
+          </a:p>
+        </p:txBody>
+      </p:sp>
+    </p:spTree>
+    <p:extLst>
+      <p:ext uri="{BB962C8B-B14F-4D97-AF65-F5344CB8AC3E}">
+        <p14:creationId xmlns:p14="http://schemas.microsoft.com/office/powerpoint/2010/main" val="2593425858"/>
+      </p:ext>
+    </p:extLst>
+  </p:cSld>
+  <p:clrMapOvr>
+    <a:masterClrMapping/>
+  </p:clrMapOvr>
+</p:sld>
+</file>
+
+<file path=ppt/slides/slide7.xml><?xml version="1.0" encoding="utf-8"?>
+<p:sld xmlns:a="http://schemas.openxmlformats.org/drawingml/2006/main" xmlns:r="http://schemas.openxmlformats.org/officeDocument/2006/relationships" xmlns:p="http://schemas.openxmlformats.org/presentationml/2006/main">
+  <p:cSld>
+    <p:bg>
+      <p:bgPr>
+        <a:solidFill>
+          <a:schemeClr val="accent3">
+            <a:lumMod val="20000"/>
+            <a:lumOff val="80000"/>
+          </a:schemeClr>
+        </a:solidFill>
+        <a:effectLst/>
+      </p:bgPr>
+    </p:bg>
+    <p:spTree>
+      <p:nvGrpSpPr>
+        <p:cNvPr id="1" name=""/>
+        <p:cNvGrpSpPr/>
+        <p:nvPr/>
+      </p:nvGrpSpPr>
+      <p:grpSpPr>
+        <a:xfrm>
+          <a:off x="0" y="0"/>
+          <a:ext cx="0" cy="0"/>
+          <a:chOff x="0" y="0"/>
+          <a:chExt cx="0" cy="0"/>
+        </a:xfrm>
+      </p:grpSpPr>
+      <p:sp>
+        <p:nvSpPr>
+          <p:cNvPr id="2" name="Title 1">
+            <a:extLst>
+              <a:ext uri="{FF2B5EF4-FFF2-40B4-BE49-F238E27FC236}">
+                <a16:creationId xmlns:a16="http://schemas.microsoft.com/office/drawing/2014/main" id="{1DB68566-4A0F-92C8-FB56-F8BB885758DC}"/>
+              </a:ext>
+            </a:extLst>
+          </p:cNvPr>
+          <p:cNvSpPr>
+            <a:spLocks noGrp="1"/>
+          </p:cNvSpPr>
+          <p:nvPr>
+            <p:ph type="title"/>
+          </p:nvPr>
+        </p:nvSpPr>
+        <p:spPr/>
+        <p:txBody>
+          <a:bodyPr/>
+          <a:lstStyle/>
+          <a:p>
+            <a:pPr algn="r" rtl="1"/>
+            <a:r>
+              <a:rPr lang="he-IL" dirty="0">
+                <a:latin typeface="Arial" panose="020B0604020202020204" pitchFamily="34" charset="0"/>
+                <a:cs typeface="Arial" panose="020B0604020202020204" pitchFamily="34" charset="0"/>
+              </a:rPr>
+              <a:t>מ</a:t>
+            </a:r>
+            <a:r>
+              <a:rPr lang="en-GB" dirty="0" err="1">
+                <a:latin typeface="Arial" panose="020B0604020202020204" pitchFamily="34" charset="0"/>
+                <a:cs typeface="Arial" panose="020B0604020202020204" pitchFamily="34" charset="0"/>
+              </a:rPr>
+              <a:t>ערכת</a:t>
+            </a:r>
+            <a:r>
+              <a:rPr lang="en-GB" dirty="0">
+                <a:latin typeface="Arial" panose="020B0604020202020204" pitchFamily="34" charset="0"/>
+                <a:cs typeface="Arial" panose="020B0604020202020204" pitchFamily="34" charset="0"/>
+              </a:rPr>
+              <a:t> </a:t>
+            </a:r>
+            <a:r>
+              <a:rPr lang="en-GB" dirty="0" err="1">
+                <a:latin typeface="Arial" panose="020B0604020202020204" pitchFamily="34" charset="0"/>
+                <a:cs typeface="Arial" panose="020B0604020202020204" pitchFamily="34" charset="0"/>
+              </a:rPr>
+              <a:t>המלצות</a:t>
+            </a:r>
+            <a:r>
+              <a:rPr lang="en-GB" dirty="0">
+                <a:latin typeface="Arial" panose="020B0604020202020204" pitchFamily="34" charset="0"/>
+                <a:cs typeface="Arial" panose="020B0604020202020204" pitchFamily="34" charset="0"/>
+              </a:rPr>
+              <a:t> </a:t>
+            </a:r>
+            <a:r>
+              <a:rPr lang="en-GB" dirty="0" err="1">
+                <a:latin typeface="Arial" panose="020B0604020202020204" pitchFamily="34" charset="0"/>
+                <a:cs typeface="Arial" panose="020B0604020202020204" pitchFamily="34" charset="0"/>
+              </a:rPr>
+              <a:t>חכמה</a:t>
+            </a:r>
+            <a:r>
+              <a:rPr lang="en-GB" dirty="0">
+                <a:latin typeface="Arial" panose="020B0604020202020204" pitchFamily="34" charset="0"/>
+                <a:cs typeface="Arial" panose="020B0604020202020204" pitchFamily="34" charset="0"/>
+              </a:rPr>
+              <a:t> </a:t>
+            </a:r>
+            <a:r>
+              <a:rPr lang="en-GB" dirty="0" err="1">
+                <a:latin typeface="Arial" panose="020B0604020202020204" pitchFamily="34" charset="0"/>
+                <a:cs typeface="Arial" panose="020B0604020202020204" pitchFamily="34" charset="0"/>
+              </a:rPr>
+              <a:t>לתחליפי</a:t>
+            </a:r>
+            <a:r>
+              <a:rPr lang="en-GB" dirty="0">
+                <a:latin typeface="Arial" panose="020B0604020202020204" pitchFamily="34" charset="0"/>
+                <a:cs typeface="Arial" panose="020B0604020202020204" pitchFamily="34" charset="0"/>
+              </a:rPr>
+              <a:t> </a:t>
+            </a:r>
+            <a:r>
+              <a:rPr lang="en-GB" dirty="0" err="1">
+                <a:latin typeface="Arial" panose="020B0604020202020204" pitchFamily="34" charset="0"/>
+                <a:cs typeface="Arial" panose="020B0604020202020204" pitchFamily="34" charset="0"/>
+              </a:rPr>
+              <a:t>מזון</a:t>
+            </a:r>
+            <a:r>
+              <a:rPr lang="en-GB" dirty="0">
+                <a:latin typeface="Arial" panose="020B0604020202020204" pitchFamily="34" charset="0"/>
+                <a:cs typeface="Arial" panose="020B0604020202020204" pitchFamily="34" charset="0"/>
+              </a:rPr>
+              <a:t> </a:t>
+            </a:r>
+            <a:r>
+              <a:rPr lang="en-GB" dirty="0" err="1">
+                <a:latin typeface="Arial" panose="020B0604020202020204" pitchFamily="34" charset="0"/>
+                <a:cs typeface="Arial" panose="020B0604020202020204" pitchFamily="34" charset="0"/>
+              </a:rPr>
+              <a:t>בריאים</a:t>
+            </a:r>
+            <a:endParaRPr lang="en-GB" dirty="0">
+              <a:latin typeface="Arial" panose="020B0604020202020204" pitchFamily="34" charset="0"/>
+              <a:cs typeface="Arial" panose="020B0604020202020204" pitchFamily="34" charset="0"/>
+            </a:endParaRPr>
+          </a:p>
+        </p:txBody>
+      </p:sp>
+      <p:sp>
+        <p:nvSpPr>
+          <p:cNvPr id="3" name="Content Placeholder 2">
+            <a:extLst>
+              <a:ext uri="{FF2B5EF4-FFF2-40B4-BE49-F238E27FC236}">
+                <a16:creationId xmlns:a16="http://schemas.microsoft.com/office/drawing/2014/main" id="{A5E5FF3C-58E1-7F60-4C56-026B328279C3}"/>
+              </a:ext>
+            </a:extLst>
+          </p:cNvPr>
+          <p:cNvSpPr>
+            <a:spLocks noGrp="1"/>
+          </p:cNvSpPr>
+          <p:nvPr>
+            <p:ph idx="1"/>
+          </p:nvPr>
+        </p:nvSpPr>
+        <p:spPr/>
+        <p:txBody>
+          <a:bodyPr/>
+          <a:lstStyle/>
+          <a:p>
+            <a:pPr lvl="0" algn="r" rtl="1"/>
+            <a:r>
+              <a:rPr lang="en-GB" b="1" dirty="0" err="1">
+                <a:latin typeface="Arial" panose="020B0604020202020204" pitchFamily="34" charset="0"/>
+                <a:cs typeface="Arial" panose="020B0604020202020204" pitchFamily="34" charset="0"/>
+              </a:rPr>
+              <a:t>הבעיה</a:t>
+            </a:r>
+            <a:r>
+              <a:rPr lang="en-GB" b="1" dirty="0">
+                <a:latin typeface="Arial" panose="020B0604020202020204" pitchFamily="34" charset="0"/>
+                <a:cs typeface="Arial" panose="020B0604020202020204" pitchFamily="34" charset="0"/>
+              </a:rPr>
+              <a:t>:</a:t>
+            </a:r>
+            <a:r>
+              <a:rPr lang="en-GB" dirty="0">
+                <a:latin typeface="Arial" panose="020B0604020202020204" pitchFamily="34" charset="0"/>
+                <a:cs typeface="Arial" panose="020B0604020202020204" pitchFamily="34" charset="0"/>
+              </a:rPr>
+              <a:t> </a:t>
+            </a:r>
+            <a:r>
+              <a:rPr lang="en-GB" dirty="0" err="1">
+                <a:latin typeface="Arial" panose="020B0604020202020204" pitchFamily="34" charset="0"/>
+                <a:cs typeface="Arial" panose="020B0604020202020204" pitchFamily="34" charset="0"/>
+              </a:rPr>
+              <a:t>חוסר</a:t>
+            </a:r>
+            <a:r>
+              <a:rPr lang="en-GB" dirty="0">
+                <a:latin typeface="Arial" panose="020B0604020202020204" pitchFamily="34" charset="0"/>
+                <a:cs typeface="Arial" panose="020B0604020202020204" pitchFamily="34" charset="0"/>
+              </a:rPr>
+              <a:t> </a:t>
+            </a:r>
+            <a:r>
+              <a:rPr lang="en-GB" dirty="0" err="1">
+                <a:latin typeface="Arial" panose="020B0604020202020204" pitchFamily="34" charset="0"/>
+                <a:cs typeface="Arial" panose="020B0604020202020204" pitchFamily="34" charset="0"/>
+              </a:rPr>
+              <a:t>מלאי</a:t>
+            </a:r>
+            <a:r>
+              <a:rPr lang="en-GB" dirty="0">
+                <a:latin typeface="Arial" panose="020B0604020202020204" pitchFamily="34" charset="0"/>
+                <a:cs typeface="Arial" panose="020B0604020202020204" pitchFamily="34" charset="0"/>
+              </a:rPr>
+              <a:t> </a:t>
+            </a:r>
+            <a:r>
+              <a:rPr lang="en-GB" dirty="0" err="1">
+                <a:latin typeface="Arial" panose="020B0604020202020204" pitchFamily="34" charset="0"/>
+                <a:cs typeface="Arial" panose="020B0604020202020204" pitchFamily="34" charset="0"/>
+              </a:rPr>
+              <a:t>של</a:t>
+            </a:r>
+            <a:r>
+              <a:rPr lang="en-GB" dirty="0">
+                <a:latin typeface="Arial" panose="020B0604020202020204" pitchFamily="34" charset="0"/>
+                <a:cs typeface="Arial" panose="020B0604020202020204" pitchFamily="34" charset="0"/>
+              </a:rPr>
+              <a:t> </a:t>
+            </a:r>
+            <a:r>
+              <a:rPr lang="en-GB" dirty="0" err="1">
+                <a:latin typeface="Arial" panose="020B0604020202020204" pitchFamily="34" charset="0"/>
+                <a:cs typeface="Arial" panose="020B0604020202020204" pitchFamily="34" charset="0"/>
+              </a:rPr>
+              <a:t>מוצרים</a:t>
+            </a:r>
+            <a:r>
+              <a:rPr lang="en-GB" dirty="0">
+                <a:latin typeface="Arial" panose="020B0604020202020204" pitchFamily="34" charset="0"/>
+                <a:cs typeface="Arial" panose="020B0604020202020204" pitchFamily="34" charset="0"/>
+              </a:rPr>
+              <a:t> </a:t>
+            </a:r>
+            <a:r>
+              <a:rPr lang="en-GB" dirty="0" err="1">
+                <a:latin typeface="Arial" panose="020B0604020202020204" pitchFamily="34" charset="0"/>
+                <a:cs typeface="Arial" panose="020B0604020202020204" pitchFamily="34" charset="0"/>
+              </a:rPr>
+              <a:t>ספציפיים</a:t>
+            </a:r>
+            <a:r>
+              <a:rPr lang="en-GB" dirty="0">
+                <a:latin typeface="Arial" panose="020B0604020202020204" pitchFamily="34" charset="0"/>
+                <a:cs typeface="Arial" panose="020B0604020202020204" pitchFamily="34" charset="0"/>
+              </a:rPr>
+              <a:t> </a:t>
+            </a:r>
+            <a:r>
+              <a:rPr lang="en-GB" dirty="0" err="1">
+                <a:latin typeface="Arial" panose="020B0604020202020204" pitchFamily="34" charset="0"/>
+                <a:cs typeface="Arial" panose="020B0604020202020204" pitchFamily="34" charset="0"/>
+              </a:rPr>
+              <a:t>בסופרמרקט</a:t>
+            </a:r>
+            <a:r>
+              <a:rPr lang="en-GB" dirty="0">
+                <a:latin typeface="Arial" panose="020B0604020202020204" pitchFamily="34" charset="0"/>
+                <a:cs typeface="Arial" panose="020B0604020202020204" pitchFamily="34" charset="0"/>
+              </a:rPr>
+              <a:t> </a:t>
+            </a:r>
+            <a:r>
+              <a:rPr lang="en-GB" dirty="0" err="1">
+                <a:latin typeface="Arial" panose="020B0604020202020204" pitchFamily="34" charset="0"/>
+                <a:cs typeface="Arial" panose="020B0604020202020204" pitchFamily="34" charset="0"/>
+              </a:rPr>
+              <a:t>או</a:t>
+            </a:r>
+            <a:r>
+              <a:rPr lang="en-GB" dirty="0">
+                <a:latin typeface="Arial" panose="020B0604020202020204" pitchFamily="34" charset="0"/>
+                <a:cs typeface="Arial" panose="020B0604020202020204" pitchFamily="34" charset="0"/>
+              </a:rPr>
+              <a:t> </a:t>
+            </a:r>
+            <a:r>
+              <a:rPr lang="he-IL" dirty="0">
+                <a:latin typeface="Arial" panose="020B0604020202020204" pitchFamily="34" charset="0"/>
+                <a:cs typeface="Arial" panose="020B0604020202020204" pitchFamily="34" charset="0"/>
+              </a:rPr>
+              <a:t>עניין </a:t>
+            </a:r>
+            <a:r>
+              <a:rPr lang="en-GB" dirty="0" err="1">
+                <a:latin typeface="Arial" panose="020B0604020202020204" pitchFamily="34" charset="0"/>
+                <a:cs typeface="Arial" panose="020B0604020202020204" pitchFamily="34" charset="0"/>
+              </a:rPr>
+              <a:t>לשפר</a:t>
+            </a:r>
+            <a:r>
+              <a:rPr lang="en-GB" dirty="0">
+                <a:latin typeface="Arial" panose="020B0604020202020204" pitchFamily="34" charset="0"/>
+                <a:cs typeface="Arial" panose="020B0604020202020204" pitchFamily="34" charset="0"/>
+              </a:rPr>
+              <a:t> </a:t>
+            </a:r>
+            <a:r>
+              <a:rPr lang="en-GB" dirty="0" err="1">
+                <a:latin typeface="Arial" panose="020B0604020202020204" pitchFamily="34" charset="0"/>
+                <a:cs typeface="Arial" panose="020B0604020202020204" pitchFamily="34" charset="0"/>
+              </a:rPr>
+              <a:t>את</a:t>
+            </a:r>
+            <a:r>
+              <a:rPr lang="en-GB" dirty="0">
+                <a:latin typeface="Arial" panose="020B0604020202020204" pitchFamily="34" charset="0"/>
+                <a:cs typeface="Arial" panose="020B0604020202020204" pitchFamily="34" charset="0"/>
+              </a:rPr>
+              <a:t> </a:t>
+            </a:r>
+            <a:r>
+              <a:rPr lang="en-GB" dirty="0" err="1">
+                <a:latin typeface="Arial" panose="020B0604020202020204" pitchFamily="34" charset="0"/>
+                <a:cs typeface="Arial" panose="020B0604020202020204" pitchFamily="34" charset="0"/>
+              </a:rPr>
+              <a:t>סל</a:t>
+            </a:r>
+            <a:r>
+              <a:rPr lang="en-GB" dirty="0">
+                <a:latin typeface="Arial" panose="020B0604020202020204" pitchFamily="34" charset="0"/>
+                <a:cs typeface="Arial" panose="020B0604020202020204" pitchFamily="34" charset="0"/>
+              </a:rPr>
+              <a:t> </a:t>
+            </a:r>
+            <a:r>
+              <a:rPr lang="en-GB" dirty="0" err="1">
+                <a:latin typeface="Arial" panose="020B0604020202020204" pitchFamily="34" charset="0"/>
+                <a:cs typeface="Arial" panose="020B0604020202020204" pitchFamily="34" charset="0"/>
+              </a:rPr>
+              <a:t>הקניות</a:t>
+            </a:r>
+            <a:r>
+              <a:rPr lang="en-GB" dirty="0">
+                <a:latin typeface="Arial" panose="020B0604020202020204" pitchFamily="34" charset="0"/>
+                <a:cs typeface="Arial" panose="020B0604020202020204" pitchFamily="34" charset="0"/>
+              </a:rPr>
+              <a:t> </a:t>
+            </a:r>
+            <a:r>
+              <a:rPr lang="he-IL" dirty="0">
+                <a:latin typeface="Arial" panose="020B0604020202020204" pitchFamily="34" charset="0"/>
+                <a:cs typeface="Arial" panose="020B0604020202020204" pitchFamily="34" charset="0"/>
+              </a:rPr>
+              <a:t>מבחינה בריאותית.</a:t>
+            </a:r>
+          </a:p>
+          <a:p>
+            <a:pPr lvl="0" algn="r" rtl="1"/>
+            <a:r>
+              <a:rPr lang="en-GB" b="1" dirty="0" err="1">
+                <a:latin typeface="Arial" panose="020B0604020202020204" pitchFamily="34" charset="0"/>
+                <a:cs typeface="Arial" panose="020B0604020202020204" pitchFamily="34" charset="0"/>
+              </a:rPr>
+              <a:t>הפתרון</a:t>
+            </a:r>
+            <a:r>
+              <a:rPr lang="en-GB" b="1" dirty="0">
+                <a:latin typeface="Arial" panose="020B0604020202020204" pitchFamily="34" charset="0"/>
+                <a:cs typeface="Arial" panose="020B0604020202020204" pitchFamily="34" charset="0"/>
+              </a:rPr>
+              <a:t>:</a:t>
+            </a:r>
+            <a:r>
+              <a:rPr lang="en-GB" dirty="0">
+                <a:latin typeface="Arial" panose="020B0604020202020204" pitchFamily="34" charset="0"/>
+                <a:cs typeface="Arial" panose="020B0604020202020204" pitchFamily="34" charset="0"/>
+              </a:rPr>
+              <a:t> </a:t>
+            </a:r>
+            <a:r>
+              <a:rPr lang="en-GB" dirty="0" err="1">
+                <a:latin typeface="Arial" panose="020B0604020202020204" pitchFamily="34" charset="0"/>
+                <a:cs typeface="Arial" panose="020B0604020202020204" pitchFamily="34" charset="0"/>
+              </a:rPr>
+              <a:t>אפליקציה</a:t>
+            </a:r>
+            <a:r>
+              <a:rPr lang="en-GB" dirty="0">
+                <a:latin typeface="Arial" panose="020B0604020202020204" pitchFamily="34" charset="0"/>
+                <a:cs typeface="Arial" panose="020B0604020202020204" pitchFamily="34" charset="0"/>
+              </a:rPr>
+              <a:t> </a:t>
+            </a:r>
+            <a:r>
+              <a:rPr lang="en-GB" dirty="0" err="1">
+                <a:latin typeface="Arial" panose="020B0604020202020204" pitchFamily="34" charset="0"/>
+                <a:cs typeface="Arial" panose="020B0604020202020204" pitchFamily="34" charset="0"/>
+              </a:rPr>
+              <a:t>נגישה</a:t>
+            </a:r>
+            <a:r>
+              <a:rPr lang="he-IL" dirty="0">
+                <a:latin typeface="Arial" panose="020B0604020202020204" pitchFamily="34" charset="0"/>
+                <a:cs typeface="Arial" panose="020B0604020202020204" pitchFamily="34" charset="0"/>
+              </a:rPr>
+              <a:t>, </a:t>
+            </a:r>
+            <a:r>
+              <a:rPr lang="en-GB" dirty="0" err="1">
+                <a:latin typeface="Arial" panose="020B0604020202020204" pitchFamily="34" charset="0"/>
+                <a:cs typeface="Arial" panose="020B0604020202020204" pitchFamily="34" charset="0"/>
+              </a:rPr>
+              <a:t>לשימוש</a:t>
+            </a:r>
+            <a:r>
+              <a:rPr lang="en-GB" dirty="0">
+                <a:latin typeface="Arial" panose="020B0604020202020204" pitchFamily="34" charset="0"/>
+                <a:cs typeface="Arial" panose="020B0604020202020204" pitchFamily="34" charset="0"/>
+              </a:rPr>
+              <a:t> </a:t>
+            </a:r>
+            <a:r>
+              <a:rPr lang="en-GB" dirty="0" err="1">
+                <a:latin typeface="Arial" panose="020B0604020202020204" pitchFamily="34" charset="0"/>
+                <a:cs typeface="Arial" panose="020B0604020202020204" pitchFamily="34" charset="0"/>
+              </a:rPr>
+              <a:t>בבית</a:t>
+            </a:r>
+            <a:r>
+              <a:rPr lang="en-GB" dirty="0">
+                <a:latin typeface="Arial" panose="020B0604020202020204" pitchFamily="34" charset="0"/>
+                <a:cs typeface="Arial" panose="020B0604020202020204" pitchFamily="34" charset="0"/>
+              </a:rPr>
+              <a:t> </a:t>
+            </a:r>
+            <a:r>
+              <a:rPr lang="en-GB" dirty="0" err="1">
+                <a:latin typeface="Arial" panose="020B0604020202020204" pitchFamily="34" charset="0"/>
+                <a:cs typeface="Arial" panose="020B0604020202020204" pitchFamily="34" charset="0"/>
+              </a:rPr>
+              <a:t>בתכנון</a:t>
+            </a:r>
+            <a:r>
+              <a:rPr lang="en-GB" dirty="0">
+                <a:latin typeface="Arial" panose="020B0604020202020204" pitchFamily="34" charset="0"/>
+                <a:cs typeface="Arial" panose="020B0604020202020204" pitchFamily="34" charset="0"/>
+              </a:rPr>
+              <a:t> </a:t>
+            </a:r>
+            <a:r>
+              <a:rPr lang="en-GB" dirty="0" err="1">
+                <a:latin typeface="Arial" panose="020B0604020202020204" pitchFamily="34" charset="0"/>
+                <a:cs typeface="Arial" panose="020B0604020202020204" pitchFamily="34" charset="0"/>
+              </a:rPr>
+              <a:t>הקניות</a:t>
+            </a:r>
+            <a:r>
+              <a:rPr lang="en-GB" dirty="0">
+                <a:latin typeface="Arial" panose="020B0604020202020204" pitchFamily="34" charset="0"/>
+                <a:cs typeface="Arial" panose="020B0604020202020204" pitchFamily="34" charset="0"/>
+              </a:rPr>
+              <a:t> </a:t>
+            </a:r>
+            <a:r>
+              <a:rPr lang="en-GB" dirty="0" err="1">
+                <a:latin typeface="Arial" panose="020B0604020202020204" pitchFamily="34" charset="0"/>
+                <a:cs typeface="Arial" panose="020B0604020202020204" pitchFamily="34" charset="0"/>
+              </a:rPr>
+              <a:t>או</a:t>
+            </a:r>
+            <a:r>
+              <a:rPr lang="en-GB" dirty="0">
+                <a:latin typeface="Arial" panose="020B0604020202020204" pitchFamily="34" charset="0"/>
+                <a:cs typeface="Arial" panose="020B0604020202020204" pitchFamily="34" charset="0"/>
+              </a:rPr>
+              <a:t> </a:t>
+            </a:r>
+            <a:r>
+              <a:rPr lang="en-GB" dirty="0" err="1">
+                <a:latin typeface="Arial" panose="020B0604020202020204" pitchFamily="34" charset="0"/>
+                <a:cs typeface="Arial" panose="020B0604020202020204" pitchFamily="34" charset="0"/>
+              </a:rPr>
+              <a:t>פיזית</a:t>
+            </a:r>
+            <a:r>
+              <a:rPr lang="en-GB" dirty="0">
+                <a:latin typeface="Arial" panose="020B0604020202020204" pitchFamily="34" charset="0"/>
+                <a:cs typeface="Arial" panose="020B0604020202020204" pitchFamily="34" charset="0"/>
+              </a:rPr>
+              <a:t> </a:t>
+            </a:r>
+            <a:r>
+              <a:rPr lang="en-GB" dirty="0" err="1">
+                <a:latin typeface="Arial" panose="020B0604020202020204" pitchFamily="34" charset="0"/>
+                <a:cs typeface="Arial" panose="020B0604020202020204" pitchFamily="34" charset="0"/>
+              </a:rPr>
+              <a:t>בסופר</a:t>
+            </a:r>
+            <a:r>
+              <a:rPr lang="he-IL" dirty="0">
+                <a:latin typeface="Arial" panose="020B0604020202020204" pitchFamily="34" charset="0"/>
+                <a:cs typeface="Arial" panose="020B0604020202020204" pitchFamily="34" charset="0"/>
+              </a:rPr>
+              <a:t>, </a:t>
+            </a:r>
+            <a:r>
+              <a:rPr lang="en-GB" dirty="0">
+                <a:latin typeface="Arial" panose="020B0604020202020204" pitchFamily="34" charset="0"/>
+                <a:cs typeface="Arial" panose="020B0604020202020204" pitchFamily="34" charset="0"/>
+              </a:rPr>
+              <a:t> </a:t>
+            </a:r>
+            <a:r>
+              <a:rPr lang="en-GB" dirty="0" err="1">
+                <a:latin typeface="Arial" panose="020B0604020202020204" pitchFamily="34" charset="0"/>
+                <a:cs typeface="Arial" panose="020B0604020202020204" pitchFamily="34" charset="0"/>
+              </a:rPr>
+              <a:t>המקבלת</a:t>
+            </a:r>
+            <a:r>
+              <a:rPr lang="en-GB" dirty="0">
+                <a:latin typeface="Arial" panose="020B0604020202020204" pitchFamily="34" charset="0"/>
+                <a:cs typeface="Arial" panose="020B0604020202020204" pitchFamily="34" charset="0"/>
+              </a:rPr>
+              <a:t> </a:t>
+            </a:r>
+            <a:r>
+              <a:rPr lang="en-GB" dirty="0" err="1">
+                <a:latin typeface="Arial" panose="020B0604020202020204" pitchFamily="34" charset="0"/>
+                <a:cs typeface="Arial" panose="020B0604020202020204" pitchFamily="34" charset="0"/>
+              </a:rPr>
+              <a:t>מוצר</a:t>
+            </a:r>
+            <a:r>
+              <a:rPr lang="en-GB" dirty="0">
+                <a:latin typeface="Arial" panose="020B0604020202020204" pitchFamily="34" charset="0"/>
+                <a:cs typeface="Arial" panose="020B0604020202020204" pitchFamily="34" charset="0"/>
+              </a:rPr>
+              <a:t> </a:t>
+            </a:r>
+            <a:r>
+              <a:rPr lang="en-GB" dirty="0" err="1">
+                <a:latin typeface="Arial" panose="020B0604020202020204" pitchFamily="34" charset="0"/>
+                <a:cs typeface="Arial" panose="020B0604020202020204" pitchFamily="34" charset="0"/>
+              </a:rPr>
+              <a:t>קיים</a:t>
+            </a:r>
+            <a:r>
+              <a:rPr lang="en-GB" dirty="0">
+                <a:latin typeface="Arial" panose="020B0604020202020204" pitchFamily="34" charset="0"/>
+                <a:cs typeface="Arial" panose="020B0604020202020204" pitchFamily="34" charset="0"/>
+              </a:rPr>
+              <a:t> </a:t>
+            </a:r>
+            <a:r>
+              <a:rPr lang="en-GB" dirty="0" err="1">
+                <a:latin typeface="Arial" panose="020B0604020202020204" pitchFamily="34" charset="0"/>
+                <a:cs typeface="Arial" panose="020B0604020202020204" pitchFamily="34" charset="0"/>
+              </a:rPr>
+              <a:t>וממליצה</a:t>
+            </a:r>
+            <a:r>
+              <a:rPr lang="en-GB" dirty="0">
+                <a:latin typeface="Arial" panose="020B0604020202020204" pitchFamily="34" charset="0"/>
+                <a:cs typeface="Arial" panose="020B0604020202020204" pitchFamily="34" charset="0"/>
+              </a:rPr>
+              <a:t> </a:t>
+            </a:r>
+            <a:r>
+              <a:rPr lang="en-GB" dirty="0" err="1">
+                <a:latin typeface="Arial" panose="020B0604020202020204" pitchFamily="34" charset="0"/>
+                <a:cs typeface="Arial" panose="020B0604020202020204" pitchFamily="34" charset="0"/>
+              </a:rPr>
+              <a:t>על</a:t>
+            </a:r>
+            <a:r>
+              <a:rPr lang="en-GB" dirty="0">
+                <a:latin typeface="Arial" panose="020B0604020202020204" pitchFamily="34" charset="0"/>
+                <a:cs typeface="Arial" panose="020B0604020202020204" pitchFamily="34" charset="0"/>
+              </a:rPr>
+              <a:t> </a:t>
+            </a:r>
+            <a:r>
+              <a:rPr lang="en-GB" dirty="0" err="1">
+                <a:latin typeface="Arial" panose="020B0604020202020204" pitchFamily="34" charset="0"/>
+                <a:cs typeface="Arial" panose="020B0604020202020204" pitchFamily="34" charset="0"/>
+              </a:rPr>
+              <a:t>התחליף</a:t>
+            </a:r>
+            <a:r>
+              <a:rPr lang="en-GB" dirty="0">
+                <a:latin typeface="Arial" panose="020B0604020202020204" pitchFamily="34" charset="0"/>
+                <a:cs typeface="Arial" panose="020B0604020202020204" pitchFamily="34" charset="0"/>
+              </a:rPr>
+              <a:t> </a:t>
+            </a:r>
+            <a:r>
+              <a:rPr lang="en-GB" dirty="0" err="1">
+                <a:latin typeface="Arial" panose="020B0604020202020204" pitchFamily="34" charset="0"/>
+                <a:cs typeface="Arial" panose="020B0604020202020204" pitchFamily="34" charset="0"/>
+              </a:rPr>
+              <a:t>האופטימלי</a:t>
+            </a:r>
+            <a:r>
+              <a:rPr lang="en-GB" dirty="0">
+                <a:latin typeface="Arial" panose="020B0604020202020204" pitchFamily="34" charset="0"/>
+                <a:cs typeface="Arial" panose="020B0604020202020204" pitchFamily="34" charset="0"/>
+              </a:rPr>
+              <a:t>.</a:t>
+            </a:r>
+          </a:p>
+          <a:p>
+            <a:pPr lvl="0" algn="r" rtl="1"/>
+            <a:r>
+              <a:rPr lang="en-GB" b="1" dirty="0" err="1">
+                <a:latin typeface="Arial" panose="020B0604020202020204" pitchFamily="34" charset="0"/>
+                <a:cs typeface="Arial" panose="020B0604020202020204" pitchFamily="34" charset="0"/>
+              </a:rPr>
+              <a:t>הערך</a:t>
+            </a:r>
+            <a:r>
+              <a:rPr lang="en-GB" b="1" dirty="0">
+                <a:latin typeface="Arial" panose="020B0604020202020204" pitchFamily="34" charset="0"/>
+                <a:cs typeface="Arial" panose="020B0604020202020204" pitchFamily="34" charset="0"/>
+              </a:rPr>
+              <a:t> </a:t>
+            </a:r>
+            <a:r>
+              <a:rPr lang="en-GB" b="1" dirty="0" err="1">
+                <a:latin typeface="Arial" panose="020B0604020202020204" pitchFamily="34" charset="0"/>
+                <a:cs typeface="Arial" panose="020B0604020202020204" pitchFamily="34" charset="0"/>
+              </a:rPr>
+              <a:t>המוסף</a:t>
+            </a:r>
+            <a:r>
+              <a:rPr lang="en-GB" b="1" dirty="0">
+                <a:latin typeface="Arial" panose="020B0604020202020204" pitchFamily="34" charset="0"/>
+                <a:cs typeface="Arial" panose="020B0604020202020204" pitchFamily="34" charset="0"/>
+              </a:rPr>
+              <a:t>:</a:t>
+            </a:r>
+            <a:r>
+              <a:rPr lang="en-GB" dirty="0">
+                <a:latin typeface="Arial" panose="020B0604020202020204" pitchFamily="34" charset="0"/>
+                <a:cs typeface="Arial" panose="020B0604020202020204" pitchFamily="34" charset="0"/>
+              </a:rPr>
+              <a:t> </a:t>
+            </a:r>
+            <a:r>
+              <a:rPr lang="en-GB" dirty="0" err="1">
+                <a:latin typeface="Arial" panose="020B0604020202020204" pitchFamily="34" charset="0"/>
+                <a:cs typeface="Arial" panose="020B0604020202020204" pitchFamily="34" charset="0"/>
+              </a:rPr>
+              <a:t>קבלת</a:t>
+            </a:r>
+            <a:r>
+              <a:rPr lang="en-GB" dirty="0">
+                <a:latin typeface="Arial" panose="020B0604020202020204" pitchFamily="34" charset="0"/>
+                <a:cs typeface="Arial" panose="020B0604020202020204" pitchFamily="34" charset="0"/>
+              </a:rPr>
+              <a:t> </a:t>
+            </a:r>
+            <a:r>
+              <a:rPr lang="en-GB" dirty="0" err="1">
+                <a:latin typeface="Arial" panose="020B0604020202020204" pitchFamily="34" charset="0"/>
+                <a:cs typeface="Arial" panose="020B0604020202020204" pitchFamily="34" charset="0"/>
+              </a:rPr>
+              <a:t>החלטות</a:t>
+            </a:r>
+            <a:r>
+              <a:rPr lang="en-GB" dirty="0">
+                <a:latin typeface="Arial" panose="020B0604020202020204" pitchFamily="34" charset="0"/>
+                <a:cs typeface="Arial" panose="020B0604020202020204" pitchFamily="34" charset="0"/>
+              </a:rPr>
+              <a:t> </a:t>
+            </a:r>
+            <a:r>
+              <a:rPr lang="en-GB" dirty="0" err="1">
+                <a:latin typeface="Arial" panose="020B0604020202020204" pitchFamily="34" charset="0"/>
+                <a:cs typeface="Arial" panose="020B0604020202020204" pitchFamily="34" charset="0"/>
+              </a:rPr>
+              <a:t>צרכניות</a:t>
+            </a:r>
+            <a:r>
+              <a:rPr lang="en-GB" dirty="0">
+                <a:latin typeface="Arial" panose="020B0604020202020204" pitchFamily="34" charset="0"/>
+                <a:cs typeface="Arial" panose="020B0604020202020204" pitchFamily="34" charset="0"/>
+              </a:rPr>
+              <a:t> </a:t>
+            </a:r>
+            <a:r>
+              <a:rPr lang="en-GB" dirty="0" err="1">
+                <a:latin typeface="Arial" panose="020B0604020202020204" pitchFamily="34" charset="0"/>
+                <a:cs typeface="Arial" panose="020B0604020202020204" pitchFamily="34" charset="0"/>
+              </a:rPr>
+              <a:t>חכמות</a:t>
+            </a:r>
+            <a:r>
+              <a:rPr lang="en-GB" dirty="0">
+                <a:latin typeface="Arial" panose="020B0604020202020204" pitchFamily="34" charset="0"/>
+                <a:cs typeface="Arial" panose="020B0604020202020204" pitchFamily="34" charset="0"/>
+              </a:rPr>
+              <a:t> </a:t>
+            </a:r>
+            <a:r>
+              <a:rPr lang="en-GB" dirty="0" err="1">
+                <a:latin typeface="Arial" panose="020B0604020202020204" pitchFamily="34" charset="0"/>
+                <a:cs typeface="Arial" panose="020B0604020202020204" pitchFamily="34" charset="0"/>
+              </a:rPr>
+              <a:t>יותר</a:t>
+            </a:r>
+            <a:r>
+              <a:rPr lang="en-GB" dirty="0">
+                <a:latin typeface="Arial" panose="020B0604020202020204" pitchFamily="34" charset="0"/>
+                <a:cs typeface="Arial" panose="020B0604020202020204" pitchFamily="34" charset="0"/>
+              </a:rPr>
+              <a:t>, </a:t>
+            </a:r>
+            <a:r>
+              <a:rPr lang="en-GB" dirty="0" err="1">
+                <a:latin typeface="Arial" panose="020B0604020202020204" pitchFamily="34" charset="0"/>
+                <a:cs typeface="Arial" panose="020B0604020202020204" pitchFamily="34" charset="0"/>
+              </a:rPr>
+              <a:t>עמידה</a:t>
+            </a:r>
+            <a:r>
+              <a:rPr lang="en-GB" dirty="0">
+                <a:latin typeface="Arial" panose="020B0604020202020204" pitchFamily="34" charset="0"/>
+                <a:cs typeface="Arial" panose="020B0604020202020204" pitchFamily="34" charset="0"/>
+              </a:rPr>
+              <a:t> </a:t>
+            </a:r>
+            <a:r>
+              <a:rPr lang="en-GB" dirty="0" err="1">
+                <a:latin typeface="Arial" panose="020B0604020202020204" pitchFamily="34" charset="0"/>
+                <a:cs typeface="Arial" panose="020B0604020202020204" pitchFamily="34" charset="0"/>
+              </a:rPr>
+              <a:t>ביעדים</a:t>
+            </a:r>
+            <a:r>
+              <a:rPr lang="en-GB" dirty="0">
+                <a:latin typeface="Arial" panose="020B0604020202020204" pitchFamily="34" charset="0"/>
+                <a:cs typeface="Arial" panose="020B0604020202020204" pitchFamily="34" charset="0"/>
+              </a:rPr>
+              <a:t> </a:t>
+            </a:r>
+            <a:r>
+              <a:rPr lang="en-GB" dirty="0" err="1">
+                <a:latin typeface="Arial" panose="020B0604020202020204" pitchFamily="34" charset="0"/>
+                <a:cs typeface="Arial" panose="020B0604020202020204" pitchFamily="34" charset="0"/>
+              </a:rPr>
+              <a:t>תזונתיים</a:t>
+            </a:r>
+            <a:r>
+              <a:rPr lang="he-IL" dirty="0">
+                <a:latin typeface="Arial" panose="020B0604020202020204" pitchFamily="34" charset="0"/>
+                <a:cs typeface="Arial" panose="020B0604020202020204" pitchFamily="34" charset="0"/>
+              </a:rPr>
+              <a:t>, </a:t>
+            </a:r>
+            <a:r>
+              <a:rPr lang="en-GB" dirty="0" err="1">
+                <a:latin typeface="Arial" panose="020B0604020202020204" pitchFamily="34" charset="0"/>
+                <a:cs typeface="Arial" panose="020B0604020202020204" pitchFamily="34" charset="0"/>
+              </a:rPr>
+              <a:t>כמו</a:t>
+            </a:r>
+            <a:r>
+              <a:rPr lang="en-GB" dirty="0">
+                <a:latin typeface="Arial" panose="020B0604020202020204" pitchFamily="34" charset="0"/>
+                <a:cs typeface="Arial" panose="020B0604020202020204" pitchFamily="34" charset="0"/>
+              </a:rPr>
+              <a:t> </a:t>
+            </a:r>
+            <a:r>
+              <a:rPr lang="en-GB" dirty="0" err="1">
+                <a:latin typeface="Arial" panose="020B0604020202020204" pitchFamily="34" charset="0"/>
+                <a:cs typeface="Arial" panose="020B0604020202020204" pitchFamily="34" charset="0"/>
+              </a:rPr>
+              <a:t>צריכת</a:t>
+            </a:r>
+            <a:r>
+              <a:rPr lang="en-GB" dirty="0">
+                <a:latin typeface="Arial" panose="020B0604020202020204" pitchFamily="34" charset="0"/>
+                <a:cs typeface="Arial" panose="020B0604020202020204" pitchFamily="34" charset="0"/>
+              </a:rPr>
+              <a:t> </a:t>
+            </a:r>
+            <a:r>
+              <a:rPr lang="en-GB" dirty="0" err="1">
+                <a:latin typeface="Arial" panose="020B0604020202020204" pitchFamily="34" charset="0"/>
+                <a:cs typeface="Arial" panose="020B0604020202020204" pitchFamily="34" charset="0"/>
+              </a:rPr>
+              <a:t>חלבון</a:t>
+            </a:r>
+            <a:r>
+              <a:rPr lang="en-GB" dirty="0">
+                <a:latin typeface="Arial" panose="020B0604020202020204" pitchFamily="34" charset="0"/>
+                <a:cs typeface="Arial" panose="020B0604020202020204" pitchFamily="34" charset="0"/>
+              </a:rPr>
+              <a:t>, </a:t>
+            </a:r>
+            <a:r>
+              <a:rPr lang="en-GB" dirty="0" err="1">
+                <a:latin typeface="Arial" panose="020B0604020202020204" pitchFamily="34" charset="0"/>
+                <a:cs typeface="Arial" panose="020B0604020202020204" pitchFamily="34" charset="0"/>
+              </a:rPr>
+              <a:t>סיבים</a:t>
+            </a:r>
+            <a:r>
+              <a:rPr lang="en-GB" dirty="0">
+                <a:latin typeface="Arial" panose="020B0604020202020204" pitchFamily="34" charset="0"/>
+                <a:cs typeface="Arial" panose="020B0604020202020204" pitchFamily="34" charset="0"/>
+              </a:rPr>
+              <a:t> </a:t>
+            </a:r>
+            <a:r>
+              <a:rPr lang="en-GB" dirty="0" err="1">
+                <a:latin typeface="Arial" panose="020B0604020202020204" pitchFamily="34" charset="0"/>
+                <a:cs typeface="Arial" panose="020B0604020202020204" pitchFamily="34" charset="0"/>
+              </a:rPr>
+              <a:t>תזונתיים</a:t>
+            </a:r>
+            <a:r>
+              <a:rPr lang="en-GB" dirty="0">
+                <a:latin typeface="Arial" panose="020B0604020202020204" pitchFamily="34" charset="0"/>
+                <a:cs typeface="Arial" panose="020B0604020202020204" pitchFamily="34" charset="0"/>
+              </a:rPr>
+              <a:t> </a:t>
+            </a:r>
+            <a:r>
+              <a:rPr lang="en-GB" dirty="0" err="1">
+                <a:latin typeface="Arial" panose="020B0604020202020204" pitchFamily="34" charset="0"/>
+                <a:cs typeface="Arial" panose="020B0604020202020204" pitchFamily="34" charset="0"/>
+              </a:rPr>
+              <a:t>או</a:t>
+            </a:r>
+            <a:r>
+              <a:rPr lang="en-GB" dirty="0">
+                <a:latin typeface="Arial" panose="020B0604020202020204" pitchFamily="34" charset="0"/>
+                <a:cs typeface="Arial" panose="020B0604020202020204" pitchFamily="34" charset="0"/>
+              </a:rPr>
+              <a:t> </a:t>
+            </a:r>
+            <a:r>
+              <a:rPr lang="en-GB" dirty="0" err="1">
+                <a:latin typeface="Arial" panose="020B0604020202020204" pitchFamily="34" charset="0"/>
+                <a:cs typeface="Arial" panose="020B0604020202020204" pitchFamily="34" charset="0"/>
+              </a:rPr>
+              <a:t>עמידה</a:t>
+            </a:r>
+            <a:r>
+              <a:rPr lang="en-GB" dirty="0">
+                <a:latin typeface="Arial" panose="020B0604020202020204" pitchFamily="34" charset="0"/>
+                <a:cs typeface="Arial" panose="020B0604020202020204" pitchFamily="34" charset="0"/>
+              </a:rPr>
+              <a:t> </a:t>
+            </a:r>
+            <a:r>
+              <a:rPr lang="en-GB" dirty="0" err="1">
+                <a:latin typeface="Arial" panose="020B0604020202020204" pitchFamily="34" charset="0"/>
+                <a:cs typeface="Arial" panose="020B0604020202020204" pitchFamily="34" charset="0"/>
+              </a:rPr>
+              <a:t>ביעדי</a:t>
+            </a:r>
+            <a:r>
+              <a:rPr lang="en-GB" dirty="0">
+                <a:latin typeface="Arial" panose="020B0604020202020204" pitchFamily="34" charset="0"/>
+                <a:cs typeface="Arial" panose="020B0604020202020204" pitchFamily="34" charset="0"/>
+              </a:rPr>
+              <a:t> </a:t>
+            </a:r>
+            <a:r>
+              <a:rPr lang="en-GB" dirty="0" err="1">
+                <a:latin typeface="Arial" panose="020B0604020202020204" pitchFamily="34" charset="0"/>
+                <a:cs typeface="Arial" panose="020B0604020202020204" pitchFamily="34" charset="0"/>
+              </a:rPr>
+              <a:t>קלוריות</a:t>
+            </a:r>
+            <a:r>
+              <a:rPr lang="he-IL" dirty="0">
+                <a:latin typeface="Arial" panose="020B0604020202020204" pitchFamily="34" charset="0"/>
+                <a:cs typeface="Arial" panose="020B0604020202020204" pitchFamily="34" charset="0"/>
+              </a:rPr>
+              <a:t>, </a:t>
+            </a:r>
+            <a:r>
+              <a:rPr lang="en-GB" dirty="0" err="1">
+                <a:latin typeface="Arial" panose="020B0604020202020204" pitchFamily="34" charset="0"/>
+                <a:cs typeface="Arial" panose="020B0604020202020204" pitchFamily="34" charset="0"/>
+              </a:rPr>
+              <a:t>וחיסכון</a:t>
+            </a:r>
+            <a:r>
+              <a:rPr lang="en-GB" dirty="0">
+                <a:latin typeface="Arial" panose="020B0604020202020204" pitchFamily="34" charset="0"/>
+                <a:cs typeface="Arial" panose="020B0604020202020204" pitchFamily="34" charset="0"/>
+              </a:rPr>
+              <a:t> </a:t>
+            </a:r>
+            <a:r>
+              <a:rPr lang="en-GB" dirty="0" err="1">
+                <a:latin typeface="Arial" panose="020B0604020202020204" pitchFamily="34" charset="0"/>
+                <a:cs typeface="Arial" panose="020B0604020202020204" pitchFamily="34" charset="0"/>
+              </a:rPr>
+              <a:t>בזמן</a:t>
+            </a:r>
+            <a:r>
+              <a:rPr lang="en-GB" dirty="0">
+                <a:latin typeface="Arial" panose="020B0604020202020204" pitchFamily="34" charset="0"/>
+                <a:cs typeface="Arial" panose="020B0604020202020204" pitchFamily="34" charset="0"/>
+              </a:rPr>
+              <a:t>.</a:t>
+            </a:r>
+          </a:p>
+          <a:p>
+            <a:pPr algn="r" rtl="1"/>
+            <a:endParaRPr lang="en-GB" dirty="0">
+              <a:latin typeface="Arial" panose="020B0604020202020204" pitchFamily="34" charset="0"/>
+              <a:cs typeface="Arial" panose="020B0604020202020204" pitchFamily="34" charset="0"/>
+            </a:endParaRPr>
+          </a:p>
+        </p:txBody>
+      </p:sp>
+    </p:spTree>
+    <p:extLst>
+      <p:ext uri="{BB962C8B-B14F-4D97-AF65-F5344CB8AC3E}">
+        <p14:creationId xmlns:p14="http://schemas.microsoft.com/office/powerpoint/2010/main" val="2058986479"/>
+      </p:ext>
+    </p:extLst>
+  </p:cSld>
+  <p:clrMapOvr>
+    <a:masterClrMapping/>
+  </p:clrMapOvr>
+</p:sld>
+</file>
+
+<file path=ppt/slides/slide8.xml><?xml version="1.0" encoding="utf-8"?>
+<p:sld xmlns:a="http://schemas.openxmlformats.org/drawingml/2006/main" xmlns:r="http://schemas.openxmlformats.org/officeDocument/2006/relationships" xmlns:p="http://schemas.openxmlformats.org/presentationml/2006/main">
+  <p:cSld>
+    <p:bg>
+      <p:bgPr>
+        <a:solidFill>
+          <a:schemeClr val="accent3">
+            <a:lumMod val="20000"/>
+            <a:lumOff val="80000"/>
+          </a:schemeClr>
+        </a:solidFill>
+        <a:effectLst/>
+      </p:bgPr>
+    </p:bg>
+    <p:spTree>
+      <p:nvGrpSpPr>
+        <p:cNvPr id="1" name="">
+          <a:extLst>
+            <a:ext uri="{FF2B5EF4-FFF2-40B4-BE49-F238E27FC236}">
+              <a16:creationId xmlns:a16="http://schemas.microsoft.com/office/drawing/2014/main" id="{C198A786-D87E-095A-07C8-6E5D0DF529C5}"/>
+            </a:ext>
+          </a:extLst>
+        </p:cNvPr>
+        <p:cNvGrpSpPr/>
+        <p:nvPr/>
+      </p:nvGrpSpPr>
+      <p:grpSpPr>
+        <a:xfrm>
+          <a:off x="0" y="0"/>
+          <a:ext cx="0" cy="0"/>
+          <a:chOff x="0" y="0"/>
+          <a:chExt cx="0" cy="0"/>
+        </a:xfrm>
+      </p:grpSpPr>
+      <p:sp>
+        <p:nvSpPr>
+          <p:cNvPr id="2" name="Title 1">
+            <a:extLst>
+              <a:ext uri="{FF2B5EF4-FFF2-40B4-BE49-F238E27FC236}">
+                <a16:creationId xmlns:a16="http://schemas.microsoft.com/office/drawing/2014/main" id="{5E9F721E-65BD-F7CA-F2B8-3A95581AD809}"/>
+              </a:ext>
+            </a:extLst>
+          </p:cNvPr>
+          <p:cNvSpPr>
+            <a:spLocks noGrp="1"/>
+          </p:cNvSpPr>
+          <p:nvPr>
+            <p:ph type="title"/>
+          </p:nvPr>
+        </p:nvSpPr>
+        <p:spPr/>
+        <p:txBody>
+          <a:bodyPr/>
+          <a:lstStyle/>
+          <a:p>
+            <a:pPr algn="r" rtl="1"/>
+            <a:r>
+              <a:rPr lang="he-IL" dirty="0">
+                <a:cs typeface="+mn-cs"/>
+              </a:rPr>
+              <a:t>מנגנון ההמלצה</a:t>
+            </a:r>
+            <a:endParaRPr lang="en-GB" dirty="0">
+              <a:cs typeface="+mn-cs"/>
+            </a:endParaRPr>
+          </a:p>
+        </p:txBody>
+      </p:sp>
+      <p:sp>
+        <p:nvSpPr>
+          <p:cNvPr id="3" name="Content Placeholder 2">
+            <a:extLst>
+              <a:ext uri="{FF2B5EF4-FFF2-40B4-BE49-F238E27FC236}">
+                <a16:creationId xmlns:a16="http://schemas.microsoft.com/office/drawing/2014/main" id="{40C31FDB-DB6F-07AC-EE79-44C2050586D9}"/>
+              </a:ext>
+            </a:extLst>
+          </p:cNvPr>
+          <p:cNvSpPr>
+            <a:spLocks noGrp="1"/>
+          </p:cNvSpPr>
+          <p:nvPr>
+            <p:ph idx="1"/>
+          </p:nvPr>
+        </p:nvSpPr>
+        <p:spPr/>
+        <p:txBody>
+          <a:bodyPr/>
+          <a:lstStyle/>
+          <a:p>
+            <a:pPr algn="r" rtl="1"/>
+            <a:r>
+              <a:rPr lang="he-IL" b="1" dirty="0"/>
+              <a:t>סינון מבוסס אילוצים: </a:t>
+            </a:r>
+            <a:r>
+              <a:rPr lang="he-IL" dirty="0"/>
+              <a:t>המערכת תפעיל תחילה סינון קשיח כדי למנוע "סטיות קטגוריה".</a:t>
+            </a:r>
+          </a:p>
+          <a:p>
+            <a:pPr algn="r" rtl="1"/>
+            <a:r>
+              <a:rPr lang="he-IL" b="1" dirty="0"/>
+              <a:t>מנוע המלצה מבוסס תוכן: </a:t>
+            </a:r>
+            <a:r>
+              <a:rPr lang="he-IL" dirty="0"/>
+              <a:t>ייצוג כל מוצר כווקטור תכונות הכולל ערכים תזונתיים (קלוריות, פחמימות, חלבונים), מחיר ורכיבים.</a:t>
+            </a:r>
+          </a:p>
+          <a:p>
+            <a:pPr algn="r" rtl="1"/>
+            <a:r>
+              <a:rPr lang="he-IL" b="1" dirty="0"/>
+              <a:t>חישוב דמיון: </a:t>
+            </a:r>
+            <a:r>
+              <a:rPr lang="he-IL" dirty="0"/>
+              <a:t>נחשב את הדימיון בין המוצרים ונציע ללקוח את הדברים שהכי קרובים אליהם ועונים על הצרכים שלהם.</a:t>
+            </a:r>
+            <a:endParaRPr lang="en-GB" dirty="0"/>
+          </a:p>
+        </p:txBody>
+      </p:sp>
+    </p:spTree>
+    <p:extLst>
+      <p:ext uri="{BB962C8B-B14F-4D97-AF65-F5344CB8AC3E}">
+        <p14:creationId xmlns:p14="http://schemas.microsoft.com/office/powerpoint/2010/main" val="760119052"/>
       </p:ext>
     </p:extLst>
   </p:cSld>
